--- a/static/ppts/G6_Sci_T4_Human_Impact.pptx
+++ b/static/ppts/G6_Sci_T4_Human_Impact.pptx
@@ -9,11 +9,9 @@
     <p:sldId id="257" r:id="rId3"/>
     <p:sldId id="258" r:id="rId4"/>
     <p:sldId id="259" r:id="rId5"/>
-    <p:sldId id="260" r:id="rId6"/>
-    <p:sldId id="261" r:id="rId7"/>
   </p:sldIdLst>
   <p:notesMasterIdLst>
-    <p:notesMasterId r:id="rId8"/>
+    <p:notesMasterId r:id="rId6"/>
   </p:notesMasterIdLst>
   <p:sldSz cx="9144000" cy="5143500"/>
   <p:notesSz cx="5143500" cy="9144000"/>
@@ -813,182 +811,6 @@
 </p:notes>
 </file>
 
-<file path=ppt/notesSlides/notesSlide5.xml><?xml version="1.0" encoding="utf-8"?>
-<p:notes xmlns:a="http://schemas.openxmlformats.org/drawingml/2006/main" xmlns:r="http://schemas.openxmlformats.org/officeDocument/2006/relationships" xmlns:p="http://schemas.openxmlformats.org/presentationml/2006/main">
-  <p:cSld>
-    <p:spTree>
-      <p:nvGrpSpPr>
-        <p:cNvPr id="1" name=""/>
-        <p:cNvGrpSpPr/>
-        <p:nvPr/>
-      </p:nvGrpSpPr>
-      <p:grpSpPr>
-        <a:xfrm>
-          <a:off x="0" y="0"/>
-          <a:ext cx="0" cy="0"/>
-          <a:chOff x="0" y="0"/>
-          <a:chExt cx="0" cy="0"/>
-        </a:xfrm>
-      </p:grpSpPr>
-      <p:sp>
-        <p:nvSpPr>
-          <p:cNvPr id="2" name="Slide Image Placeholder 1"/>
-          <p:cNvSpPr>
-            <a:spLocks noGrp="1" noRot="1" noChangeAspect="1"/>
-          </p:cNvSpPr>
-          <p:nvPr>
-            <p:ph type="sldImg"/>
-          </p:nvPr>
-        </p:nvSpPr>
-        <p:spPr/>
-      </p:sp>
-      <p:sp>
-        <p:nvSpPr>
-          <p:cNvPr id="3" name="Notes Placeholder 2"/>
-          <p:cNvSpPr>
-            <a:spLocks noGrp="1"/>
-          </p:cNvSpPr>
-          <p:nvPr>
-            <p:ph type="body" idx="1"/>
-          </p:nvPr>
-        </p:nvSpPr>
-        <p:spPr/>
-        <p:txBody>
-          <a:bodyPr/>
-          <a:lstStyle/>
-          <a:p>
-            <a:r>
-              <a:rPr lang="en-US" dirty="0"/>
-              <a:t/>
-            </a:r>
-            <a:endParaRPr lang="en-US" dirty="0"/>
-          </a:p>
-        </p:txBody>
-      </p:sp>
-      <p:sp>
-        <p:nvSpPr>
-          <p:cNvPr id="4" name="Slide Number Placeholder 3"/>
-          <p:cNvSpPr>
-            <a:spLocks noGrp="1"/>
-          </p:cNvSpPr>
-          <p:nvPr>
-            <p:ph type="sldNum" sz="quarter" idx="10"/>
-          </p:nvPr>
-        </p:nvSpPr>
-        <p:spPr/>
-        <p:txBody>
-          <a:bodyPr/>
-          <a:lstStyle/>
-          <a:p>
-            <a:fld id="{F7021451-1387-4CA6-816F-3879F97B5CBC}" type="slidenum">
-              <a:rPr lang="en-US"/>
-              <a:t>5</a:t>
-            </a:fld>
-            <a:endParaRPr lang="en-US"/>
-          </a:p>
-        </p:txBody>
-      </p:sp>
-    </p:spTree>
-    <p:extLst>
-      <p:ext uri="{BB962C8B-B14F-4D97-AF65-F5344CB8AC3E}">
-        <p14:creationId xmlns:p14="http://schemas.microsoft.com/office/powerpoint/2010/main" val="1024086991"/>
-      </p:ext>
-    </p:extLst>
-  </p:cSld>
-  <p:clrMapOvr>
-    <a:masterClrMapping/>
-  </p:clrMapOvr>
-</p:notes>
-</file>
-
-<file path=ppt/notesSlides/notesSlide6.xml><?xml version="1.0" encoding="utf-8"?>
-<p:notes xmlns:a="http://schemas.openxmlformats.org/drawingml/2006/main" xmlns:r="http://schemas.openxmlformats.org/officeDocument/2006/relationships" xmlns:p="http://schemas.openxmlformats.org/presentationml/2006/main">
-  <p:cSld>
-    <p:spTree>
-      <p:nvGrpSpPr>
-        <p:cNvPr id="1" name=""/>
-        <p:cNvGrpSpPr/>
-        <p:nvPr/>
-      </p:nvGrpSpPr>
-      <p:grpSpPr>
-        <a:xfrm>
-          <a:off x="0" y="0"/>
-          <a:ext cx="0" cy="0"/>
-          <a:chOff x="0" y="0"/>
-          <a:chExt cx="0" cy="0"/>
-        </a:xfrm>
-      </p:grpSpPr>
-      <p:sp>
-        <p:nvSpPr>
-          <p:cNvPr id="2" name="Slide Image Placeholder 1"/>
-          <p:cNvSpPr>
-            <a:spLocks noGrp="1" noRot="1" noChangeAspect="1"/>
-          </p:cNvSpPr>
-          <p:nvPr>
-            <p:ph type="sldImg"/>
-          </p:nvPr>
-        </p:nvSpPr>
-        <p:spPr/>
-      </p:sp>
-      <p:sp>
-        <p:nvSpPr>
-          <p:cNvPr id="3" name="Notes Placeholder 2"/>
-          <p:cNvSpPr>
-            <a:spLocks noGrp="1"/>
-          </p:cNvSpPr>
-          <p:nvPr>
-            <p:ph type="body" idx="1"/>
-          </p:nvPr>
-        </p:nvSpPr>
-        <p:spPr/>
-        <p:txBody>
-          <a:bodyPr/>
-          <a:lstStyle/>
-          <a:p>
-            <a:r>
-              <a:rPr lang="en-US" dirty="0"/>
-              <a:t/>
-            </a:r>
-            <a:endParaRPr lang="en-US" dirty="0"/>
-          </a:p>
-        </p:txBody>
-      </p:sp>
-      <p:sp>
-        <p:nvSpPr>
-          <p:cNvPr id="4" name="Slide Number Placeholder 3"/>
-          <p:cNvSpPr>
-            <a:spLocks noGrp="1"/>
-          </p:cNvSpPr>
-          <p:nvPr>
-            <p:ph type="sldNum" sz="quarter" idx="10"/>
-          </p:nvPr>
-        </p:nvSpPr>
-        <p:spPr/>
-        <p:txBody>
-          <a:bodyPr/>
-          <a:lstStyle/>
-          <a:p>
-            <a:fld id="{F7021451-1387-4CA6-816F-3879F97B5CBC}" type="slidenum">
-              <a:rPr lang="en-US"/>
-              <a:t>6</a:t>
-            </a:fld>
-            <a:endParaRPr lang="en-US"/>
-          </a:p>
-        </p:txBody>
-      </p:sp>
-    </p:spTree>
-    <p:extLst>
-      <p:ext uri="{BB962C8B-B14F-4D97-AF65-F5344CB8AC3E}">
-        <p14:creationId xmlns:p14="http://schemas.microsoft.com/office/powerpoint/2010/main" val="1024086991"/>
-      </p:ext>
-    </p:extLst>
-  </p:cSld>
-  <p:clrMapOvr>
-    <a:masterClrMapping/>
-  </p:clrMapOvr>
-</p:notes>
-</file>
-
 <file path=ppt/slideLayouts/slideLayout1.xml><?xml version="1.0" encoding="utf-8"?>
 <p:sldLayout xmlns:a="http://schemas.openxmlformats.org/drawingml/2006/main" xmlns:r="http://schemas.openxmlformats.org/officeDocument/2006/relationships" xmlns:p="http://schemas.openxmlformats.org/presentationml/2006/main" preserve="1">
   <p:cSld name="DEFAULT">
@@ -1302,7 +1124,7 @@
     <p:bg>
       <p:bgPr>
         <a:solidFill>
-          <a:srgbClr val="2D8F3F"/>
+          <a:srgbClr val="1B2A4A"/>
         </a:solidFill>
       </p:bgPr>
     </p:bg>
@@ -1322,14 +1144,34 @@
       </p:grpSpPr>
       <p:sp>
         <p:nvSpPr>
-          <p:cNvPr id="2" name="Text 0"/>
+          <p:cNvPr id="2" name="Shape 0"/>
           <p:cNvSpPr/>
           <p:nvPr/>
         </p:nvSpPr>
         <p:spPr>
           <a:xfrm>
-            <a:off x="731520" y="1371600"/>
-            <a:ext cx="7680960" cy="1371600"/>
+            <a:off x="0" y="0"/>
+            <a:ext cx="109728" cy="5143500"/>
+          </a:xfrm>
+          <a:prstGeom prst="rect">
+            <a:avLst/>
+          </a:prstGeom>
+          <a:solidFill>
+            <a:srgbClr val="2A9D8F"/>
+          </a:solidFill>
+          <a:ln/>
+        </p:spPr>
+      </p:sp>
+      <p:sp>
+        <p:nvSpPr>
+          <p:cNvPr id="3" name="Text 1"/>
+          <p:cNvSpPr/>
+          <p:nvPr/>
+        </p:nvSpPr>
+        <p:spPr>
+          <a:xfrm>
+            <a:off x="731520" y="1280160"/>
+            <a:ext cx="7772400" cy="1371600"/>
           </a:xfrm>
           <a:prstGeom prst="rect">
             <a:avLst/>
@@ -1345,30 +1187,69 @@
               <a:buNone/>
             </a:pPr>
             <a:r>
-              <a:rPr lang="en-US" sz="4000" b="1" dirty="0">
+              <a:rPr lang="en-US" sz="3600" b="1" dirty="0">
                 <a:solidFill>
                   <a:srgbClr val="FFFFFF"/>
+                </a:solidFill>
+                <a:latin typeface="Georgia" pitchFamily="34" charset="0"/>
+                <a:ea typeface="Georgia" pitchFamily="34" charset="-122"/>
+                <a:cs typeface="Georgia" pitchFamily="34" charset="-120"/>
+              </a:rPr>
+              <a:t>Human Impact on Ecosystems</a:t>
+            </a:r>
+            <a:endParaRPr lang="en-US" sz="3600" dirty="0"/>
+          </a:p>
+        </p:txBody>
+      </p:sp>
+      <p:sp>
+        <p:nvSpPr>
+          <p:cNvPr id="4" name="Text 2"/>
+          <p:cNvSpPr/>
+          <p:nvPr/>
+        </p:nvSpPr>
+        <p:spPr>
+          <a:xfrm>
+            <a:off x="731520" y="2743200"/>
+            <a:ext cx="7772400" cy="548640"/>
+          </a:xfrm>
+          <a:prstGeom prst="rect">
+            <a:avLst/>
+          </a:prstGeom>
+          <a:noFill/>
+          <a:ln/>
+        </p:spPr>
+        <p:txBody>
+          <a:bodyPr wrap="square" rtlCol="0" anchor="ctr"/>
+          <a:lstStyle/>
+          <a:p>
+            <a:pPr indent="0" marL="0">
+              <a:buNone/>
+            </a:pPr>
+            <a:r>
+              <a:rPr lang="en-US" sz="1600" dirty="0">
+                <a:solidFill>
+                  <a:srgbClr val="9B9690"/>
                 </a:solidFill>
                 <a:latin typeface="Calibri" pitchFamily="34" charset="0"/>
                 <a:ea typeface="Calibri" pitchFamily="34" charset="-122"/>
                 <a:cs typeface="Calibri" pitchFamily="34" charset="-120"/>
               </a:rPr>
-              <a:t>Human Impact on Ecosystems</a:t>
-            </a:r>
-            <a:endParaRPr lang="en-US" sz="4000" dirty="0"/>
-          </a:p>
-        </p:txBody>
-      </p:sp>
-      <p:sp>
-        <p:nvSpPr>
-          <p:cNvPr id="3" name="Text 1"/>
+              <a:t>G6 Science · Ecology</a:t>
+            </a:r>
+            <a:endParaRPr lang="en-US" sz="1600" dirty="0"/>
+          </a:p>
+        </p:txBody>
+      </p:sp>
+      <p:sp>
+        <p:nvSpPr>
+          <p:cNvPr id="5" name="Text 3"/>
           <p:cNvSpPr/>
           <p:nvPr/>
         </p:nvSpPr>
         <p:spPr>
           <a:xfrm>
-            <a:off x="731520" y="2926080"/>
-            <a:ext cx="7680960" cy="548640"/>
+            <a:off x="731520" y="4389120"/>
+            <a:ext cx="7772400" cy="457200"/>
           </a:xfrm>
           <a:prstGeom prst="rect">
             <a:avLst/>
@@ -1384,17 +1265,17 @@
               <a:buNone/>
             </a:pPr>
             <a:r>
-              <a:rPr lang="en-US" sz="1600" i="1" dirty="0">
-                <a:solidFill>
-                  <a:srgbClr val="FFFFFF"/>
+              <a:rPr lang="en-US" sz="1000" dirty="0">
+                <a:solidFill>
+                  <a:srgbClr val="6B6660"/>
                 </a:solidFill>
                 <a:latin typeface="Calibri" pitchFamily="34" charset="0"/>
                 <a:ea typeface="Calibri" pitchFamily="34" charset="-122"/>
                 <a:cs typeface="Calibri" pitchFamily="34" charset="-120"/>
               </a:rPr>
-              <a:t>Grade 6 Science · Mr Zocchi</a:t>
-            </a:r>
-            <a:endParaRPr lang="en-US" sz="1600" dirty="0"/>
+              <a:t>Mr Zocchi · mrzocchi.com</a:t>
+            </a:r>
+            <a:endParaRPr lang="en-US" sz="1000" dirty="0"/>
           </a:p>
         </p:txBody>
       </p:sp>
@@ -1409,6 +1290,13 @@
 <file path=ppt/slides/slide2.xml><?xml version="1.0" encoding="utf-8"?>
 <p:sld xmlns:a="http://schemas.openxmlformats.org/drawingml/2006/main" xmlns:r="http://schemas.openxmlformats.org/officeDocument/2006/relationships" xmlns:p="http://schemas.openxmlformats.org/presentationml/2006/main">
   <p:cSld name="Slide 2">
+    <p:bg>
+      <p:bgPr>
+        <a:solidFill>
+          <a:srgbClr val="FFFFFF"/>
+        </a:solidFill>
+      </p:bgPr>
+    </p:bg>
     <p:spTree>
       <p:nvGrpSpPr>
         <p:cNvPr id="1" name=""/>
@@ -1432,13 +1320,13 @@
         <p:spPr>
           <a:xfrm>
             <a:off x="0" y="0"/>
-            <a:ext cx="9144000" cy="548640"/>
-          </a:xfrm>
-          <a:prstGeom prst="rect">
-            <a:avLst/>
-          </a:prstGeom>
-          <a:solidFill>
-            <a:srgbClr val="2D8F3F"/>
+            <a:ext cx="9144000" cy="54864"/>
+          </a:xfrm>
+          <a:prstGeom prst="rect">
+            <a:avLst/>
+          </a:prstGeom>
+          <a:solidFill>
+            <a:srgbClr val="2A9D8F"/>
           </a:solidFill>
           <a:ln/>
         </p:spPr>
@@ -1451,8 +1339,8 @@
         </p:nvSpPr>
         <p:spPr>
           <a:xfrm>
-            <a:off x="457200" y="45720"/>
-            <a:ext cx="8229600" cy="457200"/>
+            <a:off x="548640" y="274320"/>
+            <a:ext cx="8046720" cy="640080"/>
           </a:xfrm>
           <a:prstGeom prst="rect">
             <a:avLst/>
@@ -1461,86 +1349,151 @@
           <a:ln/>
         </p:spPr>
         <p:txBody>
-          <a:bodyPr wrap="square" rtlCol="0" anchor="ctr"/>
+          <a:bodyPr wrap="square" lIns="0" tIns="0" rIns="0" bIns="0" rtlCol="0" anchor="ctr"/>
           <a:lstStyle/>
           <a:p>
             <a:pPr indent="0" marL="0">
               <a:buNone/>
             </a:pPr>
             <a:r>
-              <a:rPr lang="en-US" sz="1800" b="1" dirty="0">
-                <a:solidFill>
-                  <a:srgbClr val="FFFFFF"/>
+              <a:rPr lang="en-US" sz="2600" b="1" dirty="0">
+                <a:solidFill>
+                  <a:srgbClr val="1B2A4A"/>
+                </a:solidFill>
+                <a:latin typeface="Georgia" pitchFamily="34" charset="0"/>
+                <a:ea typeface="Georgia" pitchFamily="34" charset="-122"/>
+                <a:cs typeface="Georgia" pitchFamily="34" charset="-120"/>
+              </a:rPr>
+              <a:t>How Humans Affect Ecosystems</a:t>
+            </a:r>
+            <a:endParaRPr lang="en-US" sz="2600" dirty="0"/>
+          </a:p>
+        </p:txBody>
+      </p:sp>
+      <p:sp>
+        <p:nvSpPr>
+          <p:cNvPr id="4" name="Text 2"/>
+          <p:cNvSpPr/>
+          <p:nvPr/>
+        </p:nvSpPr>
+        <p:spPr>
+          <a:xfrm>
+            <a:off x="548640" y="1097280"/>
+            <a:ext cx="8046720" cy="3474720"/>
+          </a:xfrm>
+          <a:prstGeom prst="rect">
+            <a:avLst/>
+          </a:prstGeom>
+          <a:noFill/>
+          <a:ln/>
+        </p:spPr>
+        <p:txBody>
+          <a:bodyPr wrap="square" rtlCol="0" anchor="t"/>
+          <a:lstStyle/>
+          <a:p>
+            <a:pPr marL="342900" indent="-342900">
+              <a:spcAft>
+                <a:spcPts val="800"/>
+              </a:spcAft>
+              <a:buSzPct val="100000"/>
+              <a:buChar char="•"/>
+            </a:pPr>
+            <a:r>
+              <a:rPr lang="en-US" sz="1500" dirty="0">
+                <a:solidFill>
+                  <a:srgbClr val="3D3A36"/>
                 </a:solidFill>
                 <a:latin typeface="Calibri" pitchFamily="34" charset="0"/>
                 <a:ea typeface="Calibri" pitchFamily="34" charset="-122"/>
                 <a:cs typeface="Calibri" pitchFamily="34" charset="-120"/>
               </a:rPr>
-              <a:t>Deforestation</a:t>
-            </a:r>
-            <a:endParaRPr lang="en-US" sz="1800" dirty="0"/>
-          </a:p>
-        </p:txBody>
-      </p:sp>
-      <p:sp>
-        <p:nvSpPr>
-          <p:cNvPr id="4" name="Text 2"/>
-          <p:cNvSpPr/>
-          <p:nvPr/>
-        </p:nvSpPr>
-        <p:spPr>
-          <a:xfrm>
-            <a:off x="731520" y="1097280"/>
-            <a:ext cx="7680960" cy="3200400"/>
-          </a:xfrm>
-          <a:prstGeom prst="rect">
-            <a:avLst/>
-          </a:prstGeom>
-          <a:noFill/>
-          <a:ln/>
-        </p:spPr>
-        <p:txBody>
-          <a:bodyPr wrap="square" rtlCol="0" anchor="ctr"/>
-          <a:lstStyle/>
-          <a:p>
-            <a:pPr indent="0" marL="0">
-              <a:buNone/>
-            </a:pPr>
-            <a:r>
-              <a:rPr lang="en-US" sz="1600" dirty="0">
-                <a:solidFill>
-                  <a:srgbClr val="363636"/>
+              <a:t>DEFORESTATION: cutting forests destroys habitats and releases CO₂</a:t>
+            </a:r>
+            <a:endParaRPr lang="en-US" sz="1500" dirty="0"/>
+          </a:p>
+          <a:p>
+            <a:pPr marL="342900" indent="-342900">
+              <a:spcAft>
+                <a:spcPts val="800"/>
+              </a:spcAft>
+              <a:buSzPct val="100000"/>
+              <a:buChar char="•"/>
+            </a:pPr>
+            <a:r>
+              <a:rPr lang="en-US" sz="1500" dirty="0">
+                <a:solidFill>
+                  <a:srgbClr val="3D3A36"/>
                 </a:solidFill>
                 <a:latin typeface="Calibri" pitchFamily="34" charset="0"/>
                 <a:ea typeface="Calibri" pitchFamily="34" charset="-122"/>
                 <a:cs typeface="Calibri" pitchFamily="34" charset="-120"/>
               </a:rPr>
-              <a:t>Content for: Deforestation</a:t>
-            </a:r>
-            <a:endParaRPr lang="en-US" sz="1600" dirty="0"/>
-          </a:p>
-          <a:p>
-            <a:pPr indent="0" marL="0">
-              <a:buNone/>
-            </a:pPr>
-            <a:endParaRPr lang="en-US" sz="1600" dirty="0"/>
-          </a:p>
-          <a:p>
-            <a:pPr indent="0" marL="0">
-              <a:buNone/>
-            </a:pPr>
-            <a:r>
-              <a:rPr lang="en-US" sz="1600" dirty="0">
-                <a:solidFill>
-                  <a:srgbClr val="363636"/>
+              <a:t>POLLUTION: air, water, and land pollution harm organisms</a:t>
+            </a:r>
+            <a:endParaRPr lang="en-US" sz="1500" dirty="0"/>
+          </a:p>
+          <a:p>
+            <a:pPr marL="342900" indent="-342900">
+              <a:spcAft>
+                <a:spcPts val="800"/>
+              </a:spcAft>
+              <a:buSzPct val="100000"/>
+              <a:buChar char="•"/>
+            </a:pPr>
+            <a:r>
+              <a:rPr lang="en-US" sz="1500" dirty="0">
+                <a:solidFill>
+                  <a:srgbClr val="3D3A36"/>
                 </a:solidFill>
                 <a:latin typeface="Calibri" pitchFamily="34" charset="0"/>
                 <a:ea typeface="Calibri" pitchFamily="34" charset="-122"/>
                 <a:cs typeface="Calibri" pitchFamily="34" charset="-120"/>
               </a:rPr>
-              <a:t>Key points will be covered in class.</a:t>
-            </a:r>
-            <a:endParaRPr lang="en-US" sz="1600" dirty="0"/>
+              <a:t>OVERFISHING: removing too many fish disrupts food webs</a:t>
+            </a:r>
+            <a:endParaRPr lang="en-US" sz="1500" dirty="0"/>
+          </a:p>
+          <a:p>
+            <a:pPr marL="342900" indent="-342900">
+              <a:spcAft>
+                <a:spcPts val="800"/>
+              </a:spcAft>
+              <a:buSzPct val="100000"/>
+              <a:buChar char="•"/>
+            </a:pPr>
+            <a:r>
+              <a:rPr lang="en-US" sz="1500" dirty="0">
+                <a:solidFill>
+                  <a:srgbClr val="3D3A36"/>
+                </a:solidFill>
+                <a:latin typeface="Calibri" pitchFamily="34" charset="0"/>
+                <a:ea typeface="Calibri" pitchFamily="34" charset="-122"/>
+                <a:cs typeface="Calibri" pitchFamily="34" charset="-120"/>
+              </a:rPr>
+              <a:t>CLIMATE CHANGE: rising temperatures shift habitats and seasons</a:t>
+            </a:r>
+            <a:endParaRPr lang="en-US" sz="1500" dirty="0"/>
+          </a:p>
+          <a:p>
+            <a:pPr marL="342900" indent="-342900">
+              <a:spcAft>
+                <a:spcPts val="800"/>
+              </a:spcAft>
+              <a:buSzPct val="100000"/>
+              <a:buChar char="•"/>
+            </a:pPr>
+            <a:r>
+              <a:rPr lang="en-US" sz="1500" dirty="0">
+                <a:solidFill>
+                  <a:srgbClr val="3D3A36"/>
+                </a:solidFill>
+                <a:latin typeface="Calibri" pitchFamily="34" charset="0"/>
+                <a:ea typeface="Calibri" pitchFamily="34" charset="-122"/>
+                <a:cs typeface="Calibri" pitchFamily="34" charset="-120"/>
+              </a:rPr>
+              <a:t>URBANISATION: building cities replaces natural habitats</a:t>
+            </a:r>
+            <a:endParaRPr lang="en-US" sz="1500" dirty="0"/>
           </a:p>
         </p:txBody>
       </p:sp>
@@ -1552,8 +1505,8 @@
         </p:nvSpPr>
         <p:spPr>
           <a:xfrm>
-            <a:off x="7772400" y="4663440"/>
-            <a:ext cx="1097280" cy="365760"/>
+            <a:off x="548640" y="4800600"/>
+            <a:ext cx="3657600" cy="274320"/>
           </a:xfrm>
           <a:prstGeom prst="rect">
             <a:avLst/>
@@ -1565,21 +1518,18 @@
           <a:bodyPr wrap="square" rtlCol="0" anchor="ctr"/>
           <a:lstStyle/>
           <a:p>
-            <a:pPr algn="r" indent="0" marL="0">
+            <a:pPr indent="0" marL="0">
               <a:buNone/>
             </a:pPr>
             <a:r>
-              <a:rPr lang="en-US" sz="1000" dirty="0">
-                <a:solidFill>
-                  <a:srgbClr val="999999"/>
-                </a:solidFill>
-                <a:latin typeface="Calibri" pitchFamily="34" charset="0"/>
-                <a:ea typeface="Calibri" pitchFamily="34" charset="-122"/>
-                <a:cs typeface="Calibri" pitchFamily="34" charset="-120"/>
-              </a:rPr>
-              <a:t>2 / 6</a:t>
-            </a:r>
-            <a:endParaRPr lang="en-US" sz="1000" dirty="0"/>
+              <a:rPr lang="en-US" sz="800" dirty="0">
+                <a:solidFill>
+                  <a:srgbClr val="9B9690"/>
+                </a:solidFill>
+              </a:rPr>
+              <a:t>mrzocchi.com</a:t>
+            </a:r>
+            <a:endParaRPr lang="en-US" sz="800" dirty="0"/>
           </a:p>
         </p:txBody>
       </p:sp>
@@ -1594,6 +1544,13 @@
 <file path=ppt/slides/slide3.xml><?xml version="1.0" encoding="utf-8"?>
 <p:sld xmlns:a="http://schemas.openxmlformats.org/drawingml/2006/main" xmlns:r="http://schemas.openxmlformats.org/officeDocument/2006/relationships" xmlns:p="http://schemas.openxmlformats.org/presentationml/2006/main">
   <p:cSld name="Slide 3">
+    <p:bg>
+      <p:bgPr>
+        <a:solidFill>
+          <a:srgbClr val="FFFFFF"/>
+        </a:solidFill>
+      </p:bgPr>
+    </p:bg>
     <p:spTree>
       <p:nvGrpSpPr>
         <p:cNvPr id="1" name=""/>
@@ -1617,13 +1574,13 @@
         <p:spPr>
           <a:xfrm>
             <a:off x="0" y="0"/>
-            <a:ext cx="9144000" cy="548640"/>
-          </a:xfrm>
-          <a:prstGeom prst="rect">
-            <a:avLst/>
-          </a:prstGeom>
-          <a:solidFill>
-            <a:srgbClr val="2D8F3F"/>
+            <a:ext cx="9144000" cy="54864"/>
+          </a:xfrm>
+          <a:prstGeom prst="rect">
+            <a:avLst/>
+          </a:prstGeom>
+          <a:solidFill>
+            <a:srgbClr val="2A9D8F"/>
           </a:solidFill>
           <a:ln/>
         </p:spPr>
@@ -1636,8 +1593,8 @@
         </p:nvSpPr>
         <p:spPr>
           <a:xfrm>
-            <a:off x="457200" y="45720"/>
-            <a:ext cx="8229600" cy="457200"/>
+            <a:off x="548640" y="274320"/>
+            <a:ext cx="8046720" cy="640080"/>
           </a:xfrm>
           <a:prstGeom prst="rect">
             <a:avLst/>
@@ -1646,6 +1603,72 @@
           <a:ln/>
         </p:spPr>
         <p:txBody>
+          <a:bodyPr wrap="square" lIns="0" tIns="0" rIns="0" bIns="0" rtlCol="0" anchor="ctr"/>
+          <a:lstStyle/>
+          <a:p>
+            <a:pPr indent="0" marL="0">
+              <a:buNone/>
+            </a:pPr>
+            <a:r>
+              <a:rPr lang="en-US" sz="2600" b="1" dirty="0">
+                <a:solidFill>
+                  <a:srgbClr val="1B2A4A"/>
+                </a:solidFill>
+                <a:latin typeface="Georgia" pitchFamily="34" charset="0"/>
+                <a:ea typeface="Georgia" pitchFamily="34" charset="-122"/>
+                <a:cs typeface="Georgia" pitchFamily="34" charset="-120"/>
+              </a:rPr>
+              <a:t>Problems &amp; Solutions</a:t>
+            </a:r>
+            <a:endParaRPr lang="en-US" sz="2600" dirty="0"/>
+          </a:p>
+        </p:txBody>
+      </p:sp>
+      <p:sp>
+        <p:nvSpPr>
+          <p:cNvPr id="4" name="Shape 2"/>
+          <p:cNvSpPr/>
+          <p:nvPr/>
+        </p:nvSpPr>
+        <p:spPr>
+          <a:xfrm>
+            <a:off x="457200" y="1097280"/>
+            <a:ext cx="3840480" cy="3474720"/>
+          </a:xfrm>
+          <a:prstGeom prst="rect">
+            <a:avLst/>
+          </a:prstGeom>
+          <a:solidFill>
+            <a:srgbClr val="F3F1EE"/>
+          </a:solidFill>
+          <a:ln/>
+          <a:effectLst>
+            <a:outerShdw sx="100000" sy="100000" kx="0" ky="0" algn="bl" rotWithShape="0" blurRad="50800" dist="25400" dir="8100000">
+              <a:srgbClr val="000000">
+                <a:alpha val="10000"/>
+              </a:srgbClr>
+            </a:outerShdw>
+          </a:effectLst>
+        </p:spPr>
+      </p:sp>
+      <p:sp>
+        <p:nvSpPr>
+          <p:cNvPr id="5" name="Text 3"/>
+          <p:cNvSpPr/>
+          <p:nvPr/>
+        </p:nvSpPr>
+        <p:spPr>
+          <a:xfrm>
+            <a:off x="640080" y="1234440"/>
+            <a:ext cx="3474720" cy="411480"/>
+          </a:xfrm>
+          <a:prstGeom prst="rect">
+            <a:avLst/>
+          </a:prstGeom>
+          <a:noFill/>
+          <a:ln/>
+        </p:spPr>
+        <p:txBody>
           <a:bodyPr wrap="square" rtlCol="0" anchor="ctr"/>
           <a:lstStyle/>
           <a:p>
@@ -1653,118 +1676,352 @@
               <a:buNone/>
             </a:pPr>
             <a:r>
-              <a:rPr lang="en-US" sz="1800" b="1" dirty="0">
-                <a:solidFill>
-                  <a:srgbClr val="FFFFFF"/>
+              <a:rPr lang="en-US" sz="1600" b="1" dirty="0">
+                <a:solidFill>
+                  <a:srgbClr val="1B2A4A"/>
+                </a:solidFill>
+                <a:latin typeface="Georgia" pitchFamily="34" charset="0"/>
+                <a:ea typeface="Georgia" pitchFamily="34" charset="-122"/>
+                <a:cs typeface="Georgia" pitchFamily="34" charset="-120"/>
+              </a:rPr>
+              <a:t>The Problems</a:t>
+            </a:r>
+            <a:endParaRPr lang="en-US" sz="1600" dirty="0"/>
+          </a:p>
+        </p:txBody>
+      </p:sp>
+      <p:sp>
+        <p:nvSpPr>
+          <p:cNvPr id="6" name="Text 4"/>
+          <p:cNvSpPr/>
+          <p:nvPr/>
+        </p:nvSpPr>
+        <p:spPr>
+          <a:xfrm>
+            <a:off x="640080" y="1737360"/>
+            <a:ext cx="3474720" cy="2651760"/>
+          </a:xfrm>
+          <a:prstGeom prst="rect">
+            <a:avLst/>
+          </a:prstGeom>
+          <a:noFill/>
+          <a:ln/>
+        </p:spPr>
+        <p:txBody>
+          <a:bodyPr wrap="square" rtlCol="0" anchor="t"/>
+          <a:lstStyle/>
+          <a:p>
+            <a:pPr marL="342900" indent="-342900">
+              <a:spcAft>
+                <a:spcPts val="600"/>
+              </a:spcAft>
+              <a:buSzPct val="100000"/>
+              <a:buChar char="•"/>
+            </a:pPr>
+            <a:r>
+              <a:rPr lang="en-US" sz="1300" dirty="0">
+                <a:solidFill>
+                  <a:srgbClr val="3D3A36"/>
                 </a:solidFill>
                 <a:latin typeface="Calibri" pitchFamily="34" charset="0"/>
                 <a:ea typeface="Calibri" pitchFamily="34" charset="-122"/>
                 <a:cs typeface="Calibri" pitchFamily="34" charset="-120"/>
               </a:rPr>
-              <a:t>Pollution (air, water, land)</a:t>
-            </a:r>
-            <a:endParaRPr lang="en-US" sz="1800" dirty="0"/>
-          </a:p>
-        </p:txBody>
-      </p:sp>
-      <p:sp>
-        <p:nvSpPr>
-          <p:cNvPr id="4" name="Text 2"/>
-          <p:cNvSpPr/>
-          <p:nvPr/>
-        </p:nvSpPr>
-        <p:spPr>
-          <a:xfrm>
-            <a:off x="731520" y="1097280"/>
-            <a:ext cx="7680960" cy="3200400"/>
-          </a:xfrm>
-          <a:prstGeom prst="rect">
-            <a:avLst/>
-          </a:prstGeom>
-          <a:noFill/>
-          <a:ln/>
-        </p:spPr>
-        <p:txBody>
-          <a:bodyPr wrap="square" rtlCol="0" anchor="ctr"/>
-          <a:lstStyle/>
-          <a:p>
-            <a:pPr indent="0" marL="0">
-              <a:buNone/>
-            </a:pPr>
-            <a:r>
-              <a:rPr lang="en-US" sz="1600" dirty="0">
-                <a:solidFill>
-                  <a:srgbClr val="363636"/>
+              <a:t>Habitat loss from deforestation</a:t>
+            </a:r>
+            <a:endParaRPr lang="en-US" sz="1300" dirty="0"/>
+          </a:p>
+          <a:p>
+            <a:pPr marL="342900" indent="-342900">
+              <a:spcAft>
+                <a:spcPts val="600"/>
+              </a:spcAft>
+              <a:buSzPct val="100000"/>
+              <a:buChar char="•"/>
+            </a:pPr>
+            <a:r>
+              <a:rPr lang="en-US" sz="1300" dirty="0">
+                <a:solidFill>
+                  <a:srgbClr val="3D3A36"/>
                 </a:solidFill>
                 <a:latin typeface="Calibri" pitchFamily="34" charset="0"/>
                 <a:ea typeface="Calibri" pitchFamily="34" charset="-122"/>
                 <a:cs typeface="Calibri" pitchFamily="34" charset="-120"/>
               </a:rPr>
-              <a:t>Content for: Pollution (air, water, land)</a:t>
-            </a:r>
-            <a:endParaRPr lang="en-US" sz="1600" dirty="0"/>
-          </a:p>
-          <a:p>
-            <a:pPr indent="0" marL="0">
-              <a:buNone/>
-            </a:pPr>
-            <a:endParaRPr lang="en-US" sz="1600" dirty="0"/>
-          </a:p>
-          <a:p>
-            <a:pPr indent="0" marL="0">
-              <a:buNone/>
-            </a:pPr>
-            <a:r>
-              <a:rPr lang="en-US" sz="1600" dirty="0">
-                <a:solidFill>
-                  <a:srgbClr val="363636"/>
+              <a:t>Ocean pollution (plastics, oil)</a:t>
+            </a:r>
+            <a:endParaRPr lang="en-US" sz="1300" dirty="0"/>
+          </a:p>
+          <a:p>
+            <a:pPr marL="342900" indent="-342900">
+              <a:spcAft>
+                <a:spcPts val="600"/>
+              </a:spcAft>
+              <a:buSzPct val="100000"/>
+              <a:buChar char="•"/>
+            </a:pPr>
+            <a:r>
+              <a:rPr lang="en-US" sz="1300" dirty="0">
+                <a:solidFill>
+                  <a:srgbClr val="3D3A36"/>
                 </a:solidFill>
                 <a:latin typeface="Calibri" pitchFamily="34" charset="0"/>
                 <a:ea typeface="Calibri" pitchFamily="34" charset="-122"/>
                 <a:cs typeface="Calibri" pitchFamily="34" charset="-120"/>
               </a:rPr>
-              <a:t>Key points will be covered in class.</a:t>
-            </a:r>
-            <a:endParaRPr lang="en-US" sz="1600" dirty="0"/>
-          </a:p>
-        </p:txBody>
-      </p:sp>
-      <p:sp>
-        <p:nvSpPr>
-          <p:cNvPr id="5" name="Text 3"/>
-          <p:cNvSpPr/>
-          <p:nvPr/>
-        </p:nvSpPr>
-        <p:spPr>
-          <a:xfrm>
-            <a:off x="7772400" y="4663440"/>
-            <a:ext cx="1097280" cy="365760"/>
-          </a:xfrm>
-          <a:prstGeom prst="rect">
-            <a:avLst/>
-          </a:prstGeom>
-          <a:noFill/>
-          <a:ln/>
-        </p:spPr>
-        <p:txBody>
-          <a:bodyPr wrap="square" rtlCol="0" anchor="ctr"/>
-          <a:lstStyle/>
-          <a:p>
-            <a:pPr algn="r" indent="0" marL="0">
-              <a:buNone/>
-            </a:pPr>
-            <a:r>
-              <a:rPr lang="en-US" sz="1000" dirty="0">
-                <a:solidFill>
-                  <a:srgbClr val="999999"/>
+              <a:t>Air pollution from burning fossil fuels</a:t>
+            </a:r>
+            <a:endParaRPr lang="en-US" sz="1300" dirty="0"/>
+          </a:p>
+          <a:p>
+            <a:pPr marL="342900" indent="-342900">
+              <a:spcAft>
+                <a:spcPts val="600"/>
+              </a:spcAft>
+              <a:buSzPct val="100000"/>
+              <a:buChar char="•"/>
+            </a:pPr>
+            <a:r>
+              <a:rPr lang="en-US" sz="1300" dirty="0">
+                <a:solidFill>
+                  <a:srgbClr val="3D3A36"/>
                 </a:solidFill>
                 <a:latin typeface="Calibri" pitchFamily="34" charset="0"/>
                 <a:ea typeface="Calibri" pitchFamily="34" charset="-122"/>
                 <a:cs typeface="Calibri" pitchFamily="34" charset="-120"/>
               </a:rPr>
-              <a:t>3 / 6</a:t>
-            </a:r>
-            <a:endParaRPr lang="en-US" sz="1000" dirty="0"/>
+              <a:t>Biodiversity loss — species going extinct</a:t>
+            </a:r>
+            <a:endParaRPr lang="en-US" sz="1300" dirty="0"/>
+          </a:p>
+        </p:txBody>
+      </p:sp>
+      <p:sp>
+        <p:nvSpPr>
+          <p:cNvPr id="7" name="Shape 5"/>
+          <p:cNvSpPr/>
+          <p:nvPr/>
+        </p:nvSpPr>
+        <p:spPr>
+          <a:xfrm>
+            <a:off x="4846320" y="1097280"/>
+            <a:ext cx="3840480" cy="3474720"/>
+          </a:xfrm>
+          <a:prstGeom prst="rect">
+            <a:avLst/>
+          </a:prstGeom>
+          <a:solidFill>
+            <a:srgbClr val="F3F1EE"/>
+          </a:solidFill>
+          <a:ln/>
+          <a:effectLst>
+            <a:outerShdw sx="100000" sy="100000" kx="0" ky="0" algn="bl" rotWithShape="0" blurRad="50800" dist="25400" dir="8100000">
+              <a:srgbClr val="000000">
+                <a:alpha val="10000"/>
+              </a:srgbClr>
+            </a:outerShdw>
+          </a:effectLst>
+        </p:spPr>
+      </p:sp>
+      <p:sp>
+        <p:nvSpPr>
+          <p:cNvPr id="8" name="Text 6"/>
+          <p:cNvSpPr/>
+          <p:nvPr/>
+        </p:nvSpPr>
+        <p:spPr>
+          <a:xfrm>
+            <a:off x="5029200" y="1234440"/>
+            <a:ext cx="3474720" cy="411480"/>
+          </a:xfrm>
+          <a:prstGeom prst="rect">
+            <a:avLst/>
+          </a:prstGeom>
+          <a:noFill/>
+          <a:ln/>
+        </p:spPr>
+        <p:txBody>
+          <a:bodyPr wrap="square" rtlCol="0" anchor="ctr"/>
+          <a:lstStyle/>
+          <a:p>
+            <a:pPr indent="0" marL="0">
+              <a:buNone/>
+            </a:pPr>
+            <a:r>
+              <a:rPr lang="en-US" sz="1600" b="1" dirty="0">
+                <a:solidFill>
+                  <a:srgbClr val="1B2A4A"/>
+                </a:solidFill>
+                <a:latin typeface="Georgia" pitchFamily="34" charset="0"/>
+                <a:ea typeface="Georgia" pitchFamily="34" charset="-122"/>
+                <a:cs typeface="Georgia" pitchFamily="34" charset="-120"/>
+              </a:rPr>
+              <a:t>What We Can Do</a:t>
+            </a:r>
+            <a:endParaRPr lang="en-US" sz="1600" dirty="0"/>
+          </a:p>
+        </p:txBody>
+      </p:sp>
+      <p:sp>
+        <p:nvSpPr>
+          <p:cNvPr id="9" name="Text 7"/>
+          <p:cNvSpPr/>
+          <p:nvPr/>
+        </p:nvSpPr>
+        <p:spPr>
+          <a:xfrm>
+            <a:off x="5029200" y="1737360"/>
+            <a:ext cx="3474720" cy="2651760"/>
+          </a:xfrm>
+          <a:prstGeom prst="rect">
+            <a:avLst/>
+          </a:prstGeom>
+          <a:noFill/>
+          <a:ln/>
+        </p:spPr>
+        <p:txBody>
+          <a:bodyPr wrap="square" rtlCol="0" anchor="t"/>
+          <a:lstStyle/>
+          <a:p>
+            <a:pPr marL="342900" indent="-342900">
+              <a:spcAft>
+                <a:spcPts val="600"/>
+              </a:spcAft>
+              <a:buSzPct val="100000"/>
+              <a:buChar char="•"/>
+            </a:pPr>
+            <a:r>
+              <a:rPr lang="en-US" sz="1300" dirty="0">
+                <a:solidFill>
+                  <a:srgbClr val="3D3A36"/>
+                </a:solidFill>
+                <a:latin typeface="Calibri" pitchFamily="34" charset="0"/>
+                <a:ea typeface="Calibri" pitchFamily="34" charset="-122"/>
+                <a:cs typeface="Calibri" pitchFamily="34" charset="-120"/>
+              </a:rPr>
+              <a:t>Reduce, reuse, recycle</a:t>
+            </a:r>
+            <a:endParaRPr lang="en-US" sz="1300" dirty="0"/>
+          </a:p>
+          <a:p>
+            <a:pPr marL="342900" indent="-342900">
+              <a:spcAft>
+                <a:spcPts val="600"/>
+              </a:spcAft>
+              <a:buSzPct val="100000"/>
+              <a:buChar char="•"/>
+            </a:pPr>
+            <a:r>
+              <a:rPr lang="en-US" sz="1300" dirty="0">
+                <a:solidFill>
+                  <a:srgbClr val="3D3A36"/>
+                </a:solidFill>
+                <a:latin typeface="Calibri" pitchFamily="34" charset="0"/>
+                <a:ea typeface="Calibri" pitchFamily="34" charset="-122"/>
+                <a:cs typeface="Calibri" pitchFamily="34" charset="-120"/>
+              </a:rPr>
+              <a:t>Protect natural habitats (nature reserves)</a:t>
+            </a:r>
+            <a:endParaRPr lang="en-US" sz="1300" dirty="0"/>
+          </a:p>
+          <a:p>
+            <a:pPr marL="342900" indent="-342900">
+              <a:spcAft>
+                <a:spcPts val="600"/>
+              </a:spcAft>
+              <a:buSzPct val="100000"/>
+              <a:buChar char="•"/>
+            </a:pPr>
+            <a:r>
+              <a:rPr lang="en-US" sz="1300" dirty="0">
+                <a:solidFill>
+                  <a:srgbClr val="3D3A36"/>
+                </a:solidFill>
+                <a:latin typeface="Calibri" pitchFamily="34" charset="0"/>
+                <a:ea typeface="Calibri" pitchFamily="34" charset="-122"/>
+                <a:cs typeface="Calibri" pitchFamily="34" charset="-120"/>
+              </a:rPr>
+              <a:t>Use renewable energy sources</a:t>
+            </a:r>
+            <a:endParaRPr lang="en-US" sz="1300" dirty="0"/>
+          </a:p>
+          <a:p>
+            <a:pPr marL="342900" indent="-342900">
+              <a:spcAft>
+                <a:spcPts val="600"/>
+              </a:spcAft>
+              <a:buSzPct val="100000"/>
+              <a:buChar char="•"/>
+            </a:pPr>
+            <a:r>
+              <a:rPr lang="en-US" sz="1300" dirty="0">
+                <a:solidFill>
+                  <a:srgbClr val="3D3A36"/>
+                </a:solidFill>
+                <a:latin typeface="Calibri" pitchFamily="34" charset="0"/>
+                <a:ea typeface="Calibri" pitchFamily="34" charset="-122"/>
+                <a:cs typeface="Calibri" pitchFamily="34" charset="-120"/>
+              </a:rPr>
+              <a:t>Sustainable farming and fishing</a:t>
+            </a:r>
+            <a:endParaRPr lang="en-US" sz="1300" dirty="0"/>
+          </a:p>
+          <a:p>
+            <a:pPr marL="342900" indent="-342900">
+              <a:spcAft>
+                <a:spcPts val="600"/>
+              </a:spcAft>
+              <a:buSzPct val="100000"/>
+              <a:buChar char="•"/>
+            </a:pPr>
+            <a:r>
+              <a:rPr lang="en-US" sz="1300" dirty="0">
+                <a:solidFill>
+                  <a:srgbClr val="3D3A36"/>
+                </a:solidFill>
+                <a:latin typeface="Calibri" pitchFamily="34" charset="0"/>
+                <a:ea typeface="Calibri" pitchFamily="34" charset="-122"/>
+                <a:cs typeface="Calibri" pitchFamily="34" charset="-120"/>
+              </a:rPr>
+              <a:t>Plant trees to absorb CO₂</a:t>
+            </a:r>
+            <a:endParaRPr lang="en-US" sz="1300" dirty="0"/>
+          </a:p>
+        </p:txBody>
+      </p:sp>
+      <p:sp>
+        <p:nvSpPr>
+          <p:cNvPr id="10" name="Text 8"/>
+          <p:cNvSpPr/>
+          <p:nvPr/>
+        </p:nvSpPr>
+        <p:spPr>
+          <a:xfrm>
+            <a:off x="548640" y="4800600"/>
+            <a:ext cx="3657600" cy="274320"/>
+          </a:xfrm>
+          <a:prstGeom prst="rect">
+            <a:avLst/>
+          </a:prstGeom>
+          <a:noFill/>
+          <a:ln/>
+        </p:spPr>
+        <p:txBody>
+          <a:bodyPr wrap="square" rtlCol="0" anchor="ctr"/>
+          <a:lstStyle/>
+          <a:p>
+            <a:pPr indent="0" marL="0">
+              <a:buNone/>
+            </a:pPr>
+            <a:r>
+              <a:rPr lang="en-US" sz="800" dirty="0">
+                <a:solidFill>
+                  <a:srgbClr val="9B9690"/>
+                </a:solidFill>
+              </a:rPr>
+              <a:t>mrzocchi.com</a:t>
+            </a:r>
+            <a:endParaRPr lang="en-US" sz="800" dirty="0"/>
           </a:p>
         </p:txBody>
       </p:sp>
@@ -1779,6 +2036,13 @@
 <file path=ppt/slides/slide4.xml><?xml version="1.0" encoding="utf-8"?>
 <p:sld xmlns:a="http://schemas.openxmlformats.org/drawingml/2006/main" xmlns:r="http://schemas.openxmlformats.org/officeDocument/2006/relationships" xmlns:p="http://schemas.openxmlformats.org/presentationml/2006/main">
   <p:cSld name="Slide 4">
+    <p:bg>
+      <p:bgPr>
+        <a:solidFill>
+          <a:srgbClr val="1B2A4A"/>
+        </a:solidFill>
+      </p:bgPr>
+    </p:bg>
     <p:spTree>
       <p:nvGrpSpPr>
         <p:cNvPr id="1" name=""/>
@@ -1802,13 +2066,13 @@
         <p:spPr>
           <a:xfrm>
             <a:off x="0" y="0"/>
-            <a:ext cx="9144000" cy="548640"/>
-          </a:xfrm>
-          <a:prstGeom prst="rect">
-            <a:avLst/>
-          </a:prstGeom>
-          <a:solidFill>
-            <a:srgbClr val="2D8F3F"/>
+            <a:ext cx="9144000" cy="54864"/>
+          </a:xfrm>
+          <a:prstGeom prst="rect">
+            <a:avLst/>
+          </a:prstGeom>
+          <a:solidFill>
+            <a:srgbClr val="2A9D8F"/>
           </a:solidFill>
           <a:ln/>
         </p:spPr>
@@ -1821,8 +2085,8 @@
         </p:nvSpPr>
         <p:spPr>
           <a:xfrm>
-            <a:off x="457200" y="45720"/>
-            <a:ext cx="8229600" cy="457200"/>
+            <a:off x="548640" y="457200"/>
+            <a:ext cx="8046720" cy="640080"/>
           </a:xfrm>
           <a:prstGeom prst="rect">
             <a:avLst/>
@@ -1838,77 +2102,121 @@
               <a:buNone/>
             </a:pPr>
             <a:r>
-              <a:rPr lang="en-US" sz="1800" b="1" dirty="0">
+              <a:rPr lang="en-US" sz="2800" b="1" dirty="0">
                 <a:solidFill>
                   <a:srgbClr val="FFFFFF"/>
+                </a:solidFill>
+                <a:latin typeface="Georgia" pitchFamily="34" charset="0"/>
+                <a:ea typeface="Georgia" pitchFamily="34" charset="-122"/>
+                <a:cs typeface="Georgia" pitchFamily="34" charset="-120"/>
+              </a:rPr>
+              <a:t>Key Takeaways</a:t>
+            </a:r>
+            <a:endParaRPr lang="en-US" sz="2800" dirty="0"/>
+          </a:p>
+        </p:txBody>
+      </p:sp>
+      <p:sp>
+        <p:nvSpPr>
+          <p:cNvPr id="4" name="Text 2"/>
+          <p:cNvSpPr/>
+          <p:nvPr/>
+        </p:nvSpPr>
+        <p:spPr>
+          <a:xfrm>
+            <a:off x="731520" y="1371600"/>
+            <a:ext cx="7680960" cy="3200400"/>
+          </a:xfrm>
+          <a:prstGeom prst="rect">
+            <a:avLst/>
+          </a:prstGeom>
+          <a:noFill/>
+          <a:ln/>
+        </p:spPr>
+        <p:txBody>
+          <a:bodyPr wrap="square" rtlCol="0" anchor="t"/>
+          <a:lstStyle/>
+          <a:p>
+            <a:pPr marL="342900" indent="-342900">
+              <a:spcAft>
+                <a:spcPts val="1000"/>
+              </a:spcAft>
+              <a:buSzPct val="100000"/>
+              <a:buChar char="•"/>
+            </a:pPr>
+            <a:r>
+              <a:rPr lang="en-US" sz="1600" dirty="0">
+                <a:solidFill>
+                  <a:srgbClr val="CADCFC"/>
                 </a:solidFill>
                 <a:latin typeface="Calibri" pitchFamily="34" charset="0"/>
                 <a:ea typeface="Calibri" pitchFamily="34" charset="-122"/>
                 <a:cs typeface="Calibri" pitchFamily="34" charset="-120"/>
               </a:rPr>
-              <a:t>Overfishing &amp; hunting</a:t>
-            </a:r>
-            <a:endParaRPr lang="en-US" sz="1800" dirty="0"/>
-          </a:p>
-        </p:txBody>
-      </p:sp>
-      <p:sp>
-        <p:nvSpPr>
-          <p:cNvPr id="4" name="Text 2"/>
-          <p:cNvSpPr/>
-          <p:nvPr/>
-        </p:nvSpPr>
-        <p:spPr>
-          <a:xfrm>
-            <a:off x="731520" y="1097280"/>
-            <a:ext cx="7680960" cy="3200400"/>
-          </a:xfrm>
-          <a:prstGeom prst="rect">
-            <a:avLst/>
-          </a:prstGeom>
-          <a:noFill/>
-          <a:ln/>
-        </p:spPr>
-        <p:txBody>
-          <a:bodyPr wrap="square" rtlCol="0" anchor="ctr"/>
-          <a:lstStyle/>
-          <a:p>
-            <a:pPr indent="0" marL="0">
-              <a:buNone/>
+              <a:t>Humans impact ecosystems through deforestation, pollution, and climate change</a:t>
+            </a:r>
+            <a:endParaRPr lang="en-US" sz="1600" dirty="0"/>
+          </a:p>
+          <a:p>
+            <a:pPr marL="342900" indent="-342900">
+              <a:spcAft>
+                <a:spcPts val="1000"/>
+              </a:spcAft>
+              <a:buSzPct val="100000"/>
+              <a:buChar char="•"/>
             </a:pPr>
             <a:r>
               <a:rPr lang="en-US" sz="1600" dirty="0">
                 <a:solidFill>
-                  <a:srgbClr val="363636"/>
+                  <a:srgbClr val="CADCFC"/>
                 </a:solidFill>
                 <a:latin typeface="Calibri" pitchFamily="34" charset="0"/>
                 <a:ea typeface="Calibri" pitchFamily="34" charset="-122"/>
                 <a:cs typeface="Calibri" pitchFamily="34" charset="-120"/>
               </a:rPr>
-              <a:t>Content for: Overfishing &amp; hunting</a:t>
+              <a:t>Loss of biodiversity weakens entire ecosystems</a:t>
             </a:r>
             <a:endParaRPr lang="en-US" sz="1600" dirty="0"/>
           </a:p>
           <a:p>
-            <a:pPr indent="0" marL="0">
-              <a:buNone/>
-            </a:pPr>
-            <a:endParaRPr lang="en-US" sz="1600" dirty="0"/>
-          </a:p>
-          <a:p>
-            <a:pPr indent="0" marL="0">
-              <a:buNone/>
+            <a:pPr marL="342900" indent="-342900">
+              <a:spcAft>
+                <a:spcPts val="1000"/>
+              </a:spcAft>
+              <a:buSzPct val="100000"/>
+              <a:buChar char="•"/>
             </a:pPr>
             <a:r>
               <a:rPr lang="en-US" sz="1600" dirty="0">
                 <a:solidFill>
-                  <a:srgbClr val="363636"/>
+                  <a:srgbClr val="CADCFC"/>
                 </a:solidFill>
                 <a:latin typeface="Calibri" pitchFamily="34" charset="0"/>
                 <a:ea typeface="Calibri" pitchFamily="34" charset="-122"/>
                 <a:cs typeface="Calibri" pitchFamily="34" charset="-120"/>
               </a:rPr>
-              <a:t>Key points will be covered in class.</a:t>
+              <a:t>Solutions: conservation, renewable energy, reducing waste</a:t>
+            </a:r>
+            <a:endParaRPr lang="en-US" sz="1600" dirty="0"/>
+          </a:p>
+          <a:p>
+            <a:pPr marL="342900" indent="-342900">
+              <a:spcAft>
+                <a:spcPts val="1000"/>
+              </a:spcAft>
+              <a:buSzPct val="100000"/>
+              <a:buChar char="•"/>
+            </a:pPr>
+            <a:r>
+              <a:rPr lang="en-US" sz="1600" dirty="0">
+                <a:solidFill>
+                  <a:srgbClr val="CADCFC"/>
+                </a:solidFill>
+                <a:latin typeface="Calibri" pitchFamily="34" charset="0"/>
+                <a:ea typeface="Calibri" pitchFamily="34" charset="-122"/>
+                <a:cs typeface="Calibri" pitchFamily="34" charset="-120"/>
+              </a:rPr>
+              <a:t>Individual actions (recycling, reducing waste) make a difference</a:t>
             </a:r>
             <a:endParaRPr lang="en-US" sz="1600" dirty="0"/>
           </a:p>
@@ -1922,8 +2230,8 @@
         </p:nvSpPr>
         <p:spPr>
           <a:xfrm>
-            <a:off x="7772400" y="4663440"/>
-            <a:ext cx="1097280" cy="365760"/>
+            <a:off x="548640" y="4572000"/>
+            <a:ext cx="3657600" cy="274320"/>
           </a:xfrm>
           <a:prstGeom prst="rect">
             <a:avLst/>
@@ -1935,389 +2243,16 @@
           <a:bodyPr wrap="square" rtlCol="0" anchor="ctr"/>
           <a:lstStyle/>
           <a:p>
-            <a:pPr algn="r" indent="0" marL="0">
-              <a:buNone/>
-            </a:pPr>
-            <a:r>
-              <a:rPr lang="en-US" sz="1000" dirty="0">
-                <a:solidFill>
-                  <a:srgbClr val="999999"/>
-                </a:solidFill>
-                <a:latin typeface="Calibri" pitchFamily="34" charset="0"/>
-                <a:ea typeface="Calibri" pitchFamily="34" charset="-122"/>
-                <a:cs typeface="Calibri" pitchFamily="34" charset="-120"/>
-              </a:rPr>
-              <a:t>4 / 6</a:t>
-            </a:r>
-            <a:endParaRPr lang="en-US" sz="1000" dirty="0"/>
-          </a:p>
-        </p:txBody>
-      </p:sp>
-    </p:spTree>
-  </p:cSld>
-  <p:clrMapOvr>
-    <a:masterClrMapping/>
-  </p:clrMapOvr>
-</p:sld>
-</file>
-
-<file path=ppt/slides/slide5.xml><?xml version="1.0" encoding="utf-8"?>
-<p:sld xmlns:a="http://schemas.openxmlformats.org/drawingml/2006/main" xmlns:r="http://schemas.openxmlformats.org/officeDocument/2006/relationships" xmlns:p="http://schemas.openxmlformats.org/presentationml/2006/main">
-  <p:cSld name="Slide 5">
-    <p:spTree>
-      <p:nvGrpSpPr>
-        <p:cNvPr id="1" name=""/>
-        <p:cNvGrpSpPr/>
-        <p:nvPr/>
-      </p:nvGrpSpPr>
-      <p:grpSpPr>
-        <a:xfrm>
-          <a:off x="0" y="0"/>
-          <a:ext cx="0" cy="0"/>
-          <a:chOff x="0" y="0"/>
-          <a:chExt cx="0" cy="0"/>
-        </a:xfrm>
-      </p:grpSpPr>
-      <p:sp>
-        <p:nvSpPr>
-          <p:cNvPr id="2" name="Shape 0"/>
-          <p:cNvSpPr/>
-          <p:nvPr/>
-        </p:nvSpPr>
-        <p:spPr>
-          <a:xfrm>
-            <a:off x="0" y="0"/>
-            <a:ext cx="9144000" cy="548640"/>
-          </a:xfrm>
-          <a:prstGeom prst="rect">
-            <a:avLst/>
-          </a:prstGeom>
-          <a:solidFill>
-            <a:srgbClr val="2D8F3F"/>
-          </a:solidFill>
-          <a:ln/>
-        </p:spPr>
-      </p:sp>
-      <p:sp>
-        <p:nvSpPr>
-          <p:cNvPr id="3" name="Text 1"/>
-          <p:cNvSpPr/>
-          <p:nvPr/>
-        </p:nvSpPr>
-        <p:spPr>
-          <a:xfrm>
-            <a:off x="457200" y="45720"/>
-            <a:ext cx="8229600" cy="457200"/>
-          </a:xfrm>
-          <a:prstGeom prst="rect">
-            <a:avLst/>
-          </a:prstGeom>
-          <a:noFill/>
-          <a:ln/>
-        </p:spPr>
-        <p:txBody>
-          <a:bodyPr wrap="square" rtlCol="0" anchor="ctr"/>
-          <a:lstStyle/>
-          <a:p>
             <a:pPr indent="0" marL="0">
               <a:buNone/>
             </a:pPr>
             <a:r>
-              <a:rPr lang="en-US" sz="1800" b="1" dirty="0">
-                <a:solidFill>
-                  <a:srgbClr val="FFFFFF"/>
-                </a:solidFill>
-                <a:latin typeface="Calibri" pitchFamily="34" charset="0"/>
-                <a:ea typeface="Calibri" pitchFamily="34" charset="-122"/>
-                <a:cs typeface="Calibri" pitchFamily="34" charset="-120"/>
-              </a:rPr>
-              <a:t>Climate change basics</a:t>
-            </a:r>
-            <a:endParaRPr lang="en-US" sz="1800" dirty="0"/>
-          </a:p>
-        </p:txBody>
-      </p:sp>
-      <p:sp>
-        <p:nvSpPr>
-          <p:cNvPr id="4" name="Text 2"/>
-          <p:cNvSpPr/>
-          <p:nvPr/>
-        </p:nvSpPr>
-        <p:spPr>
-          <a:xfrm>
-            <a:off x="731520" y="1097280"/>
-            <a:ext cx="7680960" cy="3200400"/>
-          </a:xfrm>
-          <a:prstGeom prst="rect">
-            <a:avLst/>
-          </a:prstGeom>
-          <a:noFill/>
-          <a:ln/>
-        </p:spPr>
-        <p:txBody>
-          <a:bodyPr wrap="square" rtlCol="0" anchor="ctr"/>
-          <a:lstStyle/>
-          <a:p>
-            <a:pPr indent="0" marL="0">
-              <a:buNone/>
-            </a:pPr>
-            <a:r>
-              <a:rPr lang="en-US" sz="1600" dirty="0">
-                <a:solidFill>
-                  <a:srgbClr val="363636"/>
-                </a:solidFill>
-                <a:latin typeface="Calibri" pitchFamily="34" charset="0"/>
-                <a:ea typeface="Calibri" pitchFamily="34" charset="-122"/>
-                <a:cs typeface="Calibri" pitchFamily="34" charset="-120"/>
-              </a:rPr>
-              <a:t>Content for: Climate change basics</a:t>
-            </a:r>
-            <a:endParaRPr lang="en-US" sz="1600" dirty="0"/>
-          </a:p>
-          <a:p>
-            <a:pPr indent="0" marL="0">
-              <a:buNone/>
-            </a:pPr>
-            <a:endParaRPr lang="en-US" sz="1600" dirty="0"/>
-          </a:p>
-          <a:p>
-            <a:pPr indent="0" marL="0">
-              <a:buNone/>
-            </a:pPr>
-            <a:r>
-              <a:rPr lang="en-US" sz="1600" dirty="0">
-                <a:solidFill>
-                  <a:srgbClr val="363636"/>
-                </a:solidFill>
-                <a:latin typeface="Calibri" pitchFamily="34" charset="0"/>
-                <a:ea typeface="Calibri" pitchFamily="34" charset="-122"/>
-                <a:cs typeface="Calibri" pitchFamily="34" charset="-120"/>
-              </a:rPr>
-              <a:t>Key points will be covered in class.</a:t>
-            </a:r>
-            <a:endParaRPr lang="en-US" sz="1600" dirty="0"/>
-          </a:p>
-        </p:txBody>
-      </p:sp>
-      <p:sp>
-        <p:nvSpPr>
-          <p:cNvPr id="5" name="Text 3"/>
-          <p:cNvSpPr/>
-          <p:nvPr/>
-        </p:nvSpPr>
-        <p:spPr>
-          <a:xfrm>
-            <a:off x="7772400" y="4663440"/>
-            <a:ext cx="1097280" cy="365760"/>
-          </a:xfrm>
-          <a:prstGeom prst="rect">
-            <a:avLst/>
-          </a:prstGeom>
-          <a:noFill/>
-          <a:ln/>
-        </p:spPr>
-        <p:txBody>
-          <a:bodyPr wrap="square" rtlCol="0" anchor="ctr"/>
-          <a:lstStyle/>
-          <a:p>
-            <a:pPr algn="r" indent="0" marL="0">
-              <a:buNone/>
-            </a:pPr>
-            <a:r>
               <a:rPr lang="en-US" sz="1000" dirty="0">
                 <a:solidFill>
-                  <a:srgbClr val="999999"/>
-                </a:solidFill>
-                <a:latin typeface="Calibri" pitchFamily="34" charset="0"/>
-                <a:ea typeface="Calibri" pitchFamily="34" charset="-122"/>
-                <a:cs typeface="Calibri" pitchFamily="34" charset="-120"/>
-              </a:rPr>
-              <a:t>5 / 6</a:t>
-            </a:r>
-            <a:endParaRPr lang="en-US" sz="1000" dirty="0"/>
-          </a:p>
-        </p:txBody>
-      </p:sp>
-    </p:spTree>
-  </p:cSld>
-  <p:clrMapOvr>
-    <a:masterClrMapping/>
-  </p:clrMapOvr>
-</p:sld>
-</file>
-
-<file path=ppt/slides/slide6.xml><?xml version="1.0" encoding="utf-8"?>
-<p:sld xmlns:a="http://schemas.openxmlformats.org/drawingml/2006/main" xmlns:r="http://schemas.openxmlformats.org/officeDocument/2006/relationships" xmlns:p="http://schemas.openxmlformats.org/presentationml/2006/main">
-  <p:cSld name="Slide 6">
-    <p:spTree>
-      <p:nvGrpSpPr>
-        <p:cNvPr id="1" name=""/>
-        <p:cNvGrpSpPr/>
-        <p:nvPr/>
-      </p:nvGrpSpPr>
-      <p:grpSpPr>
-        <a:xfrm>
-          <a:off x="0" y="0"/>
-          <a:ext cx="0" cy="0"/>
-          <a:chOff x="0" y="0"/>
-          <a:chExt cx="0" cy="0"/>
-        </a:xfrm>
-      </p:grpSpPr>
-      <p:sp>
-        <p:nvSpPr>
-          <p:cNvPr id="2" name="Shape 0"/>
-          <p:cNvSpPr/>
-          <p:nvPr/>
-        </p:nvSpPr>
-        <p:spPr>
-          <a:xfrm>
-            <a:off x="0" y="0"/>
-            <a:ext cx="9144000" cy="548640"/>
-          </a:xfrm>
-          <a:prstGeom prst="rect">
-            <a:avLst/>
-          </a:prstGeom>
-          <a:solidFill>
-            <a:srgbClr val="2D8F3F"/>
-          </a:solidFill>
-          <a:ln/>
-        </p:spPr>
-      </p:sp>
-      <p:sp>
-        <p:nvSpPr>
-          <p:cNvPr id="3" name="Text 1"/>
-          <p:cNvSpPr/>
-          <p:nvPr/>
-        </p:nvSpPr>
-        <p:spPr>
-          <a:xfrm>
-            <a:off x="457200" y="45720"/>
-            <a:ext cx="8229600" cy="457200"/>
-          </a:xfrm>
-          <a:prstGeom prst="rect">
-            <a:avLst/>
-          </a:prstGeom>
-          <a:noFill/>
-          <a:ln/>
-        </p:spPr>
-        <p:txBody>
-          <a:bodyPr wrap="square" rtlCol="0" anchor="ctr"/>
-          <a:lstStyle/>
-          <a:p>
-            <a:pPr indent="0" marL="0">
-              <a:buNone/>
-            </a:pPr>
-            <a:r>
-              <a:rPr lang="en-US" sz="1800" b="1" dirty="0">
-                <a:solidFill>
-                  <a:srgbClr val="FFFFFF"/>
-                </a:solidFill>
-                <a:latin typeface="Calibri" pitchFamily="34" charset="0"/>
-                <a:ea typeface="Calibri" pitchFamily="34" charset="-122"/>
-                <a:cs typeface="Calibri" pitchFamily="34" charset="-120"/>
-              </a:rPr>
-              <a:t>Conservation efforts</a:t>
-            </a:r>
-            <a:endParaRPr lang="en-US" sz="1800" dirty="0"/>
-          </a:p>
-        </p:txBody>
-      </p:sp>
-      <p:sp>
-        <p:nvSpPr>
-          <p:cNvPr id="4" name="Text 2"/>
-          <p:cNvSpPr/>
-          <p:nvPr/>
-        </p:nvSpPr>
-        <p:spPr>
-          <a:xfrm>
-            <a:off x="731520" y="1097280"/>
-            <a:ext cx="7680960" cy="3200400"/>
-          </a:xfrm>
-          <a:prstGeom prst="rect">
-            <a:avLst/>
-          </a:prstGeom>
-          <a:noFill/>
-          <a:ln/>
-        </p:spPr>
-        <p:txBody>
-          <a:bodyPr wrap="square" rtlCol="0" anchor="ctr"/>
-          <a:lstStyle/>
-          <a:p>
-            <a:pPr indent="0" marL="0">
-              <a:buNone/>
-            </a:pPr>
-            <a:r>
-              <a:rPr lang="en-US" sz="1600" dirty="0">
-                <a:solidFill>
-                  <a:srgbClr val="363636"/>
-                </a:solidFill>
-                <a:latin typeface="Calibri" pitchFamily="34" charset="0"/>
-                <a:ea typeface="Calibri" pitchFamily="34" charset="-122"/>
-                <a:cs typeface="Calibri" pitchFamily="34" charset="-120"/>
-              </a:rPr>
-              <a:t>Content for: Conservation efforts</a:t>
-            </a:r>
-            <a:endParaRPr lang="en-US" sz="1600" dirty="0"/>
-          </a:p>
-          <a:p>
-            <a:pPr indent="0" marL="0">
-              <a:buNone/>
-            </a:pPr>
-            <a:endParaRPr lang="en-US" sz="1600" dirty="0"/>
-          </a:p>
-          <a:p>
-            <a:pPr indent="0" marL="0">
-              <a:buNone/>
-            </a:pPr>
-            <a:r>
-              <a:rPr lang="en-US" sz="1600" dirty="0">
-                <a:solidFill>
-                  <a:srgbClr val="363636"/>
-                </a:solidFill>
-                <a:latin typeface="Calibri" pitchFamily="34" charset="0"/>
-                <a:ea typeface="Calibri" pitchFamily="34" charset="-122"/>
-                <a:cs typeface="Calibri" pitchFamily="34" charset="-120"/>
-              </a:rPr>
-              <a:t>Key points will be covered in class.</a:t>
-            </a:r>
-            <a:endParaRPr lang="en-US" sz="1600" dirty="0"/>
-          </a:p>
-        </p:txBody>
-      </p:sp>
-      <p:sp>
-        <p:nvSpPr>
-          <p:cNvPr id="5" name="Text 3"/>
-          <p:cNvSpPr/>
-          <p:nvPr/>
-        </p:nvSpPr>
-        <p:spPr>
-          <a:xfrm>
-            <a:off x="7772400" y="4663440"/>
-            <a:ext cx="1097280" cy="365760"/>
-          </a:xfrm>
-          <a:prstGeom prst="rect">
-            <a:avLst/>
-          </a:prstGeom>
-          <a:noFill/>
-          <a:ln/>
-        </p:spPr>
-        <p:txBody>
-          <a:bodyPr wrap="square" rtlCol="0" anchor="ctr"/>
-          <a:lstStyle/>
-          <a:p>
-            <a:pPr algn="r" indent="0" marL="0">
-              <a:buNone/>
-            </a:pPr>
-            <a:r>
-              <a:rPr lang="en-US" sz="1000" dirty="0">
-                <a:solidFill>
-                  <a:srgbClr val="999999"/>
-                </a:solidFill>
-                <a:latin typeface="Calibri" pitchFamily="34" charset="0"/>
-                <a:ea typeface="Calibri" pitchFamily="34" charset="-122"/>
-                <a:cs typeface="Calibri" pitchFamily="34" charset="-120"/>
-              </a:rPr>
-              <a:t>6 / 6</a:t>
+                  <a:srgbClr val="6B6660"/>
+                </a:solidFill>
+              </a:rPr>
+              <a:t>mrzocchi.com</a:t>
             </a:r>
             <a:endParaRPr lang="en-US" sz="1000" dirty="0"/>
           </a:p>

--- a/static/ppts/G6_Sci_T4_Human_Impact.pptx
+++ b/static/ppts/G6_Sci_T4_Human_Impact.pptx
@@ -9,9 +9,10 @@
     <p:sldId id="257" r:id="rId3"/>
     <p:sldId id="258" r:id="rId4"/>
     <p:sldId id="259" r:id="rId5"/>
+    <p:sldId id="260" r:id="rId6"/>
   </p:sldIdLst>
   <p:notesMasterIdLst>
-    <p:notesMasterId r:id="rId6"/>
+    <p:notesMasterId r:id="rId7"/>
   </p:notesMasterIdLst>
   <p:sldSz cx="9144000" cy="5143500"/>
   <p:notesSz cx="5143500" cy="9144000"/>
@@ -811,6 +812,94 @@
 </p:notes>
 </file>
 
+<file path=ppt/notesSlides/notesSlide5.xml><?xml version="1.0" encoding="utf-8"?>
+<p:notes xmlns:a="http://schemas.openxmlformats.org/drawingml/2006/main" xmlns:r="http://schemas.openxmlformats.org/officeDocument/2006/relationships" xmlns:p="http://schemas.openxmlformats.org/presentationml/2006/main">
+  <p:cSld>
+    <p:spTree>
+      <p:nvGrpSpPr>
+        <p:cNvPr id="1" name=""/>
+        <p:cNvGrpSpPr/>
+        <p:nvPr/>
+      </p:nvGrpSpPr>
+      <p:grpSpPr>
+        <a:xfrm>
+          <a:off x="0" y="0"/>
+          <a:ext cx="0" cy="0"/>
+          <a:chOff x="0" y="0"/>
+          <a:chExt cx="0" cy="0"/>
+        </a:xfrm>
+      </p:grpSpPr>
+      <p:sp>
+        <p:nvSpPr>
+          <p:cNvPr id="2" name="Slide Image Placeholder 1"/>
+          <p:cNvSpPr>
+            <a:spLocks noGrp="1" noRot="1" noChangeAspect="1"/>
+          </p:cNvSpPr>
+          <p:nvPr>
+            <p:ph type="sldImg"/>
+          </p:nvPr>
+        </p:nvSpPr>
+        <p:spPr/>
+      </p:sp>
+      <p:sp>
+        <p:nvSpPr>
+          <p:cNvPr id="3" name="Notes Placeholder 2"/>
+          <p:cNvSpPr>
+            <a:spLocks noGrp="1"/>
+          </p:cNvSpPr>
+          <p:nvPr>
+            <p:ph type="body" idx="1"/>
+          </p:nvPr>
+        </p:nvSpPr>
+        <p:spPr/>
+        <p:txBody>
+          <a:bodyPr/>
+          <a:lstStyle/>
+          <a:p>
+            <a:r>
+              <a:rPr lang="en-US" dirty="0"/>
+              <a:t/>
+            </a:r>
+            <a:endParaRPr lang="en-US" dirty="0"/>
+          </a:p>
+        </p:txBody>
+      </p:sp>
+      <p:sp>
+        <p:nvSpPr>
+          <p:cNvPr id="4" name="Slide Number Placeholder 3"/>
+          <p:cNvSpPr>
+            <a:spLocks noGrp="1"/>
+          </p:cNvSpPr>
+          <p:nvPr>
+            <p:ph type="sldNum" sz="quarter" idx="10"/>
+          </p:nvPr>
+        </p:nvSpPr>
+        <p:spPr/>
+        <p:txBody>
+          <a:bodyPr/>
+          <a:lstStyle/>
+          <a:p>
+            <a:fld id="{F7021451-1387-4CA6-816F-3879F97B5CBC}" type="slidenum">
+              <a:rPr lang="en-US"/>
+              <a:t>5</a:t>
+            </a:fld>
+            <a:endParaRPr lang="en-US"/>
+          </a:p>
+        </p:txBody>
+      </p:sp>
+    </p:spTree>
+    <p:extLst>
+      <p:ext uri="{BB962C8B-B14F-4D97-AF65-F5344CB8AC3E}">
+        <p14:creationId xmlns:p14="http://schemas.microsoft.com/office/powerpoint/2010/main" val="1024086991"/>
+      </p:ext>
+    </p:extLst>
+  </p:cSld>
+  <p:clrMapOvr>
+    <a:masterClrMapping/>
+  </p:clrMapOvr>
+</p:notes>
+</file>
+
 <file path=ppt/slideLayouts/slideLayout1.xml><?xml version="1.0" encoding="utf-8"?>
 <p:sldLayout xmlns:a="http://schemas.openxmlformats.org/drawingml/2006/main" xmlns:r="http://schemas.openxmlformats.org/officeDocument/2006/relationships" xmlns:p="http://schemas.openxmlformats.org/presentationml/2006/main" preserve="1">
   <p:cSld name="DEFAULT">
@@ -1170,7 +1259,7 @@
         </p:nvSpPr>
         <p:spPr>
           <a:xfrm>
-            <a:off x="731520" y="1280160"/>
+            <a:off x="731520" y="1097280"/>
             <a:ext cx="7772400" cy="1371600"/>
           </a:xfrm>
           <a:prstGeom prst="rect">
@@ -1187,7 +1276,7 @@
               <a:buNone/>
             </a:pPr>
             <a:r>
-              <a:rPr lang="en-US" sz="3600" b="1" dirty="0">
+              <a:rPr lang="en-US" sz="4000" b="1" dirty="0">
                 <a:solidFill>
                   <a:srgbClr val="FFFFFF"/>
                 </a:solidFill>
@@ -1197,7 +1286,7 @@
               </a:rPr>
               <a:t>Human Impact on Ecosystems</a:t>
             </a:r>
-            <a:endParaRPr lang="en-US" sz="3600" dirty="0"/>
+            <a:endParaRPr lang="en-US" sz="4000" dirty="0"/>
           </a:p>
         </p:txBody>
       </p:sp>
@@ -1209,7 +1298,7 @@
         </p:nvSpPr>
         <p:spPr>
           <a:xfrm>
-            <a:off x="731520" y="2743200"/>
+            <a:off x="731520" y="2560320"/>
             <a:ext cx="7772400" cy="548640"/>
           </a:xfrm>
           <a:prstGeom prst="rect">
@@ -1228,13 +1317,13 @@
             <a:r>
               <a:rPr lang="en-US" sz="1600" dirty="0">
                 <a:solidFill>
-                  <a:srgbClr val="9B9690"/>
-                </a:solidFill>
-                <a:latin typeface="Calibri" pitchFamily="34" charset="0"/>
-                <a:ea typeface="Calibri" pitchFamily="34" charset="-122"/>
-                <a:cs typeface="Calibri" pitchFamily="34" charset="-120"/>
-              </a:rPr>
-              <a:t>G6 Science · Ecology</a:t>
+                  <a:srgbClr val="E9C46A"/>
+                </a:solidFill>
+                <a:latin typeface="Calibri" pitchFamily="34" charset="0"/>
+                <a:ea typeface="Calibri" pitchFamily="34" charset="-122"/>
+                <a:cs typeface="Calibri" pitchFamily="34" charset="-120"/>
+              </a:rPr>
+              <a:t>Grade 6 Science · Mr Zocchi</a:t>
             </a:r>
             <a:endParaRPr lang="en-US" sz="1600" dirty="0"/>
           </a:p>
@@ -1242,14 +1331,36 @@
       </p:sp>
       <p:sp>
         <p:nvSpPr>
-          <p:cNvPr id="5" name="Text 3"/>
-          <p:cNvSpPr/>
-          <p:nvPr/>
-        </p:nvSpPr>
-        <p:spPr>
-          <a:xfrm>
-            <a:off x="731520" y="4389120"/>
-            <a:ext cx="7772400" cy="457200"/>
+          <p:cNvPr id="5" name="Shape 3"/>
+          <p:cNvSpPr/>
+          <p:nvPr/>
+        </p:nvSpPr>
+        <p:spPr>
+          <a:xfrm>
+            <a:off x="731520" y="3474720"/>
+            <a:ext cx="2011680" cy="411480"/>
+          </a:xfrm>
+          <a:prstGeom prst="roundRect">
+            <a:avLst>
+              <a:gd name="adj" fmla="val 17778"/>
+            </a:avLst>
+          </a:prstGeom>
+          <a:solidFill>
+            <a:srgbClr val="2A9D8F"/>
+          </a:solidFill>
+          <a:ln/>
+        </p:spPr>
+      </p:sp>
+      <p:sp>
+        <p:nvSpPr>
+          <p:cNvPr id="6" name="Text 4"/>
+          <p:cNvSpPr/>
+          <p:nvPr/>
+        </p:nvSpPr>
+        <p:spPr>
+          <a:xfrm>
+            <a:off x="731520" y="3474720"/>
+            <a:ext cx="2011680" cy="411480"/>
           </a:xfrm>
           <a:prstGeom prst="rect">
             <a:avLst/>
@@ -1261,21 +1372,21 @@
           <a:bodyPr wrap="square" rtlCol="0" anchor="ctr"/>
           <a:lstStyle/>
           <a:p>
-            <a:pPr indent="0" marL="0">
+            <a:pPr algn="ctr" indent="0" marL="0">
               <a:buNone/>
             </a:pPr>
             <a:r>
-              <a:rPr lang="en-US" sz="1000" dirty="0">
-                <a:solidFill>
-                  <a:srgbClr val="6B6660"/>
-                </a:solidFill>
-                <a:latin typeface="Calibri" pitchFamily="34" charset="0"/>
-                <a:ea typeface="Calibri" pitchFamily="34" charset="-122"/>
-                <a:cs typeface="Calibri" pitchFamily="34" charset="-120"/>
-              </a:rPr>
-              <a:t>Mr Zocchi · mrzocchi.com</a:t>
-            </a:r>
-            <a:endParaRPr lang="en-US" sz="1000" dirty="0"/>
+              <a:rPr lang="en-US" sz="1200" b="1" dirty="0">
+                <a:solidFill>
+                  <a:srgbClr val="FFFFFF"/>
+                </a:solidFill>
+                <a:latin typeface="Calibri" pitchFamily="34" charset="0"/>
+                <a:ea typeface="Calibri" pitchFamily="34" charset="-122"/>
+                <a:cs typeface="Calibri" pitchFamily="34" charset="-120"/>
+              </a:rPr>
+              <a:t>Term 4 · Ecology</a:t>
+            </a:r>
+            <a:endParaRPr lang="en-US" sz="1200" dirty="0"/>
           </a:p>
         </p:txBody>
       </p:sp>
@@ -1293,7 +1404,7 @@
     <p:bg>
       <p:bgPr>
         <a:solidFill>
-          <a:srgbClr val="FFFFFF"/>
+          <a:srgbClr val="FAF8F5"/>
         </a:solidFill>
       </p:bgPr>
     </p:bg>
@@ -1339,8 +1450,8 @@
         </p:nvSpPr>
         <p:spPr>
           <a:xfrm>
-            <a:off x="548640" y="274320"/>
-            <a:ext cx="8046720" cy="640080"/>
+            <a:off x="7772400" y="4709160"/>
+            <a:ext cx="1097280" cy="320040"/>
           </a:xfrm>
           <a:prstGeom prst="rect">
             <a:avLst/>
@@ -1349,7 +1460,46 @@
           <a:ln/>
         </p:spPr>
         <p:txBody>
-          <a:bodyPr wrap="square" lIns="0" tIns="0" rIns="0" bIns="0" rtlCol="0" anchor="ctr"/>
+          <a:bodyPr wrap="square" rtlCol="0" anchor="ctr"/>
+          <a:lstStyle/>
+          <a:p>
+            <a:pPr algn="r" indent="0" marL="0">
+              <a:buNone/>
+            </a:pPr>
+            <a:r>
+              <a:rPr lang="en-US" sz="900" dirty="0">
+                <a:solidFill>
+                  <a:srgbClr val="6B6660"/>
+                </a:solidFill>
+                <a:latin typeface="Calibri" pitchFamily="34" charset="0"/>
+                <a:ea typeface="Calibri" pitchFamily="34" charset="-122"/>
+                <a:cs typeface="Calibri" pitchFamily="34" charset="-120"/>
+              </a:rPr>
+              <a:t>2 / 5</a:t>
+            </a:r>
+            <a:endParaRPr lang="en-US" sz="900" dirty="0"/>
+          </a:p>
+        </p:txBody>
+      </p:sp>
+      <p:sp>
+        <p:nvSpPr>
+          <p:cNvPr id="4" name="Text 2"/>
+          <p:cNvSpPr/>
+          <p:nvPr/>
+        </p:nvSpPr>
+        <p:spPr>
+          <a:xfrm>
+            <a:off x="457200" y="274320"/>
+            <a:ext cx="8229600" cy="640080"/>
+          </a:xfrm>
+          <a:prstGeom prst="rect">
+            <a:avLst/>
+          </a:prstGeom>
+          <a:noFill/>
+          <a:ln/>
+        </p:spPr>
+        <p:txBody>
+          <a:bodyPr wrap="square" rtlCol="0" anchor="ctr"/>
           <a:lstStyle/>
           <a:p>
             <a:pPr indent="0" marL="0">
@@ -1364,7 +1514,7 @@
                 <a:ea typeface="Georgia" pitchFamily="34" charset="-122"/>
                 <a:cs typeface="Georgia" pitchFamily="34" charset="-120"/>
               </a:rPr>
-              <a:t>How Humans Affect Ecosystems</a:t>
+              <a:t>Negative Impacts</a:t>
             </a:r>
             <a:endParaRPr lang="en-US" sz="2600" dirty="0"/>
           </a:p>
@@ -1372,14 +1522,66 @@
       </p:sp>
       <p:sp>
         <p:nvSpPr>
-          <p:cNvPr id="4" name="Text 2"/>
-          <p:cNvSpPr/>
-          <p:nvPr/>
-        </p:nvSpPr>
-        <p:spPr>
-          <a:xfrm>
-            <a:off x="548640" y="1097280"/>
-            <a:ext cx="8046720" cy="3474720"/>
+          <p:cNvPr id="5" name="Shape 3"/>
+          <p:cNvSpPr/>
+          <p:nvPr/>
+        </p:nvSpPr>
+        <p:spPr>
+          <a:xfrm>
+            <a:off x="457200" y="1188720"/>
+            <a:ext cx="2560320" cy="1828800"/>
+          </a:xfrm>
+          <a:prstGeom prst="rect">
+            <a:avLst/>
+          </a:prstGeom>
+          <a:solidFill>
+            <a:srgbClr val="FFFFFF"/>
+          </a:solidFill>
+          <a:ln w="12700">
+            <a:solidFill>
+              <a:srgbClr val="E5E2DC"/>
+            </a:solidFill>
+            <a:prstDash val="solid"/>
+          </a:ln>
+          <a:effectLst>
+            <a:outerShdw sx="100000" sy="100000" kx="0" ky="0" algn="bl" rotWithShape="0" blurRad="50800" dist="25400" dir="8100000">
+              <a:srgbClr val="000000">
+                <a:alpha val="10000"/>
+              </a:srgbClr>
+            </a:outerShdw>
+          </a:effectLst>
+        </p:spPr>
+      </p:sp>
+      <p:sp>
+        <p:nvSpPr>
+          <p:cNvPr id="6" name="Shape 4"/>
+          <p:cNvSpPr/>
+          <p:nvPr/>
+        </p:nvSpPr>
+        <p:spPr>
+          <a:xfrm>
+            <a:off x="457200" y="1188720"/>
+            <a:ext cx="2560320" cy="54864"/>
+          </a:xfrm>
+          <a:prstGeom prst="rect">
+            <a:avLst/>
+          </a:prstGeom>
+          <a:solidFill>
+            <a:srgbClr val="2A9D8F"/>
+          </a:solidFill>
+          <a:ln/>
+        </p:spPr>
+      </p:sp>
+      <p:sp>
+        <p:nvSpPr>
+          <p:cNvPr id="7" name="Text 5"/>
+          <p:cNvSpPr/>
+          <p:nvPr/>
+        </p:nvSpPr>
+        <p:spPr>
+          <a:xfrm>
+            <a:off x="594360" y="1325880"/>
+            <a:ext cx="2286000" cy="365760"/>
           </a:xfrm>
           <a:prstGeom prst="rect">
             <a:avLst/>
@@ -1388,18 +1590,53 @@
           <a:ln/>
         </p:spPr>
         <p:txBody>
+          <a:bodyPr wrap="square" rtlCol="0" anchor="ctr"/>
+          <a:lstStyle/>
+          <a:p>
+            <a:pPr indent="0" marL="0">
+              <a:buNone/>
+            </a:pPr>
+            <a:r>
+              <a:rPr lang="en-US" sz="1400" b="1" dirty="0">
+                <a:solidFill>
+                  <a:srgbClr val="1B2A4A"/>
+                </a:solidFill>
+                <a:latin typeface="Calibri" pitchFamily="34" charset="0"/>
+                <a:ea typeface="Calibri" pitchFamily="34" charset="-122"/>
+                <a:cs typeface="Calibri" pitchFamily="34" charset="-120"/>
+              </a:rPr>
+              <a:t>Deforestation</a:t>
+            </a:r>
+            <a:endParaRPr lang="en-US" sz="1400" dirty="0"/>
+          </a:p>
+        </p:txBody>
+      </p:sp>
+      <p:sp>
+        <p:nvSpPr>
+          <p:cNvPr id="8" name="Text 6"/>
+          <p:cNvSpPr/>
+          <p:nvPr/>
+        </p:nvSpPr>
+        <p:spPr>
+          <a:xfrm>
+            <a:off x="594360" y="1737360"/>
+            <a:ext cx="2286000" cy="1097280"/>
+          </a:xfrm>
+          <a:prstGeom prst="rect">
+            <a:avLst/>
+          </a:prstGeom>
+          <a:noFill/>
+          <a:ln/>
+        </p:spPr>
+        <p:txBody>
           <a:bodyPr wrap="square" rtlCol="0" anchor="t"/>
           <a:lstStyle/>
           <a:p>
-            <a:pPr marL="342900" indent="-342900">
-              <a:spcAft>
-                <a:spcPts val="800"/>
-              </a:spcAft>
-              <a:buSzPct val="100000"/>
-              <a:buChar char="•"/>
-            </a:pPr>
-            <a:r>
-              <a:rPr lang="en-US" sz="1500" dirty="0">
+            <a:pPr indent="0" marL="0">
+              <a:buNone/>
+            </a:pPr>
+            <a:r>
+              <a:rPr lang="en-US" sz="1100" dirty="0">
                 <a:solidFill>
                   <a:srgbClr val="3D3A36"/>
                 </a:solidFill>
@@ -1407,106 +1644,74 @@
                 <a:ea typeface="Calibri" pitchFamily="34" charset="-122"/>
                 <a:cs typeface="Calibri" pitchFamily="34" charset="-120"/>
               </a:rPr>
-              <a:t>DEFORESTATION: cutting forests destroys habitats and releases CO₂</a:t>
-            </a:r>
-            <a:endParaRPr lang="en-US" sz="1500" dirty="0"/>
-          </a:p>
-          <a:p>
-            <a:pPr marL="342900" indent="-342900">
-              <a:spcAft>
-                <a:spcPts val="800"/>
-              </a:spcAft>
-              <a:buSzPct val="100000"/>
-              <a:buChar char="•"/>
-            </a:pPr>
-            <a:r>
-              <a:rPr lang="en-US" sz="1500" dirty="0">
-                <a:solidFill>
-                  <a:srgbClr val="3D3A36"/>
-                </a:solidFill>
-                <a:latin typeface="Calibri" pitchFamily="34" charset="0"/>
-                <a:ea typeface="Calibri" pitchFamily="34" charset="-122"/>
-                <a:cs typeface="Calibri" pitchFamily="34" charset="-120"/>
-              </a:rPr>
-              <a:t>POLLUTION: air, water, and land pollution harm organisms</a:t>
-            </a:r>
-            <a:endParaRPr lang="en-US" sz="1500" dirty="0"/>
-          </a:p>
-          <a:p>
-            <a:pPr marL="342900" indent="-342900">
-              <a:spcAft>
-                <a:spcPts val="800"/>
-              </a:spcAft>
-              <a:buSzPct val="100000"/>
-              <a:buChar char="•"/>
-            </a:pPr>
-            <a:r>
-              <a:rPr lang="en-US" sz="1500" dirty="0">
-                <a:solidFill>
-                  <a:srgbClr val="3D3A36"/>
-                </a:solidFill>
-                <a:latin typeface="Calibri" pitchFamily="34" charset="0"/>
-                <a:ea typeface="Calibri" pitchFamily="34" charset="-122"/>
-                <a:cs typeface="Calibri" pitchFamily="34" charset="-120"/>
-              </a:rPr>
-              <a:t>OVERFISHING: removing too many fish disrupts food webs</a:t>
-            </a:r>
-            <a:endParaRPr lang="en-US" sz="1500" dirty="0"/>
-          </a:p>
-          <a:p>
-            <a:pPr marL="342900" indent="-342900">
-              <a:spcAft>
-                <a:spcPts val="800"/>
-              </a:spcAft>
-              <a:buSzPct val="100000"/>
-              <a:buChar char="•"/>
-            </a:pPr>
-            <a:r>
-              <a:rPr lang="en-US" sz="1500" dirty="0">
-                <a:solidFill>
-                  <a:srgbClr val="3D3A36"/>
-                </a:solidFill>
-                <a:latin typeface="Calibri" pitchFamily="34" charset="0"/>
-                <a:ea typeface="Calibri" pitchFamily="34" charset="-122"/>
-                <a:cs typeface="Calibri" pitchFamily="34" charset="-120"/>
-              </a:rPr>
-              <a:t>CLIMATE CHANGE: rising temperatures shift habitats and seasons</a:t>
-            </a:r>
-            <a:endParaRPr lang="en-US" sz="1500" dirty="0"/>
-          </a:p>
-          <a:p>
-            <a:pPr marL="342900" indent="-342900">
-              <a:spcAft>
-                <a:spcPts val="800"/>
-              </a:spcAft>
-              <a:buSzPct val="100000"/>
-              <a:buChar char="•"/>
-            </a:pPr>
-            <a:r>
-              <a:rPr lang="en-US" sz="1500" dirty="0">
-                <a:solidFill>
-                  <a:srgbClr val="3D3A36"/>
-                </a:solidFill>
-                <a:latin typeface="Calibri" pitchFamily="34" charset="0"/>
-                <a:ea typeface="Calibri" pitchFamily="34" charset="-122"/>
-                <a:cs typeface="Calibri" pitchFamily="34" charset="-120"/>
-              </a:rPr>
-              <a:t>URBANISATION: building cities replaces natural habitats</a:t>
-            </a:r>
-            <a:endParaRPr lang="en-US" sz="1500" dirty="0"/>
-          </a:p>
-        </p:txBody>
-      </p:sp>
-      <p:sp>
-        <p:nvSpPr>
-          <p:cNvPr id="5" name="Text 3"/>
-          <p:cNvSpPr/>
-          <p:nvPr/>
-        </p:nvSpPr>
-        <p:spPr>
-          <a:xfrm>
-            <a:off x="548640" y="4800600"/>
-            <a:ext cx="3657600" cy="274320"/>
+              <a:t>Cutting down forests for farming, wood, and space. Destroys habitats, reduces biodiversity, increases CO₂ (trees absorb CO₂). Amazon loses ~10,000 km² per year.</a:t>
+            </a:r>
+            <a:endParaRPr lang="en-US" sz="1100" dirty="0"/>
+          </a:p>
+        </p:txBody>
+      </p:sp>
+      <p:sp>
+        <p:nvSpPr>
+          <p:cNvPr id="9" name="Shape 7"/>
+          <p:cNvSpPr/>
+          <p:nvPr/>
+        </p:nvSpPr>
+        <p:spPr>
+          <a:xfrm>
+            <a:off x="3291840" y="1188720"/>
+            <a:ext cx="2560320" cy="1828800"/>
+          </a:xfrm>
+          <a:prstGeom prst="rect">
+            <a:avLst/>
+          </a:prstGeom>
+          <a:solidFill>
+            <a:srgbClr val="FFFFFF"/>
+          </a:solidFill>
+          <a:ln w="12700">
+            <a:solidFill>
+              <a:srgbClr val="E5E2DC"/>
+            </a:solidFill>
+            <a:prstDash val="solid"/>
+          </a:ln>
+          <a:effectLst>
+            <a:outerShdw sx="100000" sy="100000" kx="0" ky="0" algn="bl" rotWithShape="0" blurRad="50800" dist="25400" dir="8100000">
+              <a:srgbClr val="000000">
+                <a:alpha val="10000"/>
+              </a:srgbClr>
+            </a:outerShdw>
+          </a:effectLst>
+        </p:spPr>
+      </p:sp>
+      <p:sp>
+        <p:nvSpPr>
+          <p:cNvPr id="10" name="Shape 8"/>
+          <p:cNvSpPr/>
+          <p:nvPr/>
+        </p:nvSpPr>
+        <p:spPr>
+          <a:xfrm>
+            <a:off x="3291840" y="1188720"/>
+            <a:ext cx="2560320" cy="54864"/>
+          </a:xfrm>
+          <a:prstGeom prst="rect">
+            <a:avLst/>
+          </a:prstGeom>
+          <a:solidFill>
+            <a:srgbClr val="2A9D8F"/>
+          </a:solidFill>
+          <a:ln/>
+        </p:spPr>
+      </p:sp>
+      <p:sp>
+        <p:nvSpPr>
+          <p:cNvPr id="11" name="Text 9"/>
+          <p:cNvSpPr/>
+          <p:nvPr/>
+        </p:nvSpPr>
+        <p:spPr>
+          <a:xfrm>
+            <a:off x="3429000" y="1325880"/>
+            <a:ext cx="2286000" cy="365760"/>
           </a:xfrm>
           <a:prstGeom prst="rect">
             <a:avLst/>
@@ -1522,14 +1727,186 @@
               <a:buNone/>
             </a:pPr>
             <a:r>
-              <a:rPr lang="en-US" sz="800" dirty="0">
-                <a:solidFill>
-                  <a:srgbClr val="9B9690"/>
-                </a:solidFill>
-              </a:rPr>
-              <a:t>mrzocchi.com</a:t>
-            </a:r>
-            <a:endParaRPr lang="en-US" sz="800" dirty="0"/>
+              <a:rPr lang="en-US" sz="1400" b="1" dirty="0">
+                <a:solidFill>
+                  <a:srgbClr val="1B2A4A"/>
+                </a:solidFill>
+                <a:latin typeface="Calibri" pitchFamily="34" charset="0"/>
+                <a:ea typeface="Calibri" pitchFamily="34" charset="-122"/>
+                <a:cs typeface="Calibri" pitchFamily="34" charset="-120"/>
+              </a:rPr>
+              <a:t>Pollution</a:t>
+            </a:r>
+            <a:endParaRPr lang="en-US" sz="1400" dirty="0"/>
+          </a:p>
+        </p:txBody>
+      </p:sp>
+      <p:sp>
+        <p:nvSpPr>
+          <p:cNvPr id="12" name="Text 10"/>
+          <p:cNvSpPr/>
+          <p:nvPr/>
+        </p:nvSpPr>
+        <p:spPr>
+          <a:xfrm>
+            <a:off x="3429000" y="1737360"/>
+            <a:ext cx="2286000" cy="1097280"/>
+          </a:xfrm>
+          <a:prstGeom prst="rect">
+            <a:avLst/>
+          </a:prstGeom>
+          <a:noFill/>
+          <a:ln/>
+        </p:spPr>
+        <p:txBody>
+          <a:bodyPr wrap="square" rtlCol="0" anchor="t"/>
+          <a:lstStyle/>
+          <a:p>
+            <a:pPr indent="0" marL="0">
+              <a:buNone/>
+            </a:pPr>
+            <a:r>
+              <a:rPr lang="en-US" sz="1100" dirty="0">
+                <a:solidFill>
+                  <a:srgbClr val="3D3A36"/>
+                </a:solidFill>
+                <a:latin typeface="Calibri" pitchFamily="34" charset="0"/>
+                <a:ea typeface="Calibri" pitchFamily="34" charset="-122"/>
+                <a:cs typeface="Calibri" pitchFamily="34" charset="-120"/>
+              </a:rPr>
+              <a:t>Air: burning fossil fuels, acid rain. Water: sewage, chemicals, plastics. Land: pesticides, landfill. Harms organisms, ecosystems, and human health.</a:t>
+            </a:r>
+            <a:endParaRPr lang="en-US" sz="1100" dirty="0"/>
+          </a:p>
+        </p:txBody>
+      </p:sp>
+      <p:sp>
+        <p:nvSpPr>
+          <p:cNvPr id="13" name="Shape 11"/>
+          <p:cNvSpPr/>
+          <p:nvPr/>
+        </p:nvSpPr>
+        <p:spPr>
+          <a:xfrm>
+            <a:off x="6126480" y="1188720"/>
+            <a:ext cx="2560320" cy="1828800"/>
+          </a:xfrm>
+          <a:prstGeom prst="rect">
+            <a:avLst/>
+          </a:prstGeom>
+          <a:solidFill>
+            <a:srgbClr val="FFFFFF"/>
+          </a:solidFill>
+          <a:ln w="12700">
+            <a:solidFill>
+              <a:srgbClr val="E5E2DC"/>
+            </a:solidFill>
+            <a:prstDash val="solid"/>
+          </a:ln>
+          <a:effectLst>
+            <a:outerShdw sx="100000" sy="100000" kx="0" ky="0" algn="bl" rotWithShape="0" blurRad="50800" dist="25400" dir="8100000">
+              <a:srgbClr val="000000">
+                <a:alpha val="10000"/>
+              </a:srgbClr>
+            </a:outerShdw>
+          </a:effectLst>
+        </p:spPr>
+      </p:sp>
+      <p:sp>
+        <p:nvSpPr>
+          <p:cNvPr id="14" name="Shape 12"/>
+          <p:cNvSpPr/>
+          <p:nvPr/>
+        </p:nvSpPr>
+        <p:spPr>
+          <a:xfrm>
+            <a:off x="6126480" y="1188720"/>
+            <a:ext cx="2560320" cy="54864"/>
+          </a:xfrm>
+          <a:prstGeom prst="rect">
+            <a:avLst/>
+          </a:prstGeom>
+          <a:solidFill>
+            <a:srgbClr val="2A9D8F"/>
+          </a:solidFill>
+          <a:ln/>
+        </p:spPr>
+      </p:sp>
+      <p:sp>
+        <p:nvSpPr>
+          <p:cNvPr id="15" name="Text 13"/>
+          <p:cNvSpPr/>
+          <p:nvPr/>
+        </p:nvSpPr>
+        <p:spPr>
+          <a:xfrm>
+            <a:off x="6263640" y="1325880"/>
+            <a:ext cx="2286000" cy="365760"/>
+          </a:xfrm>
+          <a:prstGeom prst="rect">
+            <a:avLst/>
+          </a:prstGeom>
+          <a:noFill/>
+          <a:ln/>
+        </p:spPr>
+        <p:txBody>
+          <a:bodyPr wrap="square" rtlCol="0" anchor="ctr"/>
+          <a:lstStyle/>
+          <a:p>
+            <a:pPr indent="0" marL="0">
+              <a:buNone/>
+            </a:pPr>
+            <a:r>
+              <a:rPr lang="en-US" sz="1400" b="1" dirty="0">
+                <a:solidFill>
+                  <a:srgbClr val="1B2A4A"/>
+                </a:solidFill>
+                <a:latin typeface="Calibri" pitchFamily="34" charset="0"/>
+                <a:ea typeface="Calibri" pitchFamily="34" charset="-122"/>
+                <a:cs typeface="Calibri" pitchFamily="34" charset="-120"/>
+              </a:rPr>
+              <a:t>Climate Change</a:t>
+            </a:r>
+            <a:endParaRPr lang="en-US" sz="1400" dirty="0"/>
+          </a:p>
+        </p:txBody>
+      </p:sp>
+      <p:sp>
+        <p:nvSpPr>
+          <p:cNvPr id="16" name="Text 14"/>
+          <p:cNvSpPr/>
+          <p:nvPr/>
+        </p:nvSpPr>
+        <p:spPr>
+          <a:xfrm>
+            <a:off x="6263640" y="1737360"/>
+            <a:ext cx="2286000" cy="1097280"/>
+          </a:xfrm>
+          <a:prstGeom prst="rect">
+            <a:avLst/>
+          </a:prstGeom>
+          <a:noFill/>
+          <a:ln/>
+        </p:spPr>
+        <p:txBody>
+          <a:bodyPr wrap="square" rtlCol="0" anchor="t"/>
+          <a:lstStyle/>
+          <a:p>
+            <a:pPr indent="0" marL="0">
+              <a:buNone/>
+            </a:pPr>
+            <a:r>
+              <a:rPr lang="en-US" sz="1100" dirty="0">
+                <a:solidFill>
+                  <a:srgbClr val="3D3A36"/>
+                </a:solidFill>
+                <a:latin typeface="Calibri" pitchFamily="34" charset="0"/>
+                <a:ea typeface="Calibri" pitchFamily="34" charset="-122"/>
+                <a:cs typeface="Calibri" pitchFamily="34" charset="-120"/>
+              </a:rPr>
+              <a:t>Burning fossil fuels increases greenhouse gases (CO₂, methane). Traps more heat. Rising temperatures, melting ice, rising sea levels, extreme weather.</a:t>
+            </a:r>
+            <a:endParaRPr lang="en-US" sz="1100" dirty="0"/>
           </a:p>
         </p:txBody>
       </p:sp>
@@ -1547,7 +1924,7 @@
     <p:bg>
       <p:bgPr>
         <a:solidFill>
-          <a:srgbClr val="FFFFFF"/>
+          <a:srgbClr val="FAF8F5"/>
         </a:solidFill>
       </p:bgPr>
     </p:bg>
@@ -1593,8 +1970,8 @@
         </p:nvSpPr>
         <p:spPr>
           <a:xfrm>
-            <a:off x="548640" y="274320"/>
-            <a:ext cx="8046720" cy="640080"/>
+            <a:off x="7772400" y="4709160"/>
+            <a:ext cx="1097280" cy="320040"/>
           </a:xfrm>
           <a:prstGeom prst="rect">
             <a:avLst/>
@@ -1603,7 +1980,46 @@
           <a:ln/>
         </p:spPr>
         <p:txBody>
-          <a:bodyPr wrap="square" lIns="0" tIns="0" rIns="0" bIns="0" rtlCol="0" anchor="ctr"/>
+          <a:bodyPr wrap="square" rtlCol="0" anchor="ctr"/>
+          <a:lstStyle/>
+          <a:p>
+            <a:pPr algn="r" indent="0" marL="0">
+              <a:buNone/>
+            </a:pPr>
+            <a:r>
+              <a:rPr lang="en-US" sz="900" dirty="0">
+                <a:solidFill>
+                  <a:srgbClr val="6B6660"/>
+                </a:solidFill>
+                <a:latin typeface="Calibri" pitchFamily="34" charset="0"/>
+                <a:ea typeface="Calibri" pitchFamily="34" charset="-122"/>
+                <a:cs typeface="Calibri" pitchFamily="34" charset="-120"/>
+              </a:rPr>
+              <a:t>3 / 5</a:t>
+            </a:r>
+            <a:endParaRPr lang="en-US" sz="900" dirty="0"/>
+          </a:p>
+        </p:txBody>
+      </p:sp>
+      <p:sp>
+        <p:nvSpPr>
+          <p:cNvPr id="4" name="Text 2"/>
+          <p:cNvSpPr/>
+          <p:nvPr/>
+        </p:nvSpPr>
+        <p:spPr>
+          <a:xfrm>
+            <a:off x="457200" y="274320"/>
+            <a:ext cx="8229600" cy="640080"/>
+          </a:xfrm>
+          <a:prstGeom prst="rect">
+            <a:avLst/>
+          </a:prstGeom>
+          <a:noFill/>
+          <a:ln/>
+        </p:spPr>
+        <p:txBody>
+          <a:bodyPr wrap="square" rtlCol="0" anchor="ctr"/>
           <a:lstStyle/>
           <a:p>
             <a:pPr indent="0" marL="0">
@@ -1618,7 +2034,7 @@
                 <a:ea typeface="Georgia" pitchFamily="34" charset="-122"/>
                 <a:cs typeface="Georgia" pitchFamily="34" charset="-120"/>
               </a:rPr>
-              <a:t>Problems &amp; Solutions</a:t>
+              <a:t>Positive Actions</a:t>
             </a:r>
             <a:endParaRPr lang="en-US" sz="2600" dirty="0"/>
           </a:p>
@@ -1626,22 +2042,154 @@
       </p:sp>
       <p:sp>
         <p:nvSpPr>
-          <p:cNvPr id="4" name="Shape 2"/>
-          <p:cNvSpPr/>
-          <p:nvPr/>
-        </p:nvSpPr>
-        <p:spPr>
-          <a:xfrm>
-            <a:off x="457200" y="1097280"/>
+          <p:cNvPr id="5" name="Text 3"/>
+          <p:cNvSpPr/>
+          <p:nvPr/>
+        </p:nvSpPr>
+        <p:spPr>
+          <a:xfrm>
+            <a:off x="457200" y="1188720"/>
             <a:ext cx="3840480" cy="3474720"/>
           </a:xfrm>
           <a:prstGeom prst="rect">
             <a:avLst/>
           </a:prstGeom>
-          <a:solidFill>
-            <a:srgbClr val="F3F1EE"/>
-          </a:solidFill>
+          <a:noFill/>
           <a:ln/>
+        </p:spPr>
+        <p:txBody>
+          <a:bodyPr wrap="square" rtlCol="0" anchor="t"/>
+          <a:lstStyle/>
+          <a:p>
+            <a:pPr marL="342900" indent="-342900">
+              <a:spcAft>
+                <a:spcPts val="600"/>
+              </a:spcAft>
+              <a:buSzPct val="100000"/>
+              <a:buChar char="•"/>
+            </a:pPr>
+            <a:r>
+              <a:rPr lang="en-US" sz="1400" dirty="0">
+                <a:solidFill>
+                  <a:srgbClr val="3D3A36"/>
+                </a:solidFill>
+                <a:latin typeface="Calibri" pitchFamily="34" charset="0"/>
+                <a:ea typeface="Calibri" pitchFamily="34" charset="-122"/>
+                <a:cs typeface="Calibri" pitchFamily="34" charset="-120"/>
+              </a:rPr>
+              <a:t>Conservation: protecting habitats and species</a:t>
+            </a:r>
+            <a:endParaRPr lang="en-US" sz="1400" dirty="0"/>
+          </a:p>
+          <a:p>
+            <a:pPr marL="342900" indent="-342900">
+              <a:spcAft>
+                <a:spcPts val="600"/>
+              </a:spcAft>
+              <a:buSzPct val="100000"/>
+              <a:buChar char="•"/>
+            </a:pPr>
+            <a:r>
+              <a:rPr lang="en-US" sz="1400" dirty="0">
+                <a:solidFill>
+                  <a:srgbClr val="3D3A36"/>
+                </a:solidFill>
+                <a:latin typeface="Calibri" pitchFamily="34" charset="0"/>
+                <a:ea typeface="Calibri" pitchFamily="34" charset="-122"/>
+                <a:cs typeface="Calibri" pitchFamily="34" charset="-120"/>
+              </a:rPr>
+              <a:t>Recycling: reduces waste and resource use</a:t>
+            </a:r>
+            <a:endParaRPr lang="en-US" sz="1400" dirty="0"/>
+          </a:p>
+          <a:p>
+            <a:pPr marL="342900" indent="-342900">
+              <a:spcAft>
+                <a:spcPts val="600"/>
+              </a:spcAft>
+              <a:buSzPct val="100000"/>
+              <a:buChar char="•"/>
+            </a:pPr>
+            <a:r>
+              <a:rPr lang="en-US" sz="1400" dirty="0">
+                <a:solidFill>
+                  <a:srgbClr val="3D3A36"/>
+                </a:solidFill>
+                <a:latin typeface="Calibri" pitchFamily="34" charset="0"/>
+                <a:ea typeface="Calibri" pitchFamily="34" charset="-122"/>
+                <a:cs typeface="Calibri" pitchFamily="34" charset="-120"/>
+              </a:rPr>
+              <a:t>Renewable energy: solar, wind, hydro — no CO₂</a:t>
+            </a:r>
+            <a:endParaRPr lang="en-US" sz="1400" dirty="0"/>
+          </a:p>
+          <a:p>
+            <a:pPr marL="342900" indent="-342900">
+              <a:spcAft>
+                <a:spcPts val="600"/>
+              </a:spcAft>
+              <a:buSzPct val="100000"/>
+              <a:buChar char="•"/>
+            </a:pPr>
+            <a:r>
+              <a:rPr lang="en-US" sz="1400" dirty="0">
+                <a:solidFill>
+                  <a:srgbClr val="3D3A36"/>
+                </a:solidFill>
+                <a:latin typeface="Calibri" pitchFamily="34" charset="0"/>
+                <a:ea typeface="Calibri" pitchFamily="34" charset="-122"/>
+                <a:cs typeface="Calibri" pitchFamily="34" charset="-120"/>
+              </a:rPr>
+              <a:t>Sustainable farming: protects soil and water</a:t>
+            </a:r>
+            <a:endParaRPr lang="en-US" sz="1400" dirty="0"/>
+          </a:p>
+          <a:p>
+            <a:pPr marL="342900" indent="-342900">
+              <a:spcAft>
+                <a:spcPts val="600"/>
+              </a:spcAft>
+              <a:buSzPct val="100000"/>
+              <a:buChar char="•"/>
+            </a:pPr>
+            <a:r>
+              <a:rPr lang="en-US" sz="1400" dirty="0">
+                <a:solidFill>
+                  <a:srgbClr val="3D3A36"/>
+                </a:solidFill>
+                <a:latin typeface="Calibri" pitchFamily="34" charset="0"/>
+                <a:ea typeface="Calibri" pitchFamily="34" charset="-122"/>
+                <a:cs typeface="Calibri" pitchFamily="34" charset="-120"/>
+              </a:rPr>
+              <a:t>Marine reserves: protect ocean ecosystems from overfishing</a:t>
+            </a:r>
+            <a:endParaRPr lang="en-US" sz="1400" dirty="0"/>
+          </a:p>
+        </p:txBody>
+      </p:sp>
+      <p:sp>
+        <p:nvSpPr>
+          <p:cNvPr id="6" name="Shape 4"/>
+          <p:cNvSpPr/>
+          <p:nvPr/>
+        </p:nvSpPr>
+        <p:spPr>
+          <a:xfrm>
+            <a:off x="4846320" y="1188720"/>
+            <a:ext cx="3840480" cy="3474720"/>
+          </a:xfrm>
+          <a:prstGeom prst="rect">
+            <a:avLst/>
+          </a:prstGeom>
+          <a:solidFill>
+            <a:srgbClr val="FFFFFF"/>
+          </a:solidFill>
+          <a:ln w="12700">
+            <a:solidFill>
+              <a:srgbClr val="E5E2DC"/>
+            </a:solidFill>
+            <a:prstDash val="solid"/>
+          </a:ln>
           <a:effectLst>
             <a:outerShdw sx="100000" sy="100000" kx="0" ky="0" algn="bl" rotWithShape="0" blurRad="50800" dist="25400" dir="8100000">
               <a:srgbClr val="000000">
@@ -1653,14 +2201,34 @@
       </p:sp>
       <p:sp>
         <p:nvSpPr>
-          <p:cNvPr id="5" name="Text 3"/>
-          <p:cNvSpPr/>
-          <p:nvPr/>
-        </p:nvSpPr>
-        <p:spPr>
-          <a:xfrm>
-            <a:off x="640080" y="1234440"/>
-            <a:ext cx="3474720" cy="411480"/>
+          <p:cNvPr id="7" name="Shape 5"/>
+          <p:cNvSpPr/>
+          <p:nvPr/>
+        </p:nvSpPr>
+        <p:spPr>
+          <a:xfrm>
+            <a:off x="4846320" y="1188720"/>
+            <a:ext cx="3840480" cy="54864"/>
+          </a:xfrm>
+          <a:prstGeom prst="rect">
+            <a:avLst/>
+          </a:prstGeom>
+          <a:solidFill>
+            <a:srgbClr val="2A9D8F"/>
+          </a:solidFill>
+          <a:ln/>
+        </p:spPr>
+      </p:sp>
+      <p:sp>
+        <p:nvSpPr>
+          <p:cNvPr id="8" name="Text 6"/>
+          <p:cNvSpPr/>
+          <p:nvPr/>
+        </p:nvSpPr>
+        <p:spPr>
+          <a:xfrm>
+            <a:off x="5120640" y="1371600"/>
+            <a:ext cx="3291840" cy="3108960"/>
           </a:xfrm>
           <a:prstGeom prst="rect">
             <a:avLst/>
@@ -1669,54 +2237,43 @@
           <a:ln/>
         </p:spPr>
         <p:txBody>
-          <a:bodyPr wrap="square" rtlCol="0" anchor="ctr"/>
-          <a:lstStyle/>
-          <a:p>
-            <a:pPr indent="0" marL="0">
-              <a:buNone/>
-            </a:pPr>
-            <a:r>
-              <a:rPr lang="en-US" sz="1600" b="1" dirty="0">
-                <a:solidFill>
-                  <a:srgbClr val="1B2A4A"/>
-                </a:solidFill>
-                <a:latin typeface="Georgia" pitchFamily="34" charset="0"/>
-                <a:ea typeface="Georgia" pitchFamily="34" charset="-122"/>
-                <a:cs typeface="Georgia" pitchFamily="34" charset="-120"/>
-              </a:rPr>
-              <a:t>The Problems</a:t>
-            </a:r>
-            <a:endParaRPr lang="en-US" sz="1600" dirty="0"/>
-          </a:p>
-        </p:txBody>
-      </p:sp>
-      <p:sp>
-        <p:nvSpPr>
-          <p:cNvPr id="6" name="Text 4"/>
-          <p:cNvSpPr/>
-          <p:nvPr/>
-        </p:nvSpPr>
-        <p:spPr>
-          <a:xfrm>
-            <a:off x="640080" y="1737360"/>
-            <a:ext cx="3474720" cy="2651760"/>
-          </a:xfrm>
-          <a:prstGeom prst="rect">
-            <a:avLst/>
-          </a:prstGeom>
-          <a:noFill/>
-          <a:ln/>
-        </p:spPr>
-        <p:txBody>
           <a:bodyPr wrap="square" rtlCol="0" anchor="t"/>
           <a:lstStyle/>
           <a:p>
-            <a:pPr marL="342900" indent="-342900">
+            <a:pPr indent="0" marL="0">
               <a:spcAft>
-                <a:spcPts val="600"/>
+                <a:spcPts val="400"/>
               </a:spcAft>
-              <a:buSzPct val="100000"/>
-              <a:buChar char="•"/>
+              <a:buNone/>
+            </a:pPr>
+            <a:r>
+              <a:rPr lang="en-US" sz="1600" b="1" dirty="0">
+                <a:solidFill>
+                  <a:srgbClr val="1B2A4A"/>
+                </a:solidFill>
+                <a:latin typeface="Calibri" pitchFamily="34" charset="0"/>
+                <a:ea typeface="Calibri" pitchFamily="34" charset="-122"/>
+                <a:cs typeface="Calibri" pitchFamily="34" charset="-120"/>
+              </a:rPr>
+              <a:t>Endangered Species</a:t>
+            </a:r>
+            <a:endParaRPr lang="en-US" sz="1600" dirty="0"/>
+          </a:p>
+          <a:p>
+            <a:pPr indent="0" marL="0">
+              <a:spcAft>
+                <a:spcPts val="400"/>
+              </a:spcAft>
+              <a:buNone/>
+            </a:pPr>
+            <a:endParaRPr lang="en-US" sz="1600" dirty="0"/>
+          </a:p>
+          <a:p>
+            <a:pPr indent="0" marL="0">
+              <a:spcAft>
+                <a:spcPts val="400"/>
+              </a:spcAft>
+              <a:buNone/>
             </a:pPr>
             <a:r>
               <a:rPr lang="en-US" sz="1300" dirty="0">
@@ -1727,17 +2284,16 @@
                 <a:ea typeface="Calibri" pitchFamily="34" charset="-122"/>
                 <a:cs typeface="Calibri" pitchFamily="34" charset="-120"/>
               </a:rPr>
-              <a:t>Habitat loss from deforestation</a:t>
-            </a:r>
-            <a:endParaRPr lang="en-US" sz="1300" dirty="0"/>
-          </a:p>
-          <a:p>
-            <a:pPr marL="342900" indent="-342900">
+              <a:t>Habitat loss is the #1 cause of extinction</a:t>
+            </a:r>
+            <a:endParaRPr lang="en-US" sz="1600" dirty="0"/>
+          </a:p>
+          <a:p>
+            <a:pPr indent="0" marL="0">
               <a:spcAft>
-                <a:spcPts val="600"/>
+                <a:spcPts val="400"/>
               </a:spcAft>
-              <a:buSzPct val="100000"/>
-              <a:buChar char="•"/>
+              <a:buNone/>
             </a:pPr>
             <a:r>
               <a:rPr lang="en-US" sz="1300" dirty="0">
@@ -1748,17 +2304,16 @@
                 <a:ea typeface="Calibri" pitchFamily="34" charset="-122"/>
                 <a:cs typeface="Calibri" pitchFamily="34" charset="-120"/>
               </a:rPr>
-              <a:t>Ocean pollution (plastics, oil)</a:t>
-            </a:r>
-            <a:endParaRPr lang="en-US" sz="1300" dirty="0"/>
-          </a:p>
-          <a:p>
-            <a:pPr marL="342900" indent="-342900">
+              <a:t>Pollution, hunting, and climate change also contribute</a:t>
+            </a:r>
+            <a:endParaRPr lang="en-US" sz="1600" dirty="0"/>
+          </a:p>
+          <a:p>
+            <a:pPr indent="0" marL="0">
               <a:spcAft>
-                <a:spcPts val="600"/>
+                <a:spcPts val="400"/>
               </a:spcAft>
-              <a:buSzPct val="100000"/>
-              <a:buChar char="•"/>
+              <a:buNone/>
             </a:pPr>
             <a:r>
               <a:rPr lang="en-US" sz="1300" dirty="0">
@@ -1769,17 +2324,16 @@
                 <a:ea typeface="Calibri" pitchFamily="34" charset="-122"/>
                 <a:cs typeface="Calibri" pitchFamily="34" charset="-120"/>
               </a:rPr>
-              <a:t>Air pollution from burning fossil fuels</a:t>
-            </a:r>
-            <a:endParaRPr lang="en-US" sz="1300" dirty="0"/>
-          </a:p>
-          <a:p>
-            <a:pPr marL="342900" indent="-342900">
+              <a:t>Conservation efforts: breeding programmes, national parks, laws</a:t>
+            </a:r>
+            <a:endParaRPr lang="en-US" sz="1600" dirty="0"/>
+          </a:p>
+          <a:p>
+            <a:pPr indent="0" marL="0">
               <a:spcAft>
-                <a:spcPts val="600"/>
+                <a:spcPts val="400"/>
               </a:spcAft>
-              <a:buSzPct val="100000"/>
-              <a:buChar char="•"/>
+              <a:buNone/>
             </a:pPr>
             <a:r>
               <a:rPr lang="en-US" sz="1300" dirty="0">
@@ -1790,238 +2344,29 @@
                 <a:ea typeface="Calibri" pitchFamily="34" charset="-122"/>
                 <a:cs typeface="Calibri" pitchFamily="34" charset="-120"/>
               </a:rPr>
-              <a:t>Biodiversity loss — species going extinct</a:t>
-            </a:r>
-            <a:endParaRPr lang="en-US" sz="1300" dirty="0"/>
-          </a:p>
-        </p:txBody>
-      </p:sp>
-      <p:sp>
-        <p:nvSpPr>
-          <p:cNvPr id="7" name="Shape 5"/>
-          <p:cNvSpPr/>
-          <p:nvPr/>
-        </p:nvSpPr>
-        <p:spPr>
-          <a:xfrm>
-            <a:off x="4846320" y="1097280"/>
-            <a:ext cx="3840480" cy="3474720"/>
-          </a:xfrm>
-          <a:prstGeom prst="rect">
-            <a:avLst/>
-          </a:prstGeom>
-          <a:solidFill>
-            <a:srgbClr val="F3F1EE"/>
-          </a:solidFill>
-          <a:ln/>
-          <a:effectLst>
-            <a:outerShdw sx="100000" sy="100000" kx="0" ky="0" algn="bl" rotWithShape="0" blurRad="50800" dist="25400" dir="8100000">
-              <a:srgbClr val="000000">
-                <a:alpha val="10000"/>
-              </a:srgbClr>
-            </a:outerShdw>
-          </a:effectLst>
-        </p:spPr>
-      </p:sp>
-      <p:sp>
-        <p:nvSpPr>
-          <p:cNvPr id="8" name="Text 6"/>
-          <p:cNvSpPr/>
-          <p:nvPr/>
-        </p:nvSpPr>
-        <p:spPr>
-          <a:xfrm>
-            <a:off x="5029200" y="1234440"/>
-            <a:ext cx="3474720" cy="411480"/>
-          </a:xfrm>
-          <a:prstGeom prst="rect">
-            <a:avLst/>
-          </a:prstGeom>
-          <a:noFill/>
-          <a:ln/>
-        </p:spPr>
-        <p:txBody>
-          <a:bodyPr wrap="square" rtlCol="0" anchor="ctr"/>
-          <a:lstStyle/>
+              <a:t>Success stories: bald eagle, giant panda populations recovering</a:t>
+            </a:r>
+            <a:endParaRPr lang="en-US" sz="1600" dirty="0"/>
+          </a:p>
           <a:p>
             <a:pPr indent="0" marL="0">
+              <a:spcAft>
+                <a:spcPts val="400"/>
+              </a:spcAft>
               <a:buNone/>
             </a:pPr>
             <a:r>
-              <a:rPr lang="en-US" sz="1600" b="1" dirty="0">
-                <a:solidFill>
-                  <a:srgbClr val="1B2A4A"/>
-                </a:solidFill>
-                <a:latin typeface="Georgia" pitchFamily="34" charset="0"/>
-                <a:ea typeface="Georgia" pitchFamily="34" charset="-122"/>
-                <a:cs typeface="Georgia" pitchFamily="34" charset="-120"/>
-              </a:rPr>
-              <a:t>What We Can Do</a:t>
+              <a:rPr lang="en-US" sz="1300" dirty="0">
+                <a:solidFill>
+                  <a:srgbClr val="3D3A36"/>
+                </a:solidFill>
+                <a:latin typeface="Calibri" pitchFamily="34" charset="0"/>
+                <a:ea typeface="Calibri" pitchFamily="34" charset="-122"/>
+                <a:cs typeface="Calibri" pitchFamily="34" charset="-120"/>
+              </a:rPr>
+              <a:t>Every species plays a role — losing one affects the whole ecosystem</a:t>
             </a:r>
             <a:endParaRPr lang="en-US" sz="1600" dirty="0"/>
-          </a:p>
-        </p:txBody>
-      </p:sp>
-      <p:sp>
-        <p:nvSpPr>
-          <p:cNvPr id="9" name="Text 7"/>
-          <p:cNvSpPr/>
-          <p:nvPr/>
-        </p:nvSpPr>
-        <p:spPr>
-          <a:xfrm>
-            <a:off x="5029200" y="1737360"/>
-            <a:ext cx="3474720" cy="2651760"/>
-          </a:xfrm>
-          <a:prstGeom prst="rect">
-            <a:avLst/>
-          </a:prstGeom>
-          <a:noFill/>
-          <a:ln/>
-        </p:spPr>
-        <p:txBody>
-          <a:bodyPr wrap="square" rtlCol="0" anchor="t"/>
-          <a:lstStyle/>
-          <a:p>
-            <a:pPr marL="342900" indent="-342900">
-              <a:spcAft>
-                <a:spcPts val="600"/>
-              </a:spcAft>
-              <a:buSzPct val="100000"/>
-              <a:buChar char="•"/>
-            </a:pPr>
-            <a:r>
-              <a:rPr lang="en-US" sz="1300" dirty="0">
-                <a:solidFill>
-                  <a:srgbClr val="3D3A36"/>
-                </a:solidFill>
-                <a:latin typeface="Calibri" pitchFamily="34" charset="0"/>
-                <a:ea typeface="Calibri" pitchFamily="34" charset="-122"/>
-                <a:cs typeface="Calibri" pitchFamily="34" charset="-120"/>
-              </a:rPr>
-              <a:t>Reduce, reuse, recycle</a:t>
-            </a:r>
-            <a:endParaRPr lang="en-US" sz="1300" dirty="0"/>
-          </a:p>
-          <a:p>
-            <a:pPr marL="342900" indent="-342900">
-              <a:spcAft>
-                <a:spcPts val="600"/>
-              </a:spcAft>
-              <a:buSzPct val="100000"/>
-              <a:buChar char="•"/>
-            </a:pPr>
-            <a:r>
-              <a:rPr lang="en-US" sz="1300" dirty="0">
-                <a:solidFill>
-                  <a:srgbClr val="3D3A36"/>
-                </a:solidFill>
-                <a:latin typeface="Calibri" pitchFamily="34" charset="0"/>
-                <a:ea typeface="Calibri" pitchFamily="34" charset="-122"/>
-                <a:cs typeface="Calibri" pitchFamily="34" charset="-120"/>
-              </a:rPr>
-              <a:t>Protect natural habitats (nature reserves)</a:t>
-            </a:r>
-            <a:endParaRPr lang="en-US" sz="1300" dirty="0"/>
-          </a:p>
-          <a:p>
-            <a:pPr marL="342900" indent="-342900">
-              <a:spcAft>
-                <a:spcPts val="600"/>
-              </a:spcAft>
-              <a:buSzPct val="100000"/>
-              <a:buChar char="•"/>
-            </a:pPr>
-            <a:r>
-              <a:rPr lang="en-US" sz="1300" dirty="0">
-                <a:solidFill>
-                  <a:srgbClr val="3D3A36"/>
-                </a:solidFill>
-                <a:latin typeface="Calibri" pitchFamily="34" charset="0"/>
-                <a:ea typeface="Calibri" pitchFamily="34" charset="-122"/>
-                <a:cs typeface="Calibri" pitchFamily="34" charset="-120"/>
-              </a:rPr>
-              <a:t>Use renewable energy sources</a:t>
-            </a:r>
-            <a:endParaRPr lang="en-US" sz="1300" dirty="0"/>
-          </a:p>
-          <a:p>
-            <a:pPr marL="342900" indent="-342900">
-              <a:spcAft>
-                <a:spcPts val="600"/>
-              </a:spcAft>
-              <a:buSzPct val="100000"/>
-              <a:buChar char="•"/>
-            </a:pPr>
-            <a:r>
-              <a:rPr lang="en-US" sz="1300" dirty="0">
-                <a:solidFill>
-                  <a:srgbClr val="3D3A36"/>
-                </a:solidFill>
-                <a:latin typeface="Calibri" pitchFamily="34" charset="0"/>
-                <a:ea typeface="Calibri" pitchFamily="34" charset="-122"/>
-                <a:cs typeface="Calibri" pitchFamily="34" charset="-120"/>
-              </a:rPr>
-              <a:t>Sustainable farming and fishing</a:t>
-            </a:r>
-            <a:endParaRPr lang="en-US" sz="1300" dirty="0"/>
-          </a:p>
-          <a:p>
-            <a:pPr marL="342900" indent="-342900">
-              <a:spcAft>
-                <a:spcPts val="600"/>
-              </a:spcAft>
-              <a:buSzPct val="100000"/>
-              <a:buChar char="•"/>
-            </a:pPr>
-            <a:r>
-              <a:rPr lang="en-US" sz="1300" dirty="0">
-                <a:solidFill>
-                  <a:srgbClr val="3D3A36"/>
-                </a:solidFill>
-                <a:latin typeface="Calibri" pitchFamily="34" charset="0"/>
-                <a:ea typeface="Calibri" pitchFamily="34" charset="-122"/>
-                <a:cs typeface="Calibri" pitchFamily="34" charset="-120"/>
-              </a:rPr>
-              <a:t>Plant trees to absorb CO₂</a:t>
-            </a:r>
-            <a:endParaRPr lang="en-US" sz="1300" dirty="0"/>
-          </a:p>
-        </p:txBody>
-      </p:sp>
-      <p:sp>
-        <p:nvSpPr>
-          <p:cNvPr id="10" name="Text 8"/>
-          <p:cNvSpPr/>
-          <p:nvPr/>
-        </p:nvSpPr>
-        <p:spPr>
-          <a:xfrm>
-            <a:off x="548640" y="4800600"/>
-            <a:ext cx="3657600" cy="274320"/>
-          </a:xfrm>
-          <a:prstGeom prst="rect">
-            <a:avLst/>
-          </a:prstGeom>
-          <a:noFill/>
-          <a:ln/>
-        </p:spPr>
-        <p:txBody>
-          <a:bodyPr wrap="square" rtlCol="0" anchor="ctr"/>
-          <a:lstStyle/>
-          <a:p>
-            <a:pPr indent="0" marL="0">
-              <a:buNone/>
-            </a:pPr>
-            <a:r>
-              <a:rPr lang="en-US" sz="800" dirty="0">
-                <a:solidFill>
-                  <a:srgbClr val="9B9690"/>
-                </a:solidFill>
-              </a:rPr>
-              <a:t>mrzocchi.com</a:t>
-            </a:r>
-            <a:endParaRPr lang="en-US" sz="800" dirty="0"/>
           </a:p>
         </p:txBody>
       </p:sp>
@@ -2036,6 +2381,284 @@
 <file path=ppt/slides/slide4.xml><?xml version="1.0" encoding="utf-8"?>
 <p:sld xmlns:a="http://schemas.openxmlformats.org/drawingml/2006/main" xmlns:r="http://schemas.openxmlformats.org/officeDocument/2006/relationships" xmlns:p="http://schemas.openxmlformats.org/presentationml/2006/main">
   <p:cSld name="Slide 4">
+    <p:bg>
+      <p:bgPr>
+        <a:solidFill>
+          <a:srgbClr val="FAF8F5"/>
+        </a:solidFill>
+      </p:bgPr>
+    </p:bg>
+    <p:spTree>
+      <p:nvGrpSpPr>
+        <p:cNvPr id="1" name=""/>
+        <p:cNvGrpSpPr/>
+        <p:nvPr/>
+      </p:nvGrpSpPr>
+      <p:grpSpPr>
+        <a:xfrm>
+          <a:off x="0" y="0"/>
+          <a:ext cx="0" cy="0"/>
+          <a:chOff x="0" y="0"/>
+          <a:chExt cx="0" cy="0"/>
+        </a:xfrm>
+      </p:grpSpPr>
+      <p:sp>
+        <p:nvSpPr>
+          <p:cNvPr id="2" name="Shape 0"/>
+          <p:cNvSpPr/>
+          <p:nvPr/>
+        </p:nvSpPr>
+        <p:spPr>
+          <a:xfrm>
+            <a:off x="0" y="0"/>
+            <a:ext cx="9144000" cy="54864"/>
+          </a:xfrm>
+          <a:prstGeom prst="rect">
+            <a:avLst/>
+          </a:prstGeom>
+          <a:solidFill>
+            <a:srgbClr val="2A9D8F"/>
+          </a:solidFill>
+          <a:ln/>
+        </p:spPr>
+      </p:sp>
+      <p:sp>
+        <p:nvSpPr>
+          <p:cNvPr id="3" name="Text 1"/>
+          <p:cNvSpPr/>
+          <p:nvPr/>
+        </p:nvSpPr>
+        <p:spPr>
+          <a:xfrm>
+            <a:off x="7772400" y="4709160"/>
+            <a:ext cx="1097280" cy="320040"/>
+          </a:xfrm>
+          <a:prstGeom prst="rect">
+            <a:avLst/>
+          </a:prstGeom>
+          <a:noFill/>
+          <a:ln/>
+        </p:spPr>
+        <p:txBody>
+          <a:bodyPr wrap="square" rtlCol="0" anchor="ctr"/>
+          <a:lstStyle/>
+          <a:p>
+            <a:pPr algn="r" indent="0" marL="0">
+              <a:buNone/>
+            </a:pPr>
+            <a:r>
+              <a:rPr lang="en-US" sz="900" dirty="0">
+                <a:solidFill>
+                  <a:srgbClr val="6B6660"/>
+                </a:solidFill>
+                <a:latin typeface="Calibri" pitchFamily="34" charset="0"/>
+                <a:ea typeface="Calibri" pitchFamily="34" charset="-122"/>
+                <a:cs typeface="Calibri" pitchFamily="34" charset="-120"/>
+              </a:rPr>
+              <a:t>4 / 5</a:t>
+            </a:r>
+            <a:endParaRPr lang="en-US" sz="900" dirty="0"/>
+          </a:p>
+        </p:txBody>
+      </p:sp>
+      <p:sp>
+        <p:nvSpPr>
+          <p:cNvPr id="4" name="Text 2"/>
+          <p:cNvSpPr/>
+          <p:nvPr/>
+        </p:nvSpPr>
+        <p:spPr>
+          <a:xfrm>
+            <a:off x="457200" y="274320"/>
+            <a:ext cx="8229600" cy="640080"/>
+          </a:xfrm>
+          <a:prstGeom prst="rect">
+            <a:avLst/>
+          </a:prstGeom>
+          <a:noFill/>
+          <a:ln/>
+        </p:spPr>
+        <p:txBody>
+          <a:bodyPr wrap="square" rtlCol="0" anchor="ctr"/>
+          <a:lstStyle/>
+          <a:p>
+            <a:pPr indent="0" marL="0">
+              <a:buNone/>
+            </a:pPr>
+            <a:r>
+              <a:rPr lang="en-US" sz="2600" b="1" dirty="0">
+                <a:solidFill>
+                  <a:srgbClr val="1B2A4A"/>
+                </a:solidFill>
+                <a:latin typeface="Georgia" pitchFamily="34" charset="0"/>
+                <a:ea typeface="Georgia" pitchFamily="34" charset="-122"/>
+                <a:cs typeface="Georgia" pitchFamily="34" charset="-120"/>
+              </a:rPr>
+              <a:t>What Can YOU Do?</a:t>
+            </a:r>
+            <a:endParaRPr lang="en-US" sz="2600" dirty="0"/>
+          </a:p>
+        </p:txBody>
+      </p:sp>
+      <p:sp>
+        <p:nvSpPr>
+          <p:cNvPr id="5" name="Text 3"/>
+          <p:cNvSpPr/>
+          <p:nvPr/>
+        </p:nvSpPr>
+        <p:spPr>
+          <a:xfrm>
+            <a:off x="457200" y="1097280"/>
+            <a:ext cx="8229600" cy="3657600"/>
+          </a:xfrm>
+          <a:prstGeom prst="rect">
+            <a:avLst/>
+          </a:prstGeom>
+          <a:noFill/>
+          <a:ln/>
+        </p:spPr>
+        <p:txBody>
+          <a:bodyPr wrap="square" rtlCol="0" anchor="t"/>
+          <a:lstStyle/>
+          <a:p>
+            <a:pPr marL="342900" indent="-342900">
+              <a:spcAft>
+                <a:spcPts val="800"/>
+              </a:spcAft>
+              <a:buSzPct val="100000"/>
+              <a:buChar char="•"/>
+            </a:pPr>
+            <a:r>
+              <a:rPr lang="en-US" sz="1400" dirty="0">
+                <a:solidFill>
+                  <a:srgbClr val="3D3A36"/>
+                </a:solidFill>
+                <a:latin typeface="Calibri" pitchFamily="34" charset="0"/>
+                <a:ea typeface="Calibri" pitchFamily="34" charset="-122"/>
+                <a:cs typeface="Calibri" pitchFamily="34" charset="-120"/>
+              </a:rPr>
+              <a:t>Reduce, Reuse, Recycle — minimise waste</a:t>
+            </a:r>
+            <a:endParaRPr lang="en-US" sz="1400" dirty="0"/>
+          </a:p>
+          <a:p>
+            <a:pPr marL="342900" indent="-342900">
+              <a:spcAft>
+                <a:spcPts val="800"/>
+              </a:spcAft>
+              <a:buSzPct val="100000"/>
+              <a:buChar char="•"/>
+            </a:pPr>
+            <a:r>
+              <a:rPr lang="en-US" sz="1400" dirty="0">
+                <a:solidFill>
+                  <a:srgbClr val="3D3A36"/>
+                </a:solidFill>
+                <a:latin typeface="Calibri" pitchFamily="34" charset="0"/>
+                <a:ea typeface="Calibri" pitchFamily="34" charset="-122"/>
+                <a:cs typeface="Calibri" pitchFamily="34" charset="-120"/>
+              </a:rPr>
+              <a:t>Walk, cycle, or use public transport — reduce emissions</a:t>
+            </a:r>
+            <a:endParaRPr lang="en-US" sz="1400" dirty="0"/>
+          </a:p>
+          <a:p>
+            <a:pPr marL="342900" indent="-342900">
+              <a:spcAft>
+                <a:spcPts val="800"/>
+              </a:spcAft>
+              <a:buSzPct val="100000"/>
+              <a:buChar char="•"/>
+            </a:pPr>
+            <a:r>
+              <a:rPr lang="en-US" sz="1400" dirty="0">
+                <a:solidFill>
+                  <a:srgbClr val="3D3A36"/>
+                </a:solidFill>
+                <a:latin typeface="Calibri" pitchFamily="34" charset="0"/>
+                <a:ea typeface="Calibri" pitchFamily="34" charset="-122"/>
+                <a:cs typeface="Calibri" pitchFamily="34" charset="-120"/>
+              </a:rPr>
+              <a:t>Save energy at home — turn off lights, reduce heating</a:t>
+            </a:r>
+            <a:endParaRPr lang="en-US" sz="1400" dirty="0"/>
+          </a:p>
+          <a:p>
+            <a:pPr marL="342900" indent="-342900">
+              <a:spcAft>
+                <a:spcPts val="800"/>
+              </a:spcAft>
+              <a:buSzPct val="100000"/>
+              <a:buChar char="•"/>
+            </a:pPr>
+            <a:r>
+              <a:rPr lang="en-US" sz="1400" dirty="0">
+                <a:solidFill>
+                  <a:srgbClr val="3D3A36"/>
+                </a:solidFill>
+                <a:latin typeface="Calibri" pitchFamily="34" charset="0"/>
+                <a:ea typeface="Calibri" pitchFamily="34" charset="-122"/>
+                <a:cs typeface="Calibri" pitchFamily="34" charset="-120"/>
+              </a:rPr>
+              <a:t>Eat less meat — livestock farming produces huge emissions</a:t>
+            </a:r>
+            <a:endParaRPr lang="en-US" sz="1400" dirty="0"/>
+          </a:p>
+          <a:p>
+            <a:pPr marL="342900" indent="-342900">
+              <a:spcAft>
+                <a:spcPts val="800"/>
+              </a:spcAft>
+              <a:buSzPct val="100000"/>
+              <a:buChar char="•"/>
+            </a:pPr>
+            <a:r>
+              <a:rPr lang="en-US" sz="1400" dirty="0">
+                <a:solidFill>
+                  <a:srgbClr val="3D3A36"/>
+                </a:solidFill>
+                <a:latin typeface="Calibri" pitchFamily="34" charset="0"/>
+                <a:ea typeface="Calibri" pitchFamily="34" charset="-122"/>
+                <a:cs typeface="Calibri" pitchFamily="34" charset="-120"/>
+              </a:rPr>
+              <a:t>Plant trees — they absorb CO₂ and provide habitats</a:t>
+            </a:r>
+            <a:endParaRPr lang="en-US" sz="1400" dirty="0"/>
+          </a:p>
+          <a:p>
+            <a:pPr marL="342900" indent="-342900">
+              <a:spcAft>
+                <a:spcPts val="800"/>
+              </a:spcAft>
+              <a:buSzPct val="100000"/>
+              <a:buChar char="•"/>
+            </a:pPr>
+            <a:r>
+              <a:rPr lang="en-US" sz="1400" dirty="0">
+                <a:solidFill>
+                  <a:srgbClr val="3D3A36"/>
+                </a:solidFill>
+                <a:latin typeface="Calibri" pitchFamily="34" charset="0"/>
+                <a:ea typeface="Calibri" pitchFamily="34" charset="-122"/>
+                <a:cs typeface="Calibri" pitchFamily="34" charset="-120"/>
+              </a:rPr>
+              <a:t>Spread awareness — educate others about environmental issues</a:t>
+            </a:r>
+            <a:endParaRPr lang="en-US" sz="1400" dirty="0"/>
+          </a:p>
+        </p:txBody>
+      </p:sp>
+    </p:spTree>
+  </p:cSld>
+  <p:clrMapOvr>
+    <a:masterClrMapping/>
+  </p:clrMapOvr>
+</p:sld>
+</file>
+
+<file path=ppt/slides/slide5.xml><?xml version="1.0" encoding="utf-8"?>
+<p:sld xmlns:a="http://schemas.openxmlformats.org/drawingml/2006/main" xmlns:r="http://schemas.openxmlformats.org/officeDocument/2006/relationships" xmlns:p="http://schemas.openxmlformats.org/presentationml/2006/main">
+  <p:cSld name="Slide 5">
     <p:bg>
       <p:bgPr>
         <a:solidFill>
@@ -2066,13 +2689,13 @@
         <p:spPr>
           <a:xfrm>
             <a:off x="0" y="0"/>
-            <a:ext cx="9144000" cy="54864"/>
-          </a:xfrm>
-          <a:prstGeom prst="rect">
-            <a:avLst/>
-          </a:prstGeom>
-          <a:solidFill>
-            <a:srgbClr val="2A9D8F"/>
+            <a:ext cx="109728" cy="5143500"/>
+          </a:xfrm>
+          <a:prstGeom prst="rect">
+            <a:avLst/>
+          </a:prstGeom>
+          <a:solidFill>
+            <a:srgbClr val="E9C46A"/>
           </a:solidFill>
           <a:ln/>
         </p:spPr>
@@ -2085,8 +2708,8 @@
         </p:nvSpPr>
         <p:spPr>
           <a:xfrm>
-            <a:off x="548640" y="457200"/>
-            <a:ext cx="8046720" cy="640080"/>
+            <a:off x="731520" y="457200"/>
+            <a:ext cx="7772400" cy="731520"/>
           </a:xfrm>
           <a:prstGeom prst="rect">
             <a:avLst/>
@@ -2102,7 +2725,7 @@
               <a:buNone/>
             </a:pPr>
             <a:r>
-              <a:rPr lang="en-US" sz="2800" b="1" dirty="0">
+              <a:rPr lang="en-US" sz="3200" b="1" dirty="0">
                 <a:solidFill>
                   <a:srgbClr val="FFFFFF"/>
                 </a:solidFill>
@@ -2112,7 +2735,7 @@
               </a:rPr>
               <a:t>Key Takeaways</a:t>
             </a:r>
-            <a:endParaRPr lang="en-US" sz="2800" dirty="0"/>
+            <a:endParaRPr lang="en-US" sz="3200" dirty="0"/>
           </a:p>
         </p:txBody>
       </p:sp>
@@ -2124,8 +2747,8 @@
         </p:nvSpPr>
         <p:spPr>
           <a:xfrm>
-            <a:off x="731520" y="1371600"/>
-            <a:ext cx="7680960" cy="3200400"/>
+            <a:off x="731520" y="1463040"/>
+            <a:ext cx="7772400" cy="3200400"/>
           </a:xfrm>
           <a:prstGeom prst="rect">
             <a:avLst/>
@@ -2145,7 +2768,7 @@
               <a:buChar char="•"/>
             </a:pPr>
             <a:r>
-              <a:rPr lang="en-US" sz="1600" dirty="0">
+              <a:rPr lang="en-US" sz="1500" dirty="0">
                 <a:solidFill>
                   <a:srgbClr val="CADCFC"/>
                 </a:solidFill>
@@ -2153,9 +2776,9 @@
                 <a:ea typeface="Calibri" pitchFamily="34" charset="-122"/>
                 <a:cs typeface="Calibri" pitchFamily="34" charset="-120"/>
               </a:rPr>
-              <a:t>Humans impact ecosystems through deforestation, pollution, and climate change</a:t>
-            </a:r>
-            <a:endParaRPr lang="en-US" sz="1600" dirty="0"/>
+              <a:t>Deforestation, pollution, climate change — major human impacts</a:t>
+            </a:r>
+            <a:endParaRPr lang="en-US" sz="1500" dirty="0"/>
           </a:p>
           <a:p>
             <a:pPr marL="342900" indent="-342900">
@@ -2166,7 +2789,7 @@
               <a:buChar char="•"/>
             </a:pPr>
             <a:r>
-              <a:rPr lang="en-US" sz="1600" dirty="0">
+              <a:rPr lang="en-US" sz="1500" dirty="0">
                 <a:solidFill>
                   <a:srgbClr val="CADCFC"/>
                 </a:solidFill>
@@ -2174,9 +2797,9 @@
                 <a:ea typeface="Calibri" pitchFamily="34" charset="-122"/>
                 <a:cs typeface="Calibri" pitchFamily="34" charset="-120"/>
               </a:rPr>
-              <a:t>Loss of biodiversity weakens entire ecosystems</a:t>
-            </a:r>
-            <a:endParaRPr lang="en-US" sz="1600" dirty="0"/>
+              <a:t>Burning fossil fuels → more CO₂ → global warming</a:t>
+            </a:r>
+            <a:endParaRPr lang="en-US" sz="1500" dirty="0"/>
           </a:p>
           <a:p>
             <a:pPr marL="342900" indent="-342900">
@@ -2187,7 +2810,7 @@
               <a:buChar char="•"/>
             </a:pPr>
             <a:r>
-              <a:rPr lang="en-US" sz="1600" dirty="0">
+              <a:rPr lang="en-US" sz="1500" dirty="0">
                 <a:solidFill>
                   <a:srgbClr val="CADCFC"/>
                 </a:solidFill>
@@ -2195,9 +2818,9 @@
                 <a:ea typeface="Calibri" pitchFamily="34" charset="-122"/>
                 <a:cs typeface="Calibri" pitchFamily="34" charset="-120"/>
               </a:rPr>
-              <a:t>Solutions: conservation, renewable energy, reducing waste</a:t>
-            </a:r>
-            <a:endParaRPr lang="en-US" sz="1600" dirty="0"/>
+              <a:t>Conservation, recycling, renewable energy — positive actions</a:t>
+            </a:r>
+            <a:endParaRPr lang="en-US" sz="1500" dirty="0"/>
           </a:p>
           <a:p>
             <a:pPr marL="342900" indent="-342900">
@@ -2208,7 +2831,7 @@
               <a:buChar char="•"/>
             </a:pPr>
             <a:r>
-              <a:rPr lang="en-US" sz="1600" dirty="0">
+              <a:rPr lang="en-US" sz="1500" dirty="0">
                 <a:solidFill>
                   <a:srgbClr val="CADCFC"/>
                 </a:solidFill>
@@ -2216,9 +2839,30 @@
                 <a:ea typeface="Calibri" pitchFamily="34" charset="-122"/>
                 <a:cs typeface="Calibri" pitchFamily="34" charset="-120"/>
               </a:rPr>
-              <a:t>Individual actions (recycling, reducing waste) make a difference</a:t>
-            </a:r>
-            <a:endParaRPr lang="en-US" sz="1600" dirty="0"/>
+              <a:t>Habitat loss is #1 cause of species extinction</a:t>
+            </a:r>
+            <a:endParaRPr lang="en-US" sz="1500" dirty="0"/>
+          </a:p>
+          <a:p>
+            <a:pPr marL="342900" indent="-342900">
+              <a:spcAft>
+                <a:spcPts val="1000"/>
+              </a:spcAft>
+              <a:buSzPct val="100000"/>
+              <a:buChar char="•"/>
+            </a:pPr>
+            <a:r>
+              <a:rPr lang="en-US" sz="1500" dirty="0">
+                <a:solidFill>
+                  <a:srgbClr val="CADCFC"/>
+                </a:solidFill>
+                <a:latin typeface="Calibri" pitchFamily="34" charset="0"/>
+                <a:ea typeface="Calibri" pitchFamily="34" charset="-122"/>
+                <a:cs typeface="Calibri" pitchFamily="34" charset="-120"/>
+              </a:rPr>
+              <a:t>Individual actions matter: reduce, reuse, recycle, plant trees</a:t>
+            </a:r>
+            <a:endParaRPr lang="en-US" sz="1500" dirty="0"/>
           </a:p>
         </p:txBody>
       </p:sp>
@@ -2230,8 +2874,8 @@
         </p:nvSpPr>
         <p:spPr>
           <a:xfrm>
-            <a:off x="548640" y="4572000"/>
-            <a:ext cx="3657600" cy="274320"/>
+            <a:off x="731520" y="4572000"/>
+            <a:ext cx="7772400" cy="365760"/>
           </a:xfrm>
           <a:prstGeom prst="rect">
             <a:avLst/>
@@ -2247,14 +2891,17 @@
               <a:buNone/>
             </a:pPr>
             <a:r>
-              <a:rPr lang="en-US" sz="1000" dirty="0">
-                <a:solidFill>
-                  <a:srgbClr val="6B6660"/>
-                </a:solidFill>
+              <a:rPr lang="en-US" sz="1100" dirty="0">
+                <a:solidFill>
+                  <a:srgbClr val="E9C46A"/>
+                </a:solidFill>
+                <a:latin typeface="Calibri" pitchFamily="34" charset="0"/>
+                <a:ea typeface="Calibri" pitchFamily="34" charset="-122"/>
+                <a:cs typeface="Calibri" pitchFamily="34" charset="-120"/>
               </a:rPr>
               <a:t>mrzocchi.com</a:t>
             </a:r>
-            <a:endParaRPr lang="en-US" sz="1000" dirty="0"/>
+            <a:endParaRPr lang="en-US" sz="1100" dirty="0"/>
           </a:p>
         </p:txBody>
       </p:sp>

--- a/static/ppts/G6_Sci_T4_Human_Impact.pptx
+++ b/static/ppts/G6_Sci_T4_Human_Impact.pptx
@@ -10,9 +10,12 @@
     <p:sldId id="258" r:id="rId4"/>
     <p:sldId id="259" r:id="rId5"/>
     <p:sldId id="260" r:id="rId6"/>
+    <p:sldId id="261" r:id="rId7"/>
+    <p:sldId id="262" r:id="rId8"/>
+    <p:sldId id="263" r:id="rId9"/>
   </p:sldIdLst>
   <p:notesMasterIdLst>
-    <p:notesMasterId r:id="rId7"/>
+    <p:notesMasterId r:id="rId10"/>
   </p:notesMasterIdLst>
   <p:sldSz cx="9144000" cy="5143500"/>
   <p:notesSz cx="5143500" cy="9144000"/>
@@ -900,6 +903,270 @@
 </p:notes>
 </file>
 
+<file path=ppt/notesSlides/notesSlide6.xml><?xml version="1.0" encoding="utf-8"?>
+<p:notes xmlns:a="http://schemas.openxmlformats.org/drawingml/2006/main" xmlns:r="http://schemas.openxmlformats.org/officeDocument/2006/relationships" xmlns:p="http://schemas.openxmlformats.org/presentationml/2006/main">
+  <p:cSld>
+    <p:spTree>
+      <p:nvGrpSpPr>
+        <p:cNvPr id="1" name=""/>
+        <p:cNvGrpSpPr/>
+        <p:nvPr/>
+      </p:nvGrpSpPr>
+      <p:grpSpPr>
+        <a:xfrm>
+          <a:off x="0" y="0"/>
+          <a:ext cx="0" cy="0"/>
+          <a:chOff x="0" y="0"/>
+          <a:chExt cx="0" cy="0"/>
+        </a:xfrm>
+      </p:grpSpPr>
+      <p:sp>
+        <p:nvSpPr>
+          <p:cNvPr id="2" name="Slide Image Placeholder 1"/>
+          <p:cNvSpPr>
+            <a:spLocks noGrp="1" noRot="1" noChangeAspect="1"/>
+          </p:cNvSpPr>
+          <p:nvPr>
+            <p:ph type="sldImg"/>
+          </p:nvPr>
+        </p:nvSpPr>
+        <p:spPr/>
+      </p:sp>
+      <p:sp>
+        <p:nvSpPr>
+          <p:cNvPr id="3" name="Notes Placeholder 2"/>
+          <p:cNvSpPr>
+            <a:spLocks noGrp="1"/>
+          </p:cNvSpPr>
+          <p:nvPr>
+            <p:ph type="body" idx="1"/>
+          </p:nvPr>
+        </p:nvSpPr>
+        <p:spPr/>
+        <p:txBody>
+          <a:bodyPr/>
+          <a:lstStyle/>
+          <a:p>
+            <a:r>
+              <a:rPr lang="en-US" dirty="0"/>
+              <a:t/>
+            </a:r>
+            <a:endParaRPr lang="en-US" dirty="0"/>
+          </a:p>
+        </p:txBody>
+      </p:sp>
+      <p:sp>
+        <p:nvSpPr>
+          <p:cNvPr id="4" name="Slide Number Placeholder 3"/>
+          <p:cNvSpPr>
+            <a:spLocks noGrp="1"/>
+          </p:cNvSpPr>
+          <p:nvPr>
+            <p:ph type="sldNum" sz="quarter" idx="10"/>
+          </p:nvPr>
+        </p:nvSpPr>
+        <p:spPr/>
+        <p:txBody>
+          <a:bodyPr/>
+          <a:lstStyle/>
+          <a:p>
+            <a:fld id="{F7021451-1387-4CA6-816F-3879F97B5CBC}" type="slidenum">
+              <a:rPr lang="en-US"/>
+              <a:t>6</a:t>
+            </a:fld>
+            <a:endParaRPr lang="en-US"/>
+          </a:p>
+        </p:txBody>
+      </p:sp>
+    </p:spTree>
+    <p:extLst>
+      <p:ext uri="{BB962C8B-B14F-4D97-AF65-F5344CB8AC3E}">
+        <p14:creationId xmlns:p14="http://schemas.microsoft.com/office/powerpoint/2010/main" val="1024086991"/>
+      </p:ext>
+    </p:extLst>
+  </p:cSld>
+  <p:clrMapOvr>
+    <a:masterClrMapping/>
+  </p:clrMapOvr>
+</p:notes>
+</file>
+
+<file path=ppt/notesSlides/notesSlide7.xml><?xml version="1.0" encoding="utf-8"?>
+<p:notes xmlns:a="http://schemas.openxmlformats.org/drawingml/2006/main" xmlns:r="http://schemas.openxmlformats.org/officeDocument/2006/relationships" xmlns:p="http://schemas.openxmlformats.org/presentationml/2006/main">
+  <p:cSld>
+    <p:spTree>
+      <p:nvGrpSpPr>
+        <p:cNvPr id="1" name=""/>
+        <p:cNvGrpSpPr/>
+        <p:nvPr/>
+      </p:nvGrpSpPr>
+      <p:grpSpPr>
+        <a:xfrm>
+          <a:off x="0" y="0"/>
+          <a:ext cx="0" cy="0"/>
+          <a:chOff x="0" y="0"/>
+          <a:chExt cx="0" cy="0"/>
+        </a:xfrm>
+      </p:grpSpPr>
+      <p:sp>
+        <p:nvSpPr>
+          <p:cNvPr id="2" name="Slide Image Placeholder 1"/>
+          <p:cNvSpPr>
+            <a:spLocks noGrp="1" noRot="1" noChangeAspect="1"/>
+          </p:cNvSpPr>
+          <p:nvPr>
+            <p:ph type="sldImg"/>
+          </p:nvPr>
+        </p:nvSpPr>
+        <p:spPr/>
+      </p:sp>
+      <p:sp>
+        <p:nvSpPr>
+          <p:cNvPr id="3" name="Notes Placeholder 2"/>
+          <p:cNvSpPr>
+            <a:spLocks noGrp="1"/>
+          </p:cNvSpPr>
+          <p:nvPr>
+            <p:ph type="body" idx="1"/>
+          </p:nvPr>
+        </p:nvSpPr>
+        <p:spPr/>
+        <p:txBody>
+          <a:bodyPr/>
+          <a:lstStyle/>
+          <a:p>
+            <a:r>
+              <a:rPr lang="en-US" dirty="0"/>
+              <a:t/>
+            </a:r>
+            <a:endParaRPr lang="en-US" dirty="0"/>
+          </a:p>
+        </p:txBody>
+      </p:sp>
+      <p:sp>
+        <p:nvSpPr>
+          <p:cNvPr id="4" name="Slide Number Placeholder 3"/>
+          <p:cNvSpPr>
+            <a:spLocks noGrp="1"/>
+          </p:cNvSpPr>
+          <p:nvPr>
+            <p:ph type="sldNum" sz="quarter" idx="10"/>
+          </p:nvPr>
+        </p:nvSpPr>
+        <p:spPr/>
+        <p:txBody>
+          <a:bodyPr/>
+          <a:lstStyle/>
+          <a:p>
+            <a:fld id="{F7021451-1387-4CA6-816F-3879F97B5CBC}" type="slidenum">
+              <a:rPr lang="en-US"/>
+              <a:t>7</a:t>
+            </a:fld>
+            <a:endParaRPr lang="en-US"/>
+          </a:p>
+        </p:txBody>
+      </p:sp>
+    </p:spTree>
+    <p:extLst>
+      <p:ext uri="{BB962C8B-B14F-4D97-AF65-F5344CB8AC3E}">
+        <p14:creationId xmlns:p14="http://schemas.microsoft.com/office/powerpoint/2010/main" val="1024086991"/>
+      </p:ext>
+    </p:extLst>
+  </p:cSld>
+  <p:clrMapOvr>
+    <a:masterClrMapping/>
+  </p:clrMapOvr>
+</p:notes>
+</file>
+
+<file path=ppt/notesSlides/notesSlide8.xml><?xml version="1.0" encoding="utf-8"?>
+<p:notes xmlns:a="http://schemas.openxmlformats.org/drawingml/2006/main" xmlns:r="http://schemas.openxmlformats.org/officeDocument/2006/relationships" xmlns:p="http://schemas.openxmlformats.org/presentationml/2006/main">
+  <p:cSld>
+    <p:spTree>
+      <p:nvGrpSpPr>
+        <p:cNvPr id="1" name=""/>
+        <p:cNvGrpSpPr/>
+        <p:nvPr/>
+      </p:nvGrpSpPr>
+      <p:grpSpPr>
+        <a:xfrm>
+          <a:off x="0" y="0"/>
+          <a:ext cx="0" cy="0"/>
+          <a:chOff x="0" y="0"/>
+          <a:chExt cx="0" cy="0"/>
+        </a:xfrm>
+      </p:grpSpPr>
+      <p:sp>
+        <p:nvSpPr>
+          <p:cNvPr id="2" name="Slide Image Placeholder 1"/>
+          <p:cNvSpPr>
+            <a:spLocks noGrp="1" noRot="1" noChangeAspect="1"/>
+          </p:cNvSpPr>
+          <p:nvPr>
+            <p:ph type="sldImg"/>
+          </p:nvPr>
+        </p:nvSpPr>
+        <p:spPr/>
+      </p:sp>
+      <p:sp>
+        <p:nvSpPr>
+          <p:cNvPr id="3" name="Notes Placeholder 2"/>
+          <p:cNvSpPr>
+            <a:spLocks noGrp="1"/>
+          </p:cNvSpPr>
+          <p:nvPr>
+            <p:ph type="body" idx="1"/>
+          </p:nvPr>
+        </p:nvSpPr>
+        <p:spPr/>
+        <p:txBody>
+          <a:bodyPr/>
+          <a:lstStyle/>
+          <a:p>
+            <a:r>
+              <a:rPr lang="en-US" dirty="0"/>
+              <a:t/>
+            </a:r>
+            <a:endParaRPr lang="en-US" dirty="0"/>
+          </a:p>
+        </p:txBody>
+      </p:sp>
+      <p:sp>
+        <p:nvSpPr>
+          <p:cNvPr id="4" name="Slide Number Placeholder 3"/>
+          <p:cNvSpPr>
+            <a:spLocks noGrp="1"/>
+          </p:cNvSpPr>
+          <p:nvPr>
+            <p:ph type="sldNum" sz="quarter" idx="10"/>
+          </p:nvPr>
+        </p:nvSpPr>
+        <p:spPr/>
+        <p:txBody>
+          <a:bodyPr/>
+          <a:lstStyle/>
+          <a:p>
+            <a:fld id="{F7021451-1387-4CA6-816F-3879F97B5CBC}" type="slidenum">
+              <a:rPr lang="en-US"/>
+              <a:t>8</a:t>
+            </a:fld>
+            <a:endParaRPr lang="en-US"/>
+          </a:p>
+        </p:txBody>
+      </p:sp>
+    </p:spTree>
+    <p:extLst>
+      <p:ext uri="{BB962C8B-B14F-4D97-AF65-F5344CB8AC3E}">
+        <p14:creationId xmlns:p14="http://schemas.microsoft.com/office/powerpoint/2010/main" val="1024086991"/>
+      </p:ext>
+    </p:extLst>
+  </p:cSld>
+  <p:clrMapOvr>
+    <a:masterClrMapping/>
+  </p:clrMapOvr>
+</p:notes>
+</file>
+
 <file path=ppt/slideLayouts/slideLayout1.xml><?xml version="1.0" encoding="utf-8"?>
 <p:sldLayout xmlns:a="http://schemas.openxmlformats.org/drawingml/2006/main" xmlns:r="http://schemas.openxmlformats.org/officeDocument/2006/relationships" xmlns:p="http://schemas.openxmlformats.org/presentationml/2006/main" preserve="1">
   <p:cSld name="DEFAULT">
@@ -1210,13 +1477,6 @@
 <file path=ppt/slides/slide1.xml><?xml version="1.0" encoding="utf-8"?>
 <p:sld xmlns:a="http://schemas.openxmlformats.org/drawingml/2006/main" xmlns:r="http://schemas.openxmlformats.org/officeDocument/2006/relationships" xmlns:p="http://schemas.openxmlformats.org/presentationml/2006/main">
   <p:cSld name="Slide 1">
-    <p:bg>
-      <p:bgPr>
-        <a:solidFill>
-          <a:srgbClr val="1B2A4A"/>
-        </a:solidFill>
-      </p:bgPr>
-    </p:bg>
     <p:spTree>
       <p:nvGrpSpPr>
         <p:cNvPr id="1" name=""/>
@@ -1240,7 +1500,27 @@
         <p:spPr>
           <a:xfrm>
             <a:off x="0" y="0"/>
-            <a:ext cx="109728" cy="5143500"/>
+            <a:ext cx="9144000" cy="5143500"/>
+          </a:xfrm>
+          <a:prstGeom prst="rect">
+            <a:avLst/>
+          </a:prstGeom>
+          <a:solidFill>
+            <a:srgbClr val="1B2A4A"/>
+          </a:solidFill>
+          <a:ln/>
+        </p:spPr>
+      </p:sp>
+      <p:sp>
+        <p:nvSpPr>
+          <p:cNvPr id="3" name="Shape 1"/>
+          <p:cNvSpPr/>
+          <p:nvPr/>
+        </p:nvSpPr>
+        <p:spPr>
+          <a:xfrm>
+            <a:off x="0" y="4777740"/>
+            <a:ext cx="9144000" cy="365760"/>
           </a:xfrm>
           <a:prstGeom prst="rect">
             <a:avLst/>
@@ -1253,14 +1533,14 @@
       </p:sp>
       <p:sp>
         <p:nvSpPr>
-          <p:cNvPr id="3" name="Text 1"/>
+          <p:cNvPr id="4" name="Text 2"/>
           <p:cNvSpPr/>
           <p:nvPr/>
         </p:nvSpPr>
         <p:spPr>
           <a:xfrm>
             <a:off x="731520" y="1097280"/>
-            <a:ext cx="7772400" cy="1371600"/>
+            <a:ext cx="7680960" cy="457200"/>
           </a:xfrm>
           <a:prstGeom prst="rect">
             <a:avLst/>
@@ -1270,6 +1550,45 @@
         </p:spPr>
         <p:txBody>
           <a:bodyPr wrap="square" rtlCol="0" anchor="ctr"/>
+          <a:lstStyle/>
+          <a:p>
+            <a:pPr indent="0" marL="0">
+              <a:buNone/>
+            </a:pPr>
+            <a:r>
+              <a:rPr lang="en-US" sz="1400" b="1" spc="400" kern="0" dirty="0">
+                <a:solidFill>
+                  <a:srgbClr val="2A9D8F"/>
+                </a:solidFill>
+                <a:latin typeface="Calibri" pitchFamily="34" charset="0"/>
+                <a:ea typeface="Calibri" pitchFamily="34" charset="-122"/>
+                <a:cs typeface="Calibri" pitchFamily="34" charset="-120"/>
+              </a:rPr>
+              <a:t>GRADE 6 SCIENCE</a:t>
+            </a:r>
+            <a:endParaRPr lang="en-US" sz="1400" dirty="0"/>
+          </a:p>
+        </p:txBody>
+      </p:sp>
+      <p:sp>
+        <p:nvSpPr>
+          <p:cNvPr id="5" name="Text 3"/>
+          <p:cNvSpPr/>
+          <p:nvPr/>
+        </p:nvSpPr>
+        <p:spPr>
+          <a:xfrm>
+            <a:off x="731520" y="1645920"/>
+            <a:ext cx="7680960" cy="1463040"/>
+          </a:xfrm>
+          <a:prstGeom prst="rect">
+            <a:avLst/>
+          </a:prstGeom>
+          <a:noFill/>
+          <a:ln/>
+        </p:spPr>
+        <p:txBody>
+          <a:bodyPr wrap="square" rtlCol="0" anchor="t"/>
           <a:lstStyle/>
           <a:p>
             <a:pPr indent="0" marL="0">
@@ -1284,46 +1603,63 @@
                 <a:ea typeface="Georgia" pitchFamily="34" charset="-122"/>
                 <a:cs typeface="Georgia" pitchFamily="34" charset="-120"/>
               </a:rPr>
-              <a:t>Human Impact on Ecosystems</a:t>
+              <a:t>Human Impact</a:t>
             </a:r>
             <a:endParaRPr lang="en-US" sz="4000" dirty="0"/>
           </a:p>
-        </p:txBody>
-      </p:sp>
-      <p:sp>
-        <p:nvSpPr>
-          <p:cNvPr id="4" name="Text 2"/>
-          <p:cNvSpPr/>
-          <p:nvPr/>
-        </p:nvSpPr>
-        <p:spPr>
-          <a:xfrm>
-            <a:off x="731520" y="2560320"/>
-            <a:ext cx="7772400" cy="548640"/>
-          </a:xfrm>
-          <a:prstGeom prst="rect">
-            <a:avLst/>
-          </a:prstGeom>
-          <a:noFill/>
-          <a:ln/>
-        </p:spPr>
-        <p:txBody>
-          <a:bodyPr wrap="square" rtlCol="0" anchor="ctr"/>
-          <a:lstStyle/>
           <a:p>
             <a:pPr indent="0" marL="0">
               <a:buNone/>
             </a:pPr>
             <a:r>
-              <a:rPr lang="en-US" sz="1600" dirty="0">
-                <a:solidFill>
-                  <a:srgbClr val="E9C46A"/>
+              <a:rPr lang="en-US" sz="4000" b="1" dirty="0">
+                <a:solidFill>
+                  <a:srgbClr val="FFFFFF"/>
+                </a:solidFill>
+                <a:latin typeface="Georgia" pitchFamily="34" charset="0"/>
+                <a:ea typeface="Georgia" pitchFamily="34" charset="-122"/>
+                <a:cs typeface="Georgia" pitchFamily="34" charset="-120"/>
+              </a:rPr>
+              <a:t>on Ecosystems</a:t>
+            </a:r>
+            <a:endParaRPr lang="en-US" sz="4000" dirty="0"/>
+          </a:p>
+        </p:txBody>
+      </p:sp>
+      <p:sp>
+        <p:nvSpPr>
+          <p:cNvPr id="6" name="Text 4"/>
+          <p:cNvSpPr/>
+          <p:nvPr/>
+        </p:nvSpPr>
+        <p:spPr>
+          <a:xfrm>
+            <a:off x="731520" y="3200400"/>
+            <a:ext cx="7680960" cy="548640"/>
+          </a:xfrm>
+          <a:prstGeom prst="rect">
+            <a:avLst/>
+          </a:prstGeom>
+          <a:noFill/>
+          <a:ln/>
+        </p:spPr>
+        <p:txBody>
+          <a:bodyPr wrap="square" rtlCol="0" anchor="ctr"/>
+          <a:lstStyle/>
+          <a:p>
+            <a:pPr indent="0" marL="0">
+              <a:buNone/>
+            </a:pPr>
+            <a:r>
+              <a:rPr lang="en-US" sz="1600" i="1" dirty="0">
+                <a:solidFill>
+                  <a:srgbClr val="9B9690"/>
                 </a:solidFill>
                 <a:latin typeface="Calibri" pitchFamily="34" charset="0"/>
                 <a:ea typeface="Calibri" pitchFamily="34" charset="-122"/>
                 <a:cs typeface="Calibri" pitchFamily="34" charset="-120"/>
               </a:rPr>
-              <a:t>Grade 6 Science · Mr Zocchi</a:t>
+              <a:t>How we change the natural world</a:t>
             </a:r>
             <a:endParaRPr lang="en-US" sz="1600" dirty="0"/>
           </a:p>
@@ -1331,36 +1667,14 @@
       </p:sp>
       <p:sp>
         <p:nvSpPr>
-          <p:cNvPr id="5" name="Shape 3"/>
-          <p:cNvSpPr/>
-          <p:nvPr/>
-        </p:nvSpPr>
-        <p:spPr>
-          <a:xfrm>
-            <a:off x="731520" y="3474720"/>
-            <a:ext cx="2011680" cy="411480"/>
-          </a:xfrm>
-          <a:prstGeom prst="roundRect">
-            <a:avLst>
-              <a:gd name="adj" fmla="val 17778"/>
-            </a:avLst>
-          </a:prstGeom>
-          <a:solidFill>
-            <a:srgbClr val="2A9D8F"/>
-          </a:solidFill>
-          <a:ln/>
-        </p:spPr>
-      </p:sp>
-      <p:sp>
-        <p:nvSpPr>
-          <p:cNvPr id="6" name="Text 4"/>
-          <p:cNvSpPr/>
-          <p:nvPr/>
-        </p:nvSpPr>
-        <p:spPr>
-          <a:xfrm>
-            <a:off x="731520" y="3474720"/>
-            <a:ext cx="2011680" cy="411480"/>
+          <p:cNvPr id="7" name="Text 5"/>
+          <p:cNvSpPr/>
+          <p:nvPr/>
+        </p:nvSpPr>
+        <p:spPr>
+          <a:xfrm>
+            <a:off x="731520" y="4206240"/>
+            <a:ext cx="3657600" cy="365760"/>
           </a:xfrm>
           <a:prstGeom prst="rect">
             <a:avLst/>
@@ -1372,19 +1686,19 @@
           <a:bodyPr wrap="square" rtlCol="0" anchor="ctr"/>
           <a:lstStyle/>
           <a:p>
-            <a:pPr algn="ctr" indent="0" marL="0">
+            <a:pPr indent="0" marL="0">
               <a:buNone/>
             </a:pPr>
             <a:r>
-              <a:rPr lang="en-US" sz="1200" b="1" dirty="0">
-                <a:solidFill>
-                  <a:srgbClr val="FFFFFF"/>
+              <a:rPr lang="en-US" sz="1200" dirty="0">
+                <a:solidFill>
+                  <a:srgbClr val="6B6660"/>
                 </a:solidFill>
                 <a:latin typeface="Calibri" pitchFamily="34" charset="0"/>
                 <a:ea typeface="Calibri" pitchFamily="34" charset="-122"/>
                 <a:cs typeface="Calibri" pitchFamily="34" charset="-120"/>
               </a:rPr>
-              <a:t>Term 4 · Ecology</a:t>
+              <a:t>Mr Zocchi</a:t>
             </a:r>
             <a:endParaRPr lang="en-US" sz="1200" dirty="0"/>
           </a:p>
@@ -1401,13 +1715,6 @@
 <file path=ppt/slides/slide2.xml><?xml version="1.0" encoding="utf-8"?>
 <p:sld xmlns:a="http://schemas.openxmlformats.org/drawingml/2006/main" xmlns:r="http://schemas.openxmlformats.org/officeDocument/2006/relationships" xmlns:p="http://schemas.openxmlformats.org/presentationml/2006/main">
   <p:cSld name="Slide 2">
-    <p:bg>
-      <p:bgPr>
-        <a:solidFill>
-          <a:srgbClr val="FAF8F5"/>
-        </a:solidFill>
-      </p:bgPr>
-    </p:bg>
     <p:spTree>
       <p:nvGrpSpPr>
         <p:cNvPr id="1" name=""/>
@@ -1431,13 +1738,13 @@
         <p:spPr>
           <a:xfrm>
             <a:off x="0" y="0"/>
-            <a:ext cx="9144000" cy="54864"/>
-          </a:xfrm>
-          <a:prstGeom prst="rect">
-            <a:avLst/>
-          </a:prstGeom>
-          <a:solidFill>
-            <a:srgbClr val="2A9D8F"/>
+            <a:ext cx="9144000" cy="5143500"/>
+          </a:xfrm>
+          <a:prstGeom prst="rect">
+            <a:avLst/>
+          </a:prstGeom>
+          <a:solidFill>
+            <a:srgbClr val="111D35"/>
           </a:solidFill>
           <a:ln/>
         </p:spPr>
@@ -1450,8 +1757,8 @@
         </p:nvSpPr>
         <p:spPr>
           <a:xfrm>
-            <a:off x="7772400" y="4709160"/>
-            <a:ext cx="1097280" cy="320040"/>
+            <a:off x="6858000" y="182880"/>
+            <a:ext cx="2286000" cy="2743200"/>
           </a:xfrm>
           <a:prstGeom prst="rect">
             <a:avLst/>
@@ -1463,34 +1770,75 @@
           <a:bodyPr wrap="square" rtlCol="0" anchor="ctr"/>
           <a:lstStyle/>
           <a:p>
-            <a:pPr algn="r" indent="0" marL="0">
+            <a:pPr algn="ctr" indent="0" marL="0">
               <a:buNone/>
             </a:pPr>
             <a:r>
-              <a:rPr lang="en-US" sz="900" dirty="0">
-                <a:solidFill>
-                  <a:srgbClr val="6B6660"/>
+              <a:rPr lang="en-US" sz="16000" b="1" dirty="0">
+                <a:solidFill>
+                  <a:srgbClr val="2A9D8F">
+                    <a:alpha val="80000"/>
+                  </a:srgbClr>
+                </a:solidFill>
+                <a:latin typeface="Georgia" pitchFamily="34" charset="0"/>
+                <a:ea typeface="Georgia" pitchFamily="34" charset="-122"/>
+                <a:cs typeface="Georgia" pitchFamily="34" charset="-120"/>
+              </a:rPr>
+              <a:t>?</a:t>
+            </a:r>
+            <a:endParaRPr lang="en-US" sz="16000" dirty="0"/>
+          </a:p>
+        </p:txBody>
+      </p:sp>
+      <p:sp>
+        <p:nvSpPr>
+          <p:cNvPr id="4" name="Text 2"/>
+          <p:cNvSpPr/>
+          <p:nvPr/>
+        </p:nvSpPr>
+        <p:spPr>
+          <a:xfrm>
+            <a:off x="731520" y="548640"/>
+            <a:ext cx="2743200" cy="365760"/>
+          </a:xfrm>
+          <a:prstGeom prst="rect">
+            <a:avLst/>
+          </a:prstGeom>
+          <a:noFill/>
+          <a:ln/>
+        </p:spPr>
+        <p:txBody>
+          <a:bodyPr wrap="square" rtlCol="0" anchor="ctr"/>
+          <a:lstStyle/>
+          <a:p>
+            <a:pPr indent="0" marL="0">
+              <a:buNone/>
+            </a:pPr>
+            <a:r>
+              <a:rPr lang="en-US" sz="1200" b="1" spc="400" kern="0" dirty="0">
+                <a:solidFill>
+                  <a:srgbClr val="2A9D8F"/>
                 </a:solidFill>
                 <a:latin typeface="Calibri" pitchFamily="34" charset="0"/>
                 <a:ea typeface="Calibri" pitchFamily="34" charset="-122"/>
                 <a:cs typeface="Calibri" pitchFamily="34" charset="-120"/>
               </a:rPr>
-              <a:t>2 / 5</a:t>
-            </a:r>
-            <a:endParaRPr lang="en-US" sz="900" dirty="0"/>
-          </a:p>
-        </p:txBody>
-      </p:sp>
-      <p:sp>
-        <p:nvSpPr>
-          <p:cNvPr id="4" name="Text 2"/>
-          <p:cNvSpPr/>
-          <p:nvPr/>
-        </p:nvSpPr>
-        <p:spPr>
-          <a:xfrm>
-            <a:off x="457200" y="274320"/>
-            <a:ext cx="8229600" cy="640080"/>
+              <a:t>INQUIRY</a:t>
+            </a:r>
+            <a:endParaRPr lang="en-US" sz="1200" dirty="0"/>
+          </a:p>
+        </p:txBody>
+      </p:sp>
+      <p:sp>
+        <p:nvSpPr>
+          <p:cNvPr id="5" name="Text 3"/>
+          <p:cNvSpPr/>
+          <p:nvPr/>
+        </p:nvSpPr>
+        <p:spPr>
+          <a:xfrm>
+            <a:off x="731520" y="1005840"/>
+            <a:ext cx="6858000" cy="1463040"/>
           </a:xfrm>
           <a:prstGeom prst="rect">
             <a:avLst/>
@@ -1499,89 +1847,37 @@
           <a:ln/>
         </p:spPr>
         <p:txBody>
-          <a:bodyPr wrap="square" rtlCol="0" anchor="ctr"/>
+          <a:bodyPr wrap="square" rtlCol="0" anchor="t"/>
           <a:lstStyle/>
           <a:p>
             <a:pPr indent="0" marL="0">
               <a:buNone/>
             </a:pPr>
             <a:r>
-              <a:rPr lang="en-US" sz="2600" b="1" dirty="0">
-                <a:solidFill>
-                  <a:srgbClr val="1B2A4A"/>
+              <a:rPr lang="en-US" sz="2800" b="1" dirty="0">
+                <a:solidFill>
+                  <a:srgbClr val="FFFFFF"/>
                 </a:solidFill>
                 <a:latin typeface="Georgia" pitchFamily="34" charset="0"/>
                 <a:ea typeface="Georgia" pitchFamily="34" charset="-122"/>
                 <a:cs typeface="Georgia" pitchFamily="34" charset="-120"/>
               </a:rPr>
-              <a:t>Negative Impacts</a:t>
-            </a:r>
-            <a:endParaRPr lang="en-US" sz="2600" dirty="0"/>
-          </a:p>
-        </p:txBody>
-      </p:sp>
-      <p:sp>
-        <p:nvSpPr>
-          <p:cNvPr id="5" name="Shape 3"/>
-          <p:cNvSpPr/>
-          <p:nvPr/>
-        </p:nvSpPr>
-        <p:spPr>
-          <a:xfrm>
-            <a:off x="457200" y="1188720"/>
-            <a:ext cx="2560320" cy="1828800"/>
-          </a:xfrm>
-          <a:prstGeom prst="rect">
-            <a:avLst/>
-          </a:prstGeom>
-          <a:solidFill>
-            <a:srgbClr val="FFFFFF"/>
-          </a:solidFill>
-          <a:ln w="12700">
-            <a:solidFill>
-              <a:srgbClr val="E5E2DC"/>
-            </a:solidFill>
-            <a:prstDash val="solid"/>
-          </a:ln>
-          <a:effectLst>
-            <a:outerShdw sx="100000" sy="100000" kx="0" ky="0" algn="bl" rotWithShape="0" blurRad="50800" dist="25400" dir="8100000">
-              <a:srgbClr val="000000">
-                <a:alpha val="10000"/>
-              </a:srgbClr>
-            </a:outerShdw>
-          </a:effectLst>
-        </p:spPr>
-      </p:sp>
-      <p:sp>
-        <p:nvSpPr>
-          <p:cNvPr id="6" name="Shape 4"/>
-          <p:cNvSpPr/>
-          <p:nvPr/>
-        </p:nvSpPr>
-        <p:spPr>
-          <a:xfrm>
-            <a:off x="457200" y="1188720"/>
-            <a:ext cx="2560320" cy="54864"/>
-          </a:xfrm>
-          <a:prstGeom prst="rect">
-            <a:avLst/>
-          </a:prstGeom>
-          <a:solidFill>
-            <a:srgbClr val="2A9D8F"/>
-          </a:solidFill>
-          <a:ln/>
-        </p:spPr>
-      </p:sp>
-      <p:sp>
-        <p:nvSpPr>
-          <p:cNvPr id="7" name="Text 5"/>
-          <p:cNvSpPr/>
-          <p:nvPr/>
-        </p:nvSpPr>
-        <p:spPr>
-          <a:xfrm>
-            <a:off x="594360" y="1325880"/>
-            <a:ext cx="2286000" cy="365760"/>
+              <a:t>Nanjing's air quality has improved dramatically since 2015. Beijing hosted a 'blue sky' Olympics in 2008 by shutting factories. Is this enough?</a:t>
+            </a:r>
+            <a:endParaRPr lang="en-US" sz="2800" dirty="0"/>
+          </a:p>
+        </p:txBody>
+      </p:sp>
+      <p:sp>
+        <p:nvSpPr>
+          <p:cNvPr id="6" name="Text 4"/>
+          <p:cNvSpPr/>
+          <p:nvPr/>
+        </p:nvSpPr>
+        <p:spPr>
+          <a:xfrm>
+            <a:off x="731520" y="2560320"/>
+            <a:ext cx="6858000" cy="548640"/>
           </a:xfrm>
           <a:prstGeom prst="rect">
             <a:avLst/>
@@ -1597,15 +1893,15 @@
               <a:buNone/>
             </a:pPr>
             <a:r>
-              <a:rPr lang="en-US" sz="1400" b="1" dirty="0">
-                <a:solidFill>
-                  <a:srgbClr val="1B2A4A"/>
+              <a:rPr lang="en-US" sz="1400" i="1" dirty="0">
+                <a:solidFill>
+                  <a:srgbClr val="9B9690"/>
                 </a:solidFill>
                 <a:latin typeface="Calibri" pitchFamily="34" charset="0"/>
                 <a:ea typeface="Calibri" pitchFamily="34" charset="-122"/>
                 <a:cs typeface="Calibri" pitchFamily="34" charset="-120"/>
               </a:rPr>
-              <a:t>Deforestation</a:t>
+              <a:t>Humans are the most powerful force changing ecosystems on Earth.</a:t>
             </a:r>
             <a:endParaRPr lang="en-US" sz="1400" dirty="0"/>
           </a:p>
@@ -1613,14 +1909,34 @@
       </p:sp>
       <p:sp>
         <p:nvSpPr>
+          <p:cNvPr id="7" name="Shape 5"/>
+          <p:cNvSpPr/>
+          <p:nvPr/>
+        </p:nvSpPr>
+        <p:spPr>
+          <a:xfrm>
+            <a:off x="548640" y="3200400"/>
+            <a:ext cx="7315200" cy="1645920"/>
+          </a:xfrm>
+          <a:prstGeom prst="rect">
+            <a:avLst/>
+          </a:prstGeom>
+          <a:solidFill>
+            <a:srgbClr val="243660"/>
+          </a:solidFill>
+          <a:ln/>
+        </p:spPr>
+      </p:sp>
+      <p:sp>
+        <p:nvSpPr>
           <p:cNvPr id="8" name="Text 6"/>
           <p:cNvSpPr/>
           <p:nvPr/>
         </p:nvSpPr>
         <p:spPr>
           <a:xfrm>
-            <a:off x="594360" y="1737360"/>
-            <a:ext cx="2286000" cy="1097280"/>
+            <a:off x="731520" y="3246120"/>
+            <a:ext cx="3657600" cy="320040"/>
           </a:xfrm>
           <a:prstGeom prst="rect">
             <a:avLst/>
@@ -1629,22 +1945,22 @@
           <a:ln/>
         </p:spPr>
         <p:txBody>
-          <a:bodyPr wrap="square" rtlCol="0" anchor="t"/>
+          <a:bodyPr wrap="square" rtlCol="0" anchor="ctr"/>
           <a:lstStyle/>
           <a:p>
             <a:pPr indent="0" marL="0">
               <a:buNone/>
             </a:pPr>
             <a:r>
-              <a:rPr lang="en-US" sz="1100" dirty="0">
-                <a:solidFill>
-                  <a:srgbClr val="3D3A36"/>
+              <a:rPr lang="en-US" sz="1100" b="1" spc="200" kern="0" dirty="0">
+                <a:solidFill>
+                  <a:srgbClr val="2A9D8F"/>
                 </a:solidFill>
                 <a:latin typeface="Calibri" pitchFamily="34" charset="0"/>
                 <a:ea typeface="Calibri" pitchFamily="34" charset="-122"/>
                 <a:cs typeface="Calibri" pitchFamily="34" charset="-120"/>
               </a:rPr>
-              <a:t>Cutting down forests for farming, wood, and space. Destroys habitats, reduces biodiversity, increases CO₂ (trees absorb CO₂). Amazon loses ~10,000 km² per year.</a:t>
+              <a:t>Think — Pair — Share</a:t>
             </a:r>
             <a:endParaRPr lang="en-US" sz="1100" dirty="0"/>
           </a:p>
@@ -1652,66 +1968,14 @@
       </p:sp>
       <p:sp>
         <p:nvSpPr>
-          <p:cNvPr id="9" name="Shape 7"/>
-          <p:cNvSpPr/>
-          <p:nvPr/>
-        </p:nvSpPr>
-        <p:spPr>
-          <a:xfrm>
-            <a:off x="3291840" y="1188720"/>
-            <a:ext cx="2560320" cy="1828800"/>
-          </a:xfrm>
-          <a:prstGeom prst="rect">
-            <a:avLst/>
-          </a:prstGeom>
-          <a:solidFill>
-            <a:srgbClr val="FFFFFF"/>
-          </a:solidFill>
-          <a:ln w="12700">
-            <a:solidFill>
-              <a:srgbClr val="E5E2DC"/>
-            </a:solidFill>
-            <a:prstDash val="solid"/>
-          </a:ln>
-          <a:effectLst>
-            <a:outerShdw sx="100000" sy="100000" kx="0" ky="0" algn="bl" rotWithShape="0" blurRad="50800" dist="25400" dir="8100000">
-              <a:srgbClr val="000000">
-                <a:alpha val="10000"/>
-              </a:srgbClr>
-            </a:outerShdw>
-          </a:effectLst>
-        </p:spPr>
-      </p:sp>
-      <p:sp>
-        <p:nvSpPr>
-          <p:cNvPr id="10" name="Shape 8"/>
-          <p:cNvSpPr/>
-          <p:nvPr/>
-        </p:nvSpPr>
-        <p:spPr>
-          <a:xfrm>
-            <a:off x="3291840" y="1188720"/>
-            <a:ext cx="2560320" cy="54864"/>
-          </a:xfrm>
-          <a:prstGeom prst="rect">
-            <a:avLst/>
-          </a:prstGeom>
-          <a:solidFill>
-            <a:srgbClr val="2A9D8F"/>
-          </a:solidFill>
-          <a:ln/>
-        </p:spPr>
-      </p:sp>
-      <p:sp>
-        <p:nvSpPr>
-          <p:cNvPr id="11" name="Text 9"/>
-          <p:cNvSpPr/>
-          <p:nvPr/>
-        </p:nvSpPr>
-        <p:spPr>
-          <a:xfrm>
-            <a:off x="3429000" y="1325880"/>
-            <a:ext cx="2286000" cy="365760"/>
+          <p:cNvPr id="9" name="Text 7"/>
+          <p:cNvSpPr/>
+          <p:nvPr/>
+        </p:nvSpPr>
+        <p:spPr>
+          <a:xfrm>
+            <a:off x="731520" y="3566160"/>
+            <a:ext cx="6949440" cy="1188720"/>
           </a:xfrm>
           <a:prstGeom prst="rect">
             <a:avLst/>
@@ -1723,190 +1987,67 @@
           <a:bodyPr wrap="square" rtlCol="0" anchor="ctr"/>
           <a:lstStyle/>
           <a:p>
-            <a:pPr indent="0" marL="0">
-              <a:buNone/>
-            </a:pPr>
-            <a:r>
-              <a:rPr lang="en-US" sz="1400" b="1" dirty="0">
-                <a:solidFill>
-                  <a:srgbClr val="1B2A4A"/>
+            <a:pPr marL="342900" indent="-342900">
+              <a:spcAft>
+                <a:spcPts val="600"/>
+              </a:spcAft>
+              <a:buSzPct val="100000"/>
+              <a:buChar char="•"/>
+            </a:pPr>
+            <a:r>
+              <a:rPr lang="en-US" sz="1400" dirty="0">
+                <a:solidFill>
+                  <a:srgbClr val="E5E2DC"/>
                 </a:solidFill>
                 <a:latin typeface="Calibri" pitchFamily="34" charset="0"/>
                 <a:ea typeface="Calibri" pitchFamily="34" charset="-122"/>
                 <a:cs typeface="Calibri" pitchFamily="34" charset="-120"/>
               </a:rPr>
-              <a:t>Pollution</a:t>
+              <a:t>What human activities damage ecosystems?</a:t>
             </a:r>
             <a:endParaRPr lang="en-US" sz="1400" dirty="0"/>
           </a:p>
-        </p:txBody>
-      </p:sp>
-      <p:sp>
-        <p:nvSpPr>
-          <p:cNvPr id="12" name="Text 10"/>
-          <p:cNvSpPr/>
-          <p:nvPr/>
-        </p:nvSpPr>
-        <p:spPr>
-          <a:xfrm>
-            <a:off x="3429000" y="1737360"/>
-            <a:ext cx="2286000" cy="1097280"/>
-          </a:xfrm>
-          <a:prstGeom prst="rect">
-            <a:avLst/>
-          </a:prstGeom>
-          <a:noFill/>
-          <a:ln/>
-        </p:spPr>
-        <p:txBody>
-          <a:bodyPr wrap="square" rtlCol="0" anchor="t"/>
-          <a:lstStyle/>
-          <a:p>
-            <a:pPr indent="0" marL="0">
-              <a:buNone/>
-            </a:pPr>
-            <a:r>
-              <a:rPr lang="en-US" sz="1100" dirty="0">
-                <a:solidFill>
-                  <a:srgbClr val="3D3A36"/>
+          <a:p>
+            <a:pPr marL="342900" indent="-342900">
+              <a:spcAft>
+                <a:spcPts val="600"/>
+              </a:spcAft>
+              <a:buSzPct val="100000"/>
+              <a:buChar char="•"/>
+            </a:pPr>
+            <a:r>
+              <a:rPr lang="en-US" sz="1400" dirty="0">
+                <a:solidFill>
+                  <a:srgbClr val="E5E2DC"/>
                 </a:solidFill>
                 <a:latin typeface="Calibri" pitchFamily="34" charset="0"/>
                 <a:ea typeface="Calibri" pitchFamily="34" charset="-122"/>
                 <a:cs typeface="Calibri" pitchFamily="34" charset="-120"/>
               </a:rPr>
-              <a:t>Air: burning fossil fuels, acid rain. Water: sewage, chemicals, plastics. Land: pesticides, landfill. Harms organisms, ecosystems, and human health.</a:t>
-            </a:r>
-            <a:endParaRPr lang="en-US" sz="1100" dirty="0"/>
-          </a:p>
-        </p:txBody>
-      </p:sp>
-      <p:sp>
-        <p:nvSpPr>
-          <p:cNvPr id="13" name="Shape 11"/>
-          <p:cNvSpPr/>
-          <p:nvPr/>
-        </p:nvSpPr>
-        <p:spPr>
-          <a:xfrm>
-            <a:off x="6126480" y="1188720"/>
-            <a:ext cx="2560320" cy="1828800"/>
-          </a:xfrm>
-          <a:prstGeom prst="rect">
-            <a:avLst/>
-          </a:prstGeom>
-          <a:solidFill>
-            <a:srgbClr val="FFFFFF"/>
-          </a:solidFill>
-          <a:ln w="12700">
-            <a:solidFill>
-              <a:srgbClr val="E5E2DC"/>
-            </a:solidFill>
-            <a:prstDash val="solid"/>
-          </a:ln>
-          <a:effectLst>
-            <a:outerShdw sx="100000" sy="100000" kx="0" ky="0" algn="bl" rotWithShape="0" blurRad="50800" dist="25400" dir="8100000">
-              <a:srgbClr val="000000">
-                <a:alpha val="10000"/>
-              </a:srgbClr>
-            </a:outerShdw>
-          </a:effectLst>
-        </p:spPr>
-      </p:sp>
-      <p:sp>
-        <p:nvSpPr>
-          <p:cNvPr id="14" name="Shape 12"/>
-          <p:cNvSpPr/>
-          <p:nvPr/>
-        </p:nvSpPr>
-        <p:spPr>
-          <a:xfrm>
-            <a:off x="6126480" y="1188720"/>
-            <a:ext cx="2560320" cy="54864"/>
-          </a:xfrm>
-          <a:prstGeom prst="rect">
-            <a:avLst/>
-          </a:prstGeom>
-          <a:solidFill>
-            <a:srgbClr val="2A9D8F"/>
-          </a:solidFill>
-          <a:ln/>
-        </p:spPr>
-      </p:sp>
-      <p:sp>
-        <p:nvSpPr>
-          <p:cNvPr id="15" name="Text 13"/>
-          <p:cNvSpPr/>
-          <p:nvPr/>
-        </p:nvSpPr>
-        <p:spPr>
-          <a:xfrm>
-            <a:off x="6263640" y="1325880"/>
-            <a:ext cx="2286000" cy="365760"/>
-          </a:xfrm>
-          <a:prstGeom prst="rect">
-            <a:avLst/>
-          </a:prstGeom>
-          <a:noFill/>
-          <a:ln/>
-        </p:spPr>
-        <p:txBody>
-          <a:bodyPr wrap="square" rtlCol="0" anchor="ctr"/>
-          <a:lstStyle/>
-          <a:p>
-            <a:pPr indent="0" marL="0">
-              <a:buNone/>
-            </a:pPr>
-            <a:r>
-              <a:rPr lang="en-US" sz="1400" b="1" dirty="0">
-                <a:solidFill>
-                  <a:srgbClr val="1B2A4A"/>
+              <a:t>Can the damage be reversed? How long would it take?</a:t>
+            </a:r>
+            <a:endParaRPr lang="en-US" sz="1400" dirty="0"/>
+          </a:p>
+          <a:p>
+            <a:pPr marL="342900" indent="-342900">
+              <a:spcAft>
+                <a:spcPts val="600"/>
+              </a:spcAft>
+              <a:buSzPct val="100000"/>
+              <a:buChar char="•"/>
+            </a:pPr>
+            <a:r>
+              <a:rPr lang="en-US" sz="1400" dirty="0">
+                <a:solidFill>
+                  <a:srgbClr val="E5E2DC"/>
                 </a:solidFill>
                 <a:latin typeface="Calibri" pitchFamily="34" charset="0"/>
                 <a:ea typeface="Calibri" pitchFamily="34" charset="-122"/>
                 <a:cs typeface="Calibri" pitchFamily="34" charset="-120"/>
               </a:rPr>
-              <a:t>Climate Change</a:t>
+              <a:t>What is YOUR school or city doing about it?</a:t>
             </a:r>
             <a:endParaRPr lang="en-US" sz="1400" dirty="0"/>
-          </a:p>
-        </p:txBody>
-      </p:sp>
-      <p:sp>
-        <p:nvSpPr>
-          <p:cNvPr id="16" name="Text 14"/>
-          <p:cNvSpPr/>
-          <p:nvPr/>
-        </p:nvSpPr>
-        <p:spPr>
-          <a:xfrm>
-            <a:off x="6263640" y="1737360"/>
-            <a:ext cx="2286000" cy="1097280"/>
-          </a:xfrm>
-          <a:prstGeom prst="rect">
-            <a:avLst/>
-          </a:prstGeom>
-          <a:noFill/>
-          <a:ln/>
-        </p:spPr>
-        <p:txBody>
-          <a:bodyPr wrap="square" rtlCol="0" anchor="t"/>
-          <a:lstStyle/>
-          <a:p>
-            <a:pPr indent="0" marL="0">
-              <a:buNone/>
-            </a:pPr>
-            <a:r>
-              <a:rPr lang="en-US" sz="1100" dirty="0">
-                <a:solidFill>
-                  <a:srgbClr val="3D3A36"/>
-                </a:solidFill>
-                <a:latin typeface="Calibri" pitchFamily="34" charset="0"/>
-                <a:ea typeface="Calibri" pitchFamily="34" charset="-122"/>
-                <a:cs typeface="Calibri" pitchFamily="34" charset="-120"/>
-              </a:rPr>
-              <a:t>Burning fossil fuels increases greenhouse gases (CO₂, methane). Traps more heat. Rising temperatures, melting ice, rising sea levels, extreme weather.</a:t>
-            </a:r>
-            <a:endParaRPr lang="en-US" sz="1100" dirty="0"/>
           </a:p>
         </p:txBody>
       </p:sp>
@@ -1951,7 +2092,27 @@
         <p:spPr>
           <a:xfrm>
             <a:off x="0" y="0"/>
-            <a:ext cx="9144000" cy="54864"/>
+            <a:ext cx="9144000" cy="822960"/>
+          </a:xfrm>
+          <a:prstGeom prst="rect">
+            <a:avLst/>
+          </a:prstGeom>
+          <a:solidFill>
+            <a:srgbClr val="FFFFFF"/>
+          </a:solidFill>
+          <a:ln/>
+        </p:spPr>
+      </p:sp>
+      <p:sp>
+        <p:nvSpPr>
+          <p:cNvPr id="3" name="Shape 1"/>
+          <p:cNvSpPr/>
+          <p:nvPr/>
+        </p:nvSpPr>
+        <p:spPr>
+          <a:xfrm>
+            <a:off x="0" y="795528"/>
+            <a:ext cx="9144000" cy="27432"/>
           </a:xfrm>
           <a:prstGeom prst="rect">
             <a:avLst/>
@@ -1964,14 +2125,14 @@
       </p:sp>
       <p:sp>
         <p:nvSpPr>
-          <p:cNvPr id="3" name="Text 1"/>
-          <p:cNvSpPr/>
-          <p:nvPr/>
-        </p:nvSpPr>
-        <p:spPr>
-          <a:xfrm>
-            <a:off x="7772400" y="4709160"/>
-            <a:ext cx="1097280" cy="320040"/>
+          <p:cNvPr id="4" name="Text 2"/>
+          <p:cNvSpPr/>
+          <p:nvPr/>
+        </p:nvSpPr>
+        <p:spPr>
+          <a:xfrm>
+            <a:off x="640080" y="91440"/>
+            <a:ext cx="7863840" cy="640080"/>
           </a:xfrm>
           <a:prstGeom prst="rect">
             <a:avLst/>
@@ -1980,96 +2141,78 @@
           <a:ln/>
         </p:spPr>
         <p:txBody>
+          <a:bodyPr wrap="square" lIns="0" tIns="0" rIns="0" bIns="0" rtlCol="0" anchor="ctr"/>
+          <a:lstStyle/>
+          <a:p>
+            <a:pPr indent="0" marL="0">
+              <a:buNone/>
+            </a:pPr>
+            <a:r>
+              <a:rPr lang="en-US" sz="2200" b="1" dirty="0">
+                <a:solidFill>
+                  <a:srgbClr val="1B2A4A"/>
+                </a:solidFill>
+                <a:latin typeface="Georgia" pitchFamily="34" charset="0"/>
+                <a:ea typeface="Georgia" pitchFamily="34" charset="-122"/>
+                <a:cs typeface="Georgia" pitchFamily="34" charset="-120"/>
+              </a:rPr>
+              <a:t>Negative Impacts</a:t>
+            </a:r>
+            <a:endParaRPr lang="en-US" sz="2200" dirty="0"/>
+          </a:p>
+        </p:txBody>
+      </p:sp>
+      <p:sp>
+        <p:nvSpPr>
+          <p:cNvPr id="5" name="Text 3"/>
+          <p:cNvSpPr/>
+          <p:nvPr/>
+        </p:nvSpPr>
+        <p:spPr>
+          <a:xfrm>
+            <a:off x="640080" y="1005840"/>
+            <a:ext cx="7863840" cy="2926080"/>
+          </a:xfrm>
+          <a:prstGeom prst="rect">
+            <a:avLst/>
+          </a:prstGeom>
+          <a:noFill/>
+          <a:ln/>
+        </p:spPr>
+        <p:txBody>
           <a:bodyPr wrap="square" rtlCol="0" anchor="ctr"/>
           <a:lstStyle/>
           <a:p>
-            <a:pPr algn="r" indent="0" marL="0">
-              <a:buNone/>
-            </a:pPr>
-            <a:r>
-              <a:rPr lang="en-US" sz="900" dirty="0">
-                <a:solidFill>
-                  <a:srgbClr val="6B6660"/>
+            <a:pPr marL="342900" indent="-342900">
+              <a:spcAft>
+                <a:spcPts val="800"/>
+              </a:spcAft>
+              <a:buSzPct val="100000"/>
+              <a:buChar char="•"/>
+            </a:pPr>
+            <a:r>
+              <a:rPr lang="en-US" sz="1600" dirty="0">
+                <a:solidFill>
+                  <a:srgbClr val="3D3A36"/>
                 </a:solidFill>
                 <a:latin typeface="Calibri" pitchFamily="34" charset="0"/>
                 <a:ea typeface="Calibri" pitchFamily="34" charset="-122"/>
                 <a:cs typeface="Calibri" pitchFamily="34" charset="-120"/>
               </a:rPr>
-              <a:t>3 / 5</a:t>
-            </a:r>
-            <a:endParaRPr lang="en-US" sz="900" dirty="0"/>
-          </a:p>
-        </p:txBody>
-      </p:sp>
-      <p:sp>
-        <p:nvSpPr>
-          <p:cNvPr id="4" name="Text 2"/>
-          <p:cNvSpPr/>
-          <p:nvPr/>
-        </p:nvSpPr>
-        <p:spPr>
-          <a:xfrm>
-            <a:off x="457200" y="274320"/>
-            <a:ext cx="8229600" cy="640080"/>
-          </a:xfrm>
-          <a:prstGeom prst="rect">
-            <a:avLst/>
-          </a:prstGeom>
-          <a:noFill/>
-          <a:ln/>
-        </p:spPr>
-        <p:txBody>
-          <a:bodyPr wrap="square" rtlCol="0" anchor="ctr"/>
-          <a:lstStyle/>
-          <a:p>
-            <a:pPr indent="0" marL="0">
-              <a:buNone/>
-            </a:pPr>
-            <a:r>
-              <a:rPr lang="en-US" sz="2600" b="1" dirty="0">
-                <a:solidFill>
-                  <a:srgbClr val="1B2A4A"/>
-                </a:solidFill>
-                <a:latin typeface="Georgia" pitchFamily="34" charset="0"/>
-                <a:ea typeface="Georgia" pitchFamily="34" charset="-122"/>
-                <a:cs typeface="Georgia" pitchFamily="34" charset="-120"/>
-              </a:rPr>
-              <a:t>Positive Actions</a:t>
-            </a:r>
-            <a:endParaRPr lang="en-US" sz="2600" dirty="0"/>
-          </a:p>
-        </p:txBody>
-      </p:sp>
-      <p:sp>
-        <p:nvSpPr>
-          <p:cNvPr id="5" name="Text 3"/>
-          <p:cNvSpPr/>
-          <p:nvPr/>
-        </p:nvSpPr>
-        <p:spPr>
-          <a:xfrm>
-            <a:off x="457200" y="1188720"/>
-            <a:ext cx="3840480" cy="3474720"/>
-          </a:xfrm>
-          <a:prstGeom prst="rect">
-            <a:avLst/>
-          </a:prstGeom>
-          <a:noFill/>
-          <a:ln/>
-        </p:spPr>
-        <p:txBody>
-          <a:bodyPr wrap="square" rtlCol="0" anchor="t"/>
-          <a:lstStyle/>
+              <a:t>Deforestation — removes habitats and carbon sinks.</a:t>
+            </a:r>
+            <a:endParaRPr lang="en-US" sz="1600" dirty="0"/>
+          </a:p>
           <a:p>
             <a:pPr marL="342900" indent="-342900">
               <a:spcAft>
-                <a:spcPts val="600"/>
+                <a:spcPts val="800"/>
               </a:spcAft>
               <a:buSzPct val="100000"/>
               <a:buChar char="•"/>
             </a:pPr>
             <a:r>
-              <a:rPr lang="en-US" sz="1400" dirty="0">
+              <a:rPr lang="en-US" sz="1600" dirty="0">
                 <a:solidFill>
                   <a:srgbClr val="3D3A36"/>
                 </a:solidFill>
@@ -2077,20 +2220,20 @@
                 <a:ea typeface="Calibri" pitchFamily="34" charset="-122"/>
                 <a:cs typeface="Calibri" pitchFamily="34" charset="-120"/>
               </a:rPr>
-              <a:t>Conservation: protecting habitats and species</a:t>
-            </a:r>
-            <a:endParaRPr lang="en-US" sz="1400" dirty="0"/>
+              <a:t>Pollution — contaminates water, air, soil.</a:t>
+            </a:r>
+            <a:endParaRPr lang="en-US" sz="1600" dirty="0"/>
           </a:p>
           <a:p>
             <a:pPr marL="342900" indent="-342900">
               <a:spcAft>
-                <a:spcPts val="600"/>
+                <a:spcPts val="800"/>
               </a:spcAft>
               <a:buSzPct val="100000"/>
               <a:buChar char="•"/>
             </a:pPr>
             <a:r>
-              <a:rPr lang="en-US" sz="1400" dirty="0">
+              <a:rPr lang="en-US" sz="1600" dirty="0">
                 <a:solidFill>
                   <a:srgbClr val="3D3A36"/>
                 </a:solidFill>
@@ -2098,20 +2241,20 @@
                 <a:ea typeface="Calibri" pitchFamily="34" charset="-122"/>
                 <a:cs typeface="Calibri" pitchFamily="34" charset="-120"/>
               </a:rPr>
-              <a:t>Recycling: reduces waste and resource use</a:t>
-            </a:r>
-            <a:endParaRPr lang="en-US" sz="1400" dirty="0"/>
+              <a:t>Overfishing — Yangtze River fish populations collapsed.</a:t>
+            </a:r>
+            <a:endParaRPr lang="en-US" sz="1600" dirty="0"/>
           </a:p>
           <a:p>
             <a:pPr marL="342900" indent="-342900">
               <a:spcAft>
-                <a:spcPts val="600"/>
+                <a:spcPts val="800"/>
               </a:spcAft>
               <a:buSzPct val="100000"/>
               <a:buChar char="•"/>
             </a:pPr>
             <a:r>
-              <a:rPr lang="en-US" sz="1400" dirty="0">
+              <a:rPr lang="en-US" sz="1600" dirty="0">
                 <a:solidFill>
                   <a:srgbClr val="3D3A36"/>
                 </a:solidFill>
@@ -2119,20 +2262,20 @@
                 <a:ea typeface="Calibri" pitchFamily="34" charset="-122"/>
                 <a:cs typeface="Calibri" pitchFamily="34" charset="-120"/>
               </a:rPr>
-              <a:t>Renewable energy: solar, wind, hydro — no CO₂</a:t>
-            </a:r>
-            <a:endParaRPr lang="en-US" sz="1400" dirty="0"/>
+              <a:t>Climate change — alters temperatures, weather, habitats globally.</a:t>
+            </a:r>
+            <a:endParaRPr lang="en-US" sz="1600" dirty="0"/>
           </a:p>
           <a:p>
             <a:pPr marL="342900" indent="-342900">
               <a:spcAft>
-                <a:spcPts val="600"/>
+                <a:spcPts val="800"/>
               </a:spcAft>
               <a:buSzPct val="100000"/>
               <a:buChar char="•"/>
             </a:pPr>
             <a:r>
-              <a:rPr lang="en-US" sz="1400" dirty="0">
+              <a:rPr lang="en-US" sz="1600" dirty="0">
                 <a:solidFill>
                   <a:srgbClr val="3D3A36"/>
                 </a:solidFill>
@@ -2140,231 +2283,7 @@
                 <a:ea typeface="Calibri" pitchFamily="34" charset="-122"/>
                 <a:cs typeface="Calibri" pitchFamily="34" charset="-120"/>
               </a:rPr>
-              <a:t>Sustainable farming: protects soil and water</a:t>
-            </a:r>
-            <a:endParaRPr lang="en-US" sz="1400" dirty="0"/>
-          </a:p>
-          <a:p>
-            <a:pPr marL="342900" indent="-342900">
-              <a:spcAft>
-                <a:spcPts val="600"/>
-              </a:spcAft>
-              <a:buSzPct val="100000"/>
-              <a:buChar char="•"/>
-            </a:pPr>
-            <a:r>
-              <a:rPr lang="en-US" sz="1400" dirty="0">
-                <a:solidFill>
-                  <a:srgbClr val="3D3A36"/>
-                </a:solidFill>
-                <a:latin typeface="Calibri" pitchFamily="34" charset="0"/>
-                <a:ea typeface="Calibri" pitchFamily="34" charset="-122"/>
-                <a:cs typeface="Calibri" pitchFamily="34" charset="-120"/>
-              </a:rPr>
-              <a:t>Marine reserves: protect ocean ecosystems from overfishing</a:t>
-            </a:r>
-            <a:endParaRPr lang="en-US" sz="1400" dirty="0"/>
-          </a:p>
-        </p:txBody>
-      </p:sp>
-      <p:sp>
-        <p:nvSpPr>
-          <p:cNvPr id="6" name="Shape 4"/>
-          <p:cNvSpPr/>
-          <p:nvPr/>
-        </p:nvSpPr>
-        <p:spPr>
-          <a:xfrm>
-            <a:off x="4846320" y="1188720"/>
-            <a:ext cx="3840480" cy="3474720"/>
-          </a:xfrm>
-          <a:prstGeom prst="rect">
-            <a:avLst/>
-          </a:prstGeom>
-          <a:solidFill>
-            <a:srgbClr val="FFFFFF"/>
-          </a:solidFill>
-          <a:ln w="12700">
-            <a:solidFill>
-              <a:srgbClr val="E5E2DC"/>
-            </a:solidFill>
-            <a:prstDash val="solid"/>
-          </a:ln>
-          <a:effectLst>
-            <a:outerShdw sx="100000" sy="100000" kx="0" ky="0" algn="bl" rotWithShape="0" blurRad="50800" dist="25400" dir="8100000">
-              <a:srgbClr val="000000">
-                <a:alpha val="10000"/>
-              </a:srgbClr>
-            </a:outerShdw>
-          </a:effectLst>
-        </p:spPr>
-      </p:sp>
-      <p:sp>
-        <p:nvSpPr>
-          <p:cNvPr id="7" name="Shape 5"/>
-          <p:cNvSpPr/>
-          <p:nvPr/>
-        </p:nvSpPr>
-        <p:spPr>
-          <a:xfrm>
-            <a:off x="4846320" y="1188720"/>
-            <a:ext cx="3840480" cy="54864"/>
-          </a:xfrm>
-          <a:prstGeom prst="rect">
-            <a:avLst/>
-          </a:prstGeom>
-          <a:solidFill>
-            <a:srgbClr val="2A9D8F"/>
-          </a:solidFill>
-          <a:ln/>
-        </p:spPr>
-      </p:sp>
-      <p:sp>
-        <p:nvSpPr>
-          <p:cNvPr id="8" name="Text 6"/>
-          <p:cNvSpPr/>
-          <p:nvPr/>
-        </p:nvSpPr>
-        <p:spPr>
-          <a:xfrm>
-            <a:off x="5120640" y="1371600"/>
-            <a:ext cx="3291840" cy="3108960"/>
-          </a:xfrm>
-          <a:prstGeom prst="rect">
-            <a:avLst/>
-          </a:prstGeom>
-          <a:noFill/>
-          <a:ln/>
-        </p:spPr>
-        <p:txBody>
-          <a:bodyPr wrap="square" rtlCol="0" anchor="t"/>
-          <a:lstStyle/>
-          <a:p>
-            <a:pPr indent="0" marL="0">
-              <a:spcAft>
-                <a:spcPts val="400"/>
-              </a:spcAft>
-              <a:buNone/>
-            </a:pPr>
-            <a:r>
-              <a:rPr lang="en-US" sz="1600" b="1" dirty="0">
-                <a:solidFill>
-                  <a:srgbClr val="1B2A4A"/>
-                </a:solidFill>
-                <a:latin typeface="Calibri" pitchFamily="34" charset="0"/>
-                <a:ea typeface="Calibri" pitchFamily="34" charset="-122"/>
-                <a:cs typeface="Calibri" pitchFamily="34" charset="-120"/>
-              </a:rPr>
-              <a:t>Endangered Species</a:t>
-            </a:r>
-            <a:endParaRPr lang="en-US" sz="1600" dirty="0"/>
-          </a:p>
-          <a:p>
-            <a:pPr indent="0" marL="0">
-              <a:spcAft>
-                <a:spcPts val="400"/>
-              </a:spcAft>
-              <a:buNone/>
-            </a:pPr>
-            <a:endParaRPr lang="en-US" sz="1600" dirty="0"/>
-          </a:p>
-          <a:p>
-            <a:pPr indent="0" marL="0">
-              <a:spcAft>
-                <a:spcPts val="400"/>
-              </a:spcAft>
-              <a:buNone/>
-            </a:pPr>
-            <a:r>
-              <a:rPr lang="en-US" sz="1300" dirty="0">
-                <a:solidFill>
-                  <a:srgbClr val="3D3A36"/>
-                </a:solidFill>
-                <a:latin typeface="Calibri" pitchFamily="34" charset="0"/>
-                <a:ea typeface="Calibri" pitchFamily="34" charset="-122"/>
-                <a:cs typeface="Calibri" pitchFamily="34" charset="-120"/>
-              </a:rPr>
-              <a:t>Habitat loss is the #1 cause of extinction</a:t>
-            </a:r>
-            <a:endParaRPr lang="en-US" sz="1600" dirty="0"/>
-          </a:p>
-          <a:p>
-            <a:pPr indent="0" marL="0">
-              <a:spcAft>
-                <a:spcPts val="400"/>
-              </a:spcAft>
-              <a:buNone/>
-            </a:pPr>
-            <a:r>
-              <a:rPr lang="en-US" sz="1300" dirty="0">
-                <a:solidFill>
-                  <a:srgbClr val="3D3A36"/>
-                </a:solidFill>
-                <a:latin typeface="Calibri" pitchFamily="34" charset="0"/>
-                <a:ea typeface="Calibri" pitchFamily="34" charset="-122"/>
-                <a:cs typeface="Calibri" pitchFamily="34" charset="-120"/>
-              </a:rPr>
-              <a:t>Pollution, hunting, and climate change also contribute</a:t>
-            </a:r>
-            <a:endParaRPr lang="en-US" sz="1600" dirty="0"/>
-          </a:p>
-          <a:p>
-            <a:pPr indent="0" marL="0">
-              <a:spcAft>
-                <a:spcPts val="400"/>
-              </a:spcAft>
-              <a:buNone/>
-            </a:pPr>
-            <a:r>
-              <a:rPr lang="en-US" sz="1300" dirty="0">
-                <a:solidFill>
-                  <a:srgbClr val="3D3A36"/>
-                </a:solidFill>
-                <a:latin typeface="Calibri" pitchFamily="34" charset="0"/>
-                <a:ea typeface="Calibri" pitchFamily="34" charset="-122"/>
-                <a:cs typeface="Calibri" pitchFamily="34" charset="-120"/>
-              </a:rPr>
-              <a:t>Conservation efforts: breeding programmes, national parks, laws</a:t>
-            </a:r>
-            <a:endParaRPr lang="en-US" sz="1600" dirty="0"/>
-          </a:p>
-          <a:p>
-            <a:pPr indent="0" marL="0">
-              <a:spcAft>
-                <a:spcPts val="400"/>
-              </a:spcAft>
-              <a:buNone/>
-            </a:pPr>
-            <a:r>
-              <a:rPr lang="en-US" sz="1300" dirty="0">
-                <a:solidFill>
-                  <a:srgbClr val="3D3A36"/>
-                </a:solidFill>
-                <a:latin typeface="Calibri" pitchFamily="34" charset="0"/>
-                <a:ea typeface="Calibri" pitchFamily="34" charset="-122"/>
-                <a:cs typeface="Calibri" pitchFamily="34" charset="-120"/>
-              </a:rPr>
-              <a:t>Success stories: bald eagle, giant panda populations recovering</a:t>
-            </a:r>
-            <a:endParaRPr lang="en-US" sz="1600" dirty="0"/>
-          </a:p>
-          <a:p>
-            <a:pPr indent="0" marL="0">
-              <a:spcAft>
-                <a:spcPts val="400"/>
-              </a:spcAft>
-              <a:buNone/>
-            </a:pPr>
-            <a:r>
-              <a:rPr lang="en-US" sz="1300" dirty="0">
-                <a:solidFill>
-                  <a:srgbClr val="3D3A36"/>
-                </a:solidFill>
-                <a:latin typeface="Calibri" pitchFamily="34" charset="0"/>
-                <a:ea typeface="Calibri" pitchFamily="34" charset="-122"/>
-                <a:cs typeface="Calibri" pitchFamily="34" charset="-120"/>
-              </a:rPr>
-              <a:t>Every species plays a role — losing one affects the whole ecosystem</a:t>
+              <a:t>Urbanisation — Nanjing's expansion replaced farmland and wetlands.</a:t>
             </a:r>
             <a:endParaRPr lang="en-US" sz="1600" dirty="0"/>
           </a:p>
@@ -2381,6 +2300,522 @@
 <file path=ppt/slides/slide4.xml><?xml version="1.0" encoding="utf-8"?>
 <p:sld xmlns:a="http://schemas.openxmlformats.org/drawingml/2006/main" xmlns:r="http://schemas.openxmlformats.org/officeDocument/2006/relationships" xmlns:p="http://schemas.openxmlformats.org/presentationml/2006/main">
   <p:cSld name="Slide 4">
+    <p:spTree>
+      <p:nvGrpSpPr>
+        <p:cNvPr id="1" name=""/>
+        <p:cNvGrpSpPr/>
+        <p:nvPr/>
+      </p:nvGrpSpPr>
+      <p:grpSpPr>
+        <a:xfrm>
+          <a:off x="0" y="0"/>
+          <a:ext cx="0" cy="0"/>
+          <a:chOff x="0" y="0"/>
+          <a:chExt cx="0" cy="0"/>
+        </a:xfrm>
+      </p:grpSpPr>
+      <p:sp>
+        <p:nvSpPr>
+          <p:cNvPr id="2" name="Shape 0"/>
+          <p:cNvSpPr/>
+          <p:nvPr/>
+        </p:nvSpPr>
+        <p:spPr>
+          <a:xfrm>
+            <a:off x="0" y="0"/>
+            <a:ext cx="9144000" cy="5143500"/>
+          </a:xfrm>
+          <a:prstGeom prst="rect">
+            <a:avLst/>
+          </a:prstGeom>
+          <a:solidFill>
+            <a:srgbClr val="1B2A4A"/>
+          </a:solidFill>
+          <a:ln/>
+        </p:spPr>
+      </p:sp>
+      <p:sp>
+        <p:nvSpPr>
+          <p:cNvPr id="3" name="Text 1"/>
+          <p:cNvSpPr/>
+          <p:nvPr/>
+        </p:nvSpPr>
+        <p:spPr>
+          <a:xfrm>
+            <a:off x="640080" y="365760"/>
+            <a:ext cx="7863840" cy="640080"/>
+          </a:xfrm>
+          <a:prstGeom prst="rect">
+            <a:avLst/>
+          </a:prstGeom>
+          <a:noFill/>
+          <a:ln/>
+        </p:spPr>
+        <p:txBody>
+          <a:bodyPr wrap="square" rtlCol="0" anchor="ctr"/>
+          <a:lstStyle/>
+          <a:p>
+            <a:pPr indent="0" marL="0">
+              <a:buNone/>
+            </a:pPr>
+            <a:r>
+              <a:rPr lang="en-US" sz="2200" b="1" dirty="0">
+                <a:solidFill>
+                  <a:srgbClr val="FFFFFF"/>
+                </a:solidFill>
+                <a:latin typeface="Georgia" pitchFamily="34" charset="0"/>
+                <a:ea typeface="Georgia" pitchFamily="34" charset="-122"/>
+                <a:cs typeface="Georgia" pitchFamily="34" charset="-120"/>
+              </a:rPr>
+              <a:t>Human Impact by Numbers</a:t>
+            </a:r>
+            <a:endParaRPr lang="en-US" sz="2200" dirty="0"/>
+          </a:p>
+        </p:txBody>
+      </p:sp>
+      <p:sp>
+        <p:nvSpPr>
+          <p:cNvPr id="4" name="Shape 2"/>
+          <p:cNvSpPr/>
+          <p:nvPr/>
+        </p:nvSpPr>
+        <p:spPr>
+          <a:xfrm>
+            <a:off x="640080" y="1280160"/>
+            <a:ext cx="2438400" cy="2926080"/>
+          </a:xfrm>
+          <a:prstGeom prst="rect">
+            <a:avLst/>
+          </a:prstGeom>
+          <a:solidFill>
+            <a:srgbClr val="243660"/>
+          </a:solidFill>
+          <a:ln/>
+          <a:effectLst>
+            <a:outerShdw sx="100000" sy="100000" kx="0" ky="0" algn="bl" rotWithShape="0" blurRad="76200" dist="25400" dir="8100000">
+              <a:srgbClr val="000000">
+                <a:alpha val="12000"/>
+              </a:srgbClr>
+            </a:outerShdw>
+          </a:effectLst>
+        </p:spPr>
+      </p:sp>
+      <p:sp>
+        <p:nvSpPr>
+          <p:cNvPr id="5" name="Text 3"/>
+          <p:cNvSpPr/>
+          <p:nvPr/>
+        </p:nvSpPr>
+        <p:spPr>
+          <a:xfrm>
+            <a:off x="640080" y="1463040"/>
+            <a:ext cx="2438400" cy="1280160"/>
+          </a:xfrm>
+          <a:prstGeom prst="rect">
+            <a:avLst/>
+          </a:prstGeom>
+          <a:noFill/>
+          <a:ln/>
+        </p:spPr>
+        <p:txBody>
+          <a:bodyPr wrap="square" rtlCol="0" anchor="ctr"/>
+          <a:lstStyle/>
+          <a:p>
+            <a:pPr algn="ctr" indent="0" marL="0">
+              <a:buNone/>
+            </a:pPr>
+            <a:r>
+              <a:rPr lang="en-US" sz="4800" b="1" dirty="0">
+                <a:solidFill>
+                  <a:srgbClr val="2A9D8F"/>
+                </a:solidFill>
+                <a:latin typeface="Georgia" pitchFamily="34" charset="0"/>
+                <a:ea typeface="Georgia" pitchFamily="34" charset="-122"/>
+                <a:cs typeface="Georgia" pitchFamily="34" charset="-120"/>
+              </a:rPr>
+              <a:t>1M+</a:t>
+            </a:r>
+            <a:endParaRPr lang="en-US" sz="4800" dirty="0"/>
+          </a:p>
+        </p:txBody>
+      </p:sp>
+      <p:sp>
+        <p:nvSpPr>
+          <p:cNvPr id="6" name="Text 4"/>
+          <p:cNvSpPr/>
+          <p:nvPr/>
+        </p:nvSpPr>
+        <p:spPr>
+          <a:xfrm>
+            <a:off x="640080" y="2743200"/>
+            <a:ext cx="2438400" cy="548640"/>
+          </a:xfrm>
+          <a:prstGeom prst="rect">
+            <a:avLst/>
+          </a:prstGeom>
+          <a:noFill/>
+          <a:ln/>
+        </p:spPr>
+        <p:txBody>
+          <a:bodyPr wrap="square" rtlCol="0" anchor="ctr"/>
+          <a:lstStyle/>
+          <a:p>
+            <a:pPr algn="ctr" indent="0" marL="0">
+              <a:buNone/>
+            </a:pPr>
+            <a:r>
+              <a:rPr lang="en-US" sz="1400" b="1" dirty="0">
+                <a:solidFill>
+                  <a:srgbClr val="9B9690"/>
+                </a:solidFill>
+                <a:latin typeface="Calibri" pitchFamily="34" charset="0"/>
+                <a:ea typeface="Calibri" pitchFamily="34" charset="-122"/>
+                <a:cs typeface="Calibri" pitchFamily="34" charset="-120"/>
+              </a:rPr>
+              <a:t>Species at Risk</a:t>
+            </a:r>
+            <a:endParaRPr lang="en-US" sz="1400" dirty="0"/>
+          </a:p>
+        </p:txBody>
+      </p:sp>
+      <p:sp>
+        <p:nvSpPr>
+          <p:cNvPr id="7" name="Text 5"/>
+          <p:cNvSpPr/>
+          <p:nvPr/>
+        </p:nvSpPr>
+        <p:spPr>
+          <a:xfrm>
+            <a:off x="822960" y="3291840"/>
+            <a:ext cx="2072640" cy="731520"/>
+          </a:xfrm>
+          <a:prstGeom prst="rect">
+            <a:avLst/>
+          </a:prstGeom>
+          <a:noFill/>
+          <a:ln/>
+        </p:spPr>
+        <p:txBody>
+          <a:bodyPr wrap="square" rtlCol="0" anchor="ctr"/>
+          <a:lstStyle/>
+          <a:p>
+            <a:pPr algn="ctr" indent="0" marL="0">
+              <a:buNone/>
+            </a:pPr>
+            <a:r>
+              <a:rPr lang="en-US" sz="1200" dirty="0">
+                <a:solidFill>
+                  <a:srgbClr val="9B9690"/>
+                </a:solidFill>
+                <a:latin typeface="Calibri" pitchFamily="34" charset="0"/>
+                <a:ea typeface="Calibri" pitchFamily="34" charset="-122"/>
+                <a:cs typeface="Calibri" pitchFamily="34" charset="-120"/>
+              </a:rPr>
+              <a:t>Due to human activity</a:t>
+            </a:r>
+            <a:endParaRPr lang="en-US" sz="1200" dirty="0"/>
+          </a:p>
+        </p:txBody>
+      </p:sp>
+      <p:sp>
+        <p:nvSpPr>
+          <p:cNvPr id="8" name="Shape 6"/>
+          <p:cNvSpPr/>
+          <p:nvPr/>
+        </p:nvSpPr>
+        <p:spPr>
+          <a:xfrm>
+            <a:off x="3352800" y="1280160"/>
+            <a:ext cx="2438400" cy="2926080"/>
+          </a:xfrm>
+          <a:prstGeom prst="rect">
+            <a:avLst/>
+          </a:prstGeom>
+          <a:solidFill>
+            <a:srgbClr val="243660"/>
+          </a:solidFill>
+          <a:ln/>
+          <a:effectLst>
+            <a:outerShdw sx="100000" sy="100000" kx="0" ky="0" algn="bl" rotWithShape="0" blurRad="76200" dist="25400" dir="8100000">
+              <a:srgbClr val="000000">
+                <a:alpha val="12000"/>
+              </a:srgbClr>
+            </a:outerShdw>
+          </a:effectLst>
+        </p:spPr>
+      </p:sp>
+      <p:sp>
+        <p:nvSpPr>
+          <p:cNvPr id="9" name="Text 7"/>
+          <p:cNvSpPr/>
+          <p:nvPr/>
+        </p:nvSpPr>
+        <p:spPr>
+          <a:xfrm>
+            <a:off x="3352800" y="1463040"/>
+            <a:ext cx="2438400" cy="1280160"/>
+          </a:xfrm>
+          <a:prstGeom prst="rect">
+            <a:avLst/>
+          </a:prstGeom>
+          <a:noFill/>
+          <a:ln/>
+        </p:spPr>
+        <p:txBody>
+          <a:bodyPr wrap="square" rtlCol="0" anchor="ctr"/>
+          <a:lstStyle/>
+          <a:p>
+            <a:pPr algn="ctr" indent="0" marL="0">
+              <a:buNone/>
+            </a:pPr>
+            <a:r>
+              <a:rPr lang="en-US" sz="4800" b="1" dirty="0">
+                <a:solidFill>
+                  <a:srgbClr val="2A9D8F"/>
+                </a:solidFill>
+                <a:latin typeface="Georgia" pitchFamily="34" charset="0"/>
+                <a:ea typeface="Georgia" pitchFamily="34" charset="-122"/>
+                <a:cs typeface="Georgia" pitchFamily="34" charset="-120"/>
+              </a:rPr>
+              <a:t>80%</a:t>
+            </a:r>
+            <a:endParaRPr lang="en-US" sz="4800" dirty="0"/>
+          </a:p>
+        </p:txBody>
+      </p:sp>
+      <p:sp>
+        <p:nvSpPr>
+          <p:cNvPr id="10" name="Text 8"/>
+          <p:cNvSpPr/>
+          <p:nvPr/>
+        </p:nvSpPr>
+        <p:spPr>
+          <a:xfrm>
+            <a:off x="3352800" y="2743200"/>
+            <a:ext cx="2438400" cy="548640"/>
+          </a:xfrm>
+          <a:prstGeom prst="rect">
+            <a:avLst/>
+          </a:prstGeom>
+          <a:noFill/>
+          <a:ln/>
+        </p:spPr>
+        <p:txBody>
+          <a:bodyPr wrap="square" rtlCol="0" anchor="ctr"/>
+          <a:lstStyle/>
+          <a:p>
+            <a:pPr algn="ctr" indent="0" marL="0">
+              <a:buNone/>
+            </a:pPr>
+            <a:r>
+              <a:rPr lang="en-US" sz="1400" b="1" dirty="0">
+                <a:solidFill>
+                  <a:srgbClr val="9B9690"/>
+                </a:solidFill>
+                <a:latin typeface="Calibri" pitchFamily="34" charset="0"/>
+                <a:ea typeface="Calibri" pitchFamily="34" charset="-122"/>
+                <a:cs typeface="Calibri" pitchFamily="34" charset="-120"/>
+              </a:rPr>
+              <a:t>Forests Lost</a:t>
+            </a:r>
+            <a:endParaRPr lang="en-US" sz="1400" dirty="0"/>
+          </a:p>
+        </p:txBody>
+      </p:sp>
+      <p:sp>
+        <p:nvSpPr>
+          <p:cNvPr id="11" name="Text 9"/>
+          <p:cNvSpPr/>
+          <p:nvPr/>
+        </p:nvSpPr>
+        <p:spPr>
+          <a:xfrm>
+            <a:off x="3535680" y="3291840"/>
+            <a:ext cx="2072640" cy="731520"/>
+          </a:xfrm>
+          <a:prstGeom prst="rect">
+            <a:avLst/>
+          </a:prstGeom>
+          <a:noFill/>
+          <a:ln/>
+        </p:spPr>
+        <p:txBody>
+          <a:bodyPr wrap="square" rtlCol="0" anchor="ctr"/>
+          <a:lstStyle/>
+          <a:p>
+            <a:pPr algn="ctr" indent="0" marL="0">
+              <a:buNone/>
+            </a:pPr>
+            <a:r>
+              <a:rPr lang="en-US" sz="1200" dirty="0">
+                <a:solidFill>
+                  <a:srgbClr val="9B9690"/>
+                </a:solidFill>
+                <a:latin typeface="Calibri" pitchFamily="34" charset="0"/>
+                <a:ea typeface="Calibri" pitchFamily="34" charset="-122"/>
+                <a:cs typeface="Calibri" pitchFamily="34" charset="-120"/>
+              </a:rPr>
+              <a:t>Since civilisation began</a:t>
+            </a:r>
+            <a:endParaRPr lang="en-US" sz="1200" dirty="0"/>
+          </a:p>
+        </p:txBody>
+      </p:sp>
+      <p:sp>
+        <p:nvSpPr>
+          <p:cNvPr id="12" name="Shape 10"/>
+          <p:cNvSpPr/>
+          <p:nvPr/>
+        </p:nvSpPr>
+        <p:spPr>
+          <a:xfrm>
+            <a:off x="6065520" y="1280160"/>
+            <a:ext cx="2438400" cy="2926080"/>
+          </a:xfrm>
+          <a:prstGeom prst="rect">
+            <a:avLst/>
+          </a:prstGeom>
+          <a:solidFill>
+            <a:srgbClr val="243660"/>
+          </a:solidFill>
+          <a:ln/>
+          <a:effectLst>
+            <a:outerShdw sx="100000" sy="100000" kx="0" ky="0" algn="bl" rotWithShape="0" blurRad="76200" dist="25400" dir="8100000">
+              <a:srgbClr val="000000">
+                <a:alpha val="12000"/>
+              </a:srgbClr>
+            </a:outerShdw>
+          </a:effectLst>
+        </p:spPr>
+      </p:sp>
+      <p:sp>
+        <p:nvSpPr>
+          <p:cNvPr id="13" name="Text 11"/>
+          <p:cNvSpPr/>
+          <p:nvPr/>
+        </p:nvSpPr>
+        <p:spPr>
+          <a:xfrm>
+            <a:off x="6065520" y="1463040"/>
+            <a:ext cx="2438400" cy="1280160"/>
+          </a:xfrm>
+          <a:prstGeom prst="rect">
+            <a:avLst/>
+          </a:prstGeom>
+          <a:noFill/>
+          <a:ln/>
+        </p:spPr>
+        <p:txBody>
+          <a:bodyPr wrap="square" rtlCol="0" anchor="ctr"/>
+          <a:lstStyle/>
+          <a:p>
+            <a:pPr algn="ctr" indent="0" marL="0">
+              <a:buNone/>
+            </a:pPr>
+            <a:r>
+              <a:rPr lang="en-US" sz="4800" b="1" dirty="0">
+                <a:solidFill>
+                  <a:srgbClr val="2A9D8F"/>
+                </a:solidFill>
+                <a:latin typeface="Georgia" pitchFamily="34" charset="0"/>
+                <a:ea typeface="Georgia" pitchFamily="34" charset="-122"/>
+                <a:cs typeface="Georgia" pitchFamily="34" charset="-120"/>
+              </a:rPr>
+              <a:t>1.1°C</a:t>
+            </a:r>
+            <a:endParaRPr lang="en-US" sz="4800" dirty="0"/>
+          </a:p>
+        </p:txBody>
+      </p:sp>
+      <p:sp>
+        <p:nvSpPr>
+          <p:cNvPr id="14" name="Text 12"/>
+          <p:cNvSpPr/>
+          <p:nvPr/>
+        </p:nvSpPr>
+        <p:spPr>
+          <a:xfrm>
+            <a:off x="6065520" y="2743200"/>
+            <a:ext cx="2438400" cy="548640"/>
+          </a:xfrm>
+          <a:prstGeom prst="rect">
+            <a:avLst/>
+          </a:prstGeom>
+          <a:noFill/>
+          <a:ln/>
+        </p:spPr>
+        <p:txBody>
+          <a:bodyPr wrap="square" rtlCol="0" anchor="ctr"/>
+          <a:lstStyle/>
+          <a:p>
+            <a:pPr algn="ctr" indent="0" marL="0">
+              <a:buNone/>
+            </a:pPr>
+            <a:r>
+              <a:rPr lang="en-US" sz="1400" b="1" dirty="0">
+                <a:solidFill>
+                  <a:srgbClr val="9B9690"/>
+                </a:solidFill>
+                <a:latin typeface="Calibri" pitchFamily="34" charset="0"/>
+                <a:ea typeface="Calibri" pitchFamily="34" charset="-122"/>
+                <a:cs typeface="Calibri" pitchFamily="34" charset="-120"/>
+              </a:rPr>
+              <a:t>Global Warming</a:t>
+            </a:r>
+            <a:endParaRPr lang="en-US" sz="1400" dirty="0"/>
+          </a:p>
+        </p:txBody>
+      </p:sp>
+      <p:sp>
+        <p:nvSpPr>
+          <p:cNvPr id="15" name="Text 13"/>
+          <p:cNvSpPr/>
+          <p:nvPr/>
+        </p:nvSpPr>
+        <p:spPr>
+          <a:xfrm>
+            <a:off x="6248400" y="3291840"/>
+            <a:ext cx="2072640" cy="731520"/>
+          </a:xfrm>
+          <a:prstGeom prst="rect">
+            <a:avLst/>
+          </a:prstGeom>
+          <a:noFill/>
+          <a:ln/>
+        </p:spPr>
+        <p:txBody>
+          <a:bodyPr wrap="square" rtlCol="0" anchor="ctr"/>
+          <a:lstStyle/>
+          <a:p>
+            <a:pPr algn="ctr" indent="0" marL="0">
+              <a:buNone/>
+            </a:pPr>
+            <a:r>
+              <a:rPr lang="en-US" sz="1200" dirty="0">
+                <a:solidFill>
+                  <a:srgbClr val="9B9690"/>
+                </a:solidFill>
+                <a:latin typeface="Calibri" pitchFamily="34" charset="0"/>
+                <a:ea typeface="Calibri" pitchFamily="34" charset="-122"/>
+                <a:cs typeface="Calibri" pitchFamily="34" charset="-120"/>
+              </a:rPr>
+              <a:t>Average temp rise since 1900</a:t>
+            </a:r>
+            <a:endParaRPr lang="en-US" sz="1200" dirty="0"/>
+          </a:p>
+        </p:txBody>
+      </p:sp>
+    </p:spTree>
+  </p:cSld>
+  <p:clrMapOvr>
+    <a:masterClrMapping/>
+  </p:clrMapOvr>
+</p:sld>
+</file>
+
+<file path=ppt/slides/slide5.xml><?xml version="1.0" encoding="utf-8"?>
+<p:sld xmlns:a="http://schemas.openxmlformats.org/drawingml/2006/main" xmlns:r="http://schemas.openxmlformats.org/officeDocument/2006/relationships" xmlns:p="http://schemas.openxmlformats.org/presentationml/2006/main">
+  <p:cSld name="Slide 5">
     <p:bg>
       <p:bgPr>
         <a:solidFill>
@@ -2411,7 +2846,27 @@
         <p:spPr>
           <a:xfrm>
             <a:off x="0" y="0"/>
-            <a:ext cx="9144000" cy="54864"/>
+            <a:ext cx="9144000" cy="822960"/>
+          </a:xfrm>
+          <a:prstGeom prst="rect">
+            <a:avLst/>
+          </a:prstGeom>
+          <a:solidFill>
+            <a:srgbClr val="FFFFFF"/>
+          </a:solidFill>
+          <a:ln/>
+        </p:spPr>
+      </p:sp>
+      <p:sp>
+        <p:nvSpPr>
+          <p:cNvPr id="3" name="Shape 1"/>
+          <p:cNvSpPr/>
+          <p:nvPr/>
+        </p:nvSpPr>
+        <p:spPr>
+          <a:xfrm>
+            <a:off x="0" y="795528"/>
+            <a:ext cx="9144000" cy="27432"/>
           </a:xfrm>
           <a:prstGeom prst="rect">
             <a:avLst/>
@@ -2424,14 +2879,14 @@
       </p:sp>
       <p:sp>
         <p:nvSpPr>
-          <p:cNvPr id="3" name="Text 1"/>
-          <p:cNvSpPr/>
-          <p:nvPr/>
-        </p:nvSpPr>
-        <p:spPr>
-          <a:xfrm>
-            <a:off x="7772400" y="4709160"/>
-            <a:ext cx="1097280" cy="320040"/>
+          <p:cNvPr id="4" name="Text 2"/>
+          <p:cNvSpPr/>
+          <p:nvPr/>
+        </p:nvSpPr>
+        <p:spPr>
+          <a:xfrm>
+            <a:off x="640080" y="91440"/>
+            <a:ext cx="7863840" cy="640080"/>
           </a:xfrm>
           <a:prstGeom prst="rect">
             <a:avLst/>
@@ -2440,37 +2895,123 @@
           <a:ln/>
         </p:spPr>
         <p:txBody>
+          <a:bodyPr wrap="square" lIns="0" tIns="0" rIns="0" bIns="0" rtlCol="0" anchor="ctr"/>
+          <a:lstStyle/>
+          <a:p>
+            <a:pPr indent="0" marL="0">
+              <a:buNone/>
+            </a:pPr>
+            <a:r>
+              <a:rPr lang="en-US" sz="2200" b="1" dirty="0">
+                <a:solidFill>
+                  <a:srgbClr val="1B2A4A"/>
+                </a:solidFill>
+                <a:latin typeface="Georgia" pitchFamily="34" charset="0"/>
+                <a:ea typeface="Georgia" pitchFamily="34" charset="-122"/>
+                <a:cs typeface="Georgia" pitchFamily="34" charset="-120"/>
+              </a:rPr>
+              <a:t>Regional Responses</a:t>
+            </a:r>
+            <a:endParaRPr lang="en-US" sz="2200" dirty="0"/>
+          </a:p>
+        </p:txBody>
+      </p:sp>
+      <p:sp>
+        <p:nvSpPr>
+          <p:cNvPr id="5" name="Shape 3"/>
+          <p:cNvSpPr/>
+          <p:nvPr/>
+        </p:nvSpPr>
+        <p:spPr>
+          <a:xfrm>
+            <a:off x="457200" y="1005840"/>
+            <a:ext cx="3931920" cy="3657600"/>
+          </a:xfrm>
+          <a:prstGeom prst="rect">
+            <a:avLst/>
+          </a:prstGeom>
+          <a:solidFill>
+            <a:srgbClr val="FFFFFF"/>
+          </a:solidFill>
+          <a:ln/>
+          <a:effectLst>
+            <a:outerShdw sx="100000" sy="100000" kx="0" ky="0" algn="bl" rotWithShape="0" blurRad="76200" dist="25400" dir="8100000">
+              <a:srgbClr val="000000">
+                <a:alpha val="12000"/>
+              </a:srgbClr>
+            </a:outerShdw>
+          </a:effectLst>
+        </p:spPr>
+      </p:sp>
+      <p:sp>
+        <p:nvSpPr>
+          <p:cNvPr id="6" name="Shape 4"/>
+          <p:cNvSpPr/>
+          <p:nvPr/>
+        </p:nvSpPr>
+        <p:spPr>
+          <a:xfrm>
+            <a:off x="457200" y="1005840"/>
+            <a:ext cx="3931920" cy="64008"/>
+          </a:xfrm>
+          <a:prstGeom prst="rect">
+            <a:avLst/>
+          </a:prstGeom>
+          <a:solidFill>
+            <a:srgbClr val="2A9D8F"/>
+          </a:solidFill>
+          <a:ln/>
+        </p:spPr>
+      </p:sp>
+      <p:sp>
+        <p:nvSpPr>
+          <p:cNvPr id="7" name="Text 5"/>
+          <p:cNvSpPr/>
+          <p:nvPr/>
+        </p:nvSpPr>
+        <p:spPr>
+          <a:xfrm>
+            <a:off x="640080" y="1188720"/>
+            <a:ext cx="3566160" cy="457200"/>
+          </a:xfrm>
+          <a:prstGeom prst="rect">
+            <a:avLst/>
+          </a:prstGeom>
+          <a:noFill/>
+          <a:ln/>
+        </p:spPr>
+        <p:txBody>
           <a:bodyPr wrap="square" rtlCol="0" anchor="ctr"/>
           <a:lstStyle/>
           <a:p>
-            <a:pPr algn="r" indent="0" marL="0">
+            <a:pPr indent="0" marL="0">
               <a:buNone/>
             </a:pPr>
             <a:r>
-              <a:rPr lang="en-US" sz="900" dirty="0">
-                <a:solidFill>
-                  <a:srgbClr val="6B6660"/>
+              <a:rPr lang="en-US" sz="1600" b="1" dirty="0">
+                <a:solidFill>
+                  <a:srgbClr val="2A9D8F"/>
                 </a:solidFill>
                 <a:latin typeface="Calibri" pitchFamily="34" charset="0"/>
                 <a:ea typeface="Calibri" pitchFamily="34" charset="-122"/>
                 <a:cs typeface="Calibri" pitchFamily="34" charset="-120"/>
               </a:rPr>
-              <a:t>4 / 5</a:t>
-            </a:r>
-            <a:endParaRPr lang="en-US" sz="900" dirty="0"/>
-          </a:p>
-        </p:txBody>
-      </p:sp>
-      <p:sp>
-        <p:nvSpPr>
-          <p:cNvPr id="4" name="Text 2"/>
-          <p:cNvSpPr/>
-          <p:nvPr/>
-        </p:nvSpPr>
-        <p:spPr>
-          <a:xfrm>
-            <a:off x="457200" y="274320"/>
-            <a:ext cx="8229600" cy="640080"/>
+              <a:t>China</a:t>
+            </a:r>
+            <a:endParaRPr lang="en-US" sz="1600" dirty="0"/>
+          </a:p>
+        </p:txBody>
+      </p:sp>
+      <p:sp>
+        <p:nvSpPr>
+          <p:cNvPr id="8" name="Text 6"/>
+          <p:cNvSpPr/>
+          <p:nvPr/>
+        </p:nvSpPr>
+        <p:spPr>
+          <a:xfrm>
+            <a:off x="640080" y="1691640"/>
+            <a:ext cx="3566160" cy="2743200"/>
           </a:xfrm>
           <a:prstGeom prst="rect">
             <a:avLst/>
@@ -2480,50 +3021,11 @@
         </p:spPr>
         <p:txBody>
           <a:bodyPr wrap="square" rtlCol="0" anchor="ctr"/>
-          <a:lstStyle/>
-          <a:p>
-            <a:pPr indent="0" marL="0">
-              <a:buNone/>
-            </a:pPr>
-            <a:r>
-              <a:rPr lang="en-US" sz="2600" b="1" dirty="0">
-                <a:solidFill>
-                  <a:srgbClr val="1B2A4A"/>
-                </a:solidFill>
-                <a:latin typeface="Georgia" pitchFamily="34" charset="0"/>
-                <a:ea typeface="Georgia" pitchFamily="34" charset="-122"/>
-                <a:cs typeface="Georgia" pitchFamily="34" charset="-120"/>
-              </a:rPr>
-              <a:t>What Can YOU Do?</a:t>
-            </a:r>
-            <a:endParaRPr lang="en-US" sz="2600" dirty="0"/>
-          </a:p>
-        </p:txBody>
-      </p:sp>
-      <p:sp>
-        <p:nvSpPr>
-          <p:cNvPr id="5" name="Text 3"/>
-          <p:cNvSpPr/>
-          <p:nvPr/>
-        </p:nvSpPr>
-        <p:spPr>
-          <a:xfrm>
-            <a:off x="457200" y="1097280"/>
-            <a:ext cx="8229600" cy="3657600"/>
-          </a:xfrm>
-          <a:prstGeom prst="rect">
-            <a:avLst/>
-          </a:prstGeom>
-          <a:noFill/>
-          <a:ln/>
-        </p:spPr>
-        <p:txBody>
-          <a:bodyPr wrap="square" rtlCol="0" anchor="t"/>
           <a:lstStyle/>
           <a:p>
             <a:pPr marL="342900" indent="-342900">
               <a:spcAft>
-                <a:spcPts val="800"/>
+                <a:spcPts val="600"/>
               </a:spcAft>
               <a:buSzPct val="100000"/>
               <a:buChar char="•"/>
@@ -2537,14 +3039,14 @@
                 <a:ea typeface="Calibri" pitchFamily="34" charset="-122"/>
                 <a:cs typeface="Calibri" pitchFamily="34" charset="-120"/>
               </a:rPr>
-              <a:t>Reduce, Reuse, Recycle — minimise waste</a:t>
+              <a:t>10-year Yangtze fishing ban (2021–2031).</a:t>
             </a:r>
             <a:endParaRPr lang="en-US" sz="1400" dirty="0"/>
           </a:p>
           <a:p>
             <a:pPr marL="342900" indent="-342900">
               <a:spcAft>
-                <a:spcPts val="800"/>
+                <a:spcPts val="600"/>
               </a:spcAft>
               <a:buSzPct val="100000"/>
               <a:buChar char="•"/>
@@ -2558,14 +3060,14 @@
                 <a:ea typeface="Calibri" pitchFamily="34" charset="-122"/>
                 <a:cs typeface="Calibri" pitchFamily="34" charset="-120"/>
               </a:rPr>
-              <a:t>Walk, cycle, or use public transport — reduce emissions</a:t>
+              <a:t>Giant panda: ~1,100 → ~1,800 through conservation.</a:t>
             </a:r>
             <a:endParaRPr lang="en-US" sz="1400" dirty="0"/>
           </a:p>
           <a:p>
             <a:pPr marL="342900" indent="-342900">
               <a:spcAft>
-                <a:spcPts val="800"/>
+                <a:spcPts val="600"/>
               </a:spcAft>
               <a:buSzPct val="100000"/>
               <a:buChar char="•"/>
@@ -2579,14 +3081,14 @@
                 <a:ea typeface="Calibri" pitchFamily="34" charset="-122"/>
                 <a:cs typeface="Calibri" pitchFamily="34" charset="-120"/>
               </a:rPr>
-              <a:t>Save energy at home — turn off lights, reduce heating</a:t>
+              <a:t>World's largest tree-planting campaign.</a:t>
             </a:r>
             <a:endParaRPr lang="en-US" sz="1400" dirty="0"/>
           </a:p>
           <a:p>
             <a:pPr marL="342900" indent="-342900">
               <a:spcAft>
-                <a:spcPts val="800"/>
+                <a:spcPts val="600"/>
               </a:spcAft>
               <a:buSzPct val="100000"/>
               <a:buChar char="•"/>
@@ -2600,14 +3102,122 @@
                 <a:ea typeface="Calibri" pitchFamily="34" charset="-122"/>
                 <a:cs typeface="Calibri" pitchFamily="34" charset="-120"/>
               </a:rPr>
-              <a:t>Eat less meat — livestock farming produces huge emissions</a:t>
+              <a:t>Massive solar panel production.</a:t>
             </a:r>
             <a:endParaRPr lang="en-US" sz="1400" dirty="0"/>
           </a:p>
+        </p:txBody>
+      </p:sp>
+      <p:sp>
+        <p:nvSpPr>
+          <p:cNvPr id="9" name="Shape 7"/>
+          <p:cNvSpPr/>
+          <p:nvPr/>
+        </p:nvSpPr>
+        <p:spPr>
+          <a:xfrm>
+            <a:off x="4754880" y="1005840"/>
+            <a:ext cx="3931920" cy="3657600"/>
+          </a:xfrm>
+          <a:prstGeom prst="rect">
+            <a:avLst/>
+          </a:prstGeom>
+          <a:solidFill>
+            <a:srgbClr val="FFFFFF"/>
+          </a:solidFill>
+          <a:ln/>
+          <a:effectLst>
+            <a:outerShdw sx="100000" sy="100000" kx="0" ky="0" algn="bl" rotWithShape="0" blurRad="76200" dist="25400" dir="8100000">
+              <a:srgbClr val="000000">
+                <a:alpha val="12000"/>
+              </a:srgbClr>
+            </a:outerShdw>
+          </a:effectLst>
+        </p:spPr>
+      </p:sp>
+      <p:sp>
+        <p:nvSpPr>
+          <p:cNvPr id="10" name="Shape 8"/>
+          <p:cNvSpPr/>
+          <p:nvPr/>
+        </p:nvSpPr>
+        <p:spPr>
+          <a:xfrm>
+            <a:off x="4754880" y="1005840"/>
+            <a:ext cx="3931920" cy="64008"/>
+          </a:xfrm>
+          <a:prstGeom prst="rect">
+            <a:avLst/>
+          </a:prstGeom>
+          <a:solidFill>
+            <a:srgbClr val="E9C46A"/>
+          </a:solidFill>
+          <a:ln/>
+        </p:spPr>
+      </p:sp>
+      <p:sp>
+        <p:nvSpPr>
+          <p:cNvPr id="11" name="Text 9"/>
+          <p:cNvSpPr/>
+          <p:nvPr/>
+        </p:nvSpPr>
+        <p:spPr>
+          <a:xfrm>
+            <a:off x="4937760" y="1188720"/>
+            <a:ext cx="3566160" cy="457200"/>
+          </a:xfrm>
+          <a:prstGeom prst="rect">
+            <a:avLst/>
+          </a:prstGeom>
+          <a:noFill/>
+          <a:ln/>
+        </p:spPr>
+        <p:txBody>
+          <a:bodyPr wrap="square" rtlCol="0" anchor="ctr"/>
+          <a:lstStyle/>
+          <a:p>
+            <a:pPr indent="0" marL="0">
+              <a:buNone/>
+            </a:pPr>
+            <a:r>
+              <a:rPr lang="en-US" sz="1600" b="1" dirty="0">
+                <a:solidFill>
+                  <a:srgbClr val="E9C46A"/>
+                </a:solidFill>
+                <a:latin typeface="Calibri" pitchFamily="34" charset="0"/>
+                <a:ea typeface="Calibri" pitchFamily="34" charset="-122"/>
+                <a:cs typeface="Calibri" pitchFamily="34" charset="-120"/>
+              </a:rPr>
+              <a:t>Korea &amp; Germany</a:t>
+            </a:r>
+            <a:endParaRPr lang="en-US" sz="1600" dirty="0"/>
+          </a:p>
+        </p:txBody>
+      </p:sp>
+      <p:sp>
+        <p:nvSpPr>
+          <p:cNvPr id="12" name="Text 10"/>
+          <p:cNvSpPr/>
+          <p:nvPr/>
+        </p:nvSpPr>
+        <p:spPr>
+          <a:xfrm>
+            <a:off x="4937760" y="1691640"/>
+            <a:ext cx="3566160" cy="2743200"/>
+          </a:xfrm>
+          <a:prstGeom prst="rect">
+            <a:avLst/>
+          </a:prstGeom>
+          <a:noFill/>
+          <a:ln/>
+        </p:spPr>
+        <p:txBody>
+          <a:bodyPr wrap="square" rtlCol="0" anchor="ctr"/>
+          <a:lstStyle/>
           <a:p>
             <a:pPr marL="342900" indent="-342900">
               <a:spcAft>
-                <a:spcPts val="800"/>
+                <a:spcPts val="600"/>
               </a:spcAft>
               <a:buSzPct val="100000"/>
               <a:buChar char="•"/>
@@ -2621,14 +3231,14 @@
                 <a:ea typeface="Calibri" pitchFamily="34" charset="-122"/>
                 <a:cs typeface="Calibri" pitchFamily="34" charset="-120"/>
               </a:rPr>
-              <a:t>Plant trees — they absorb CO₂ and provide habitats</a:t>
+              <a:t>Korean DMZ: accidental nature reserve.</a:t>
             </a:r>
             <a:endParaRPr lang="en-US" sz="1400" dirty="0"/>
           </a:p>
           <a:p>
             <a:pPr marL="342900" indent="-342900">
               <a:spcAft>
-                <a:spcPts val="800"/>
+                <a:spcPts val="600"/>
               </a:spcAft>
               <a:buSzPct val="100000"/>
               <a:buChar char="•"/>
@@ -2642,7 +3252,49 @@
                 <a:ea typeface="Calibri" pitchFamily="34" charset="-122"/>
                 <a:cs typeface="Calibri" pitchFamily="34" charset="-120"/>
               </a:rPr>
-              <a:t>Spread awareness — educate others about environmental issues</a:t>
+              <a:t>Korea's Green New Deal investments.</a:t>
+            </a:r>
+            <a:endParaRPr lang="en-US" sz="1400" dirty="0"/>
+          </a:p>
+          <a:p>
+            <a:pPr marL="342900" indent="-342900">
+              <a:spcAft>
+                <a:spcPts val="600"/>
+              </a:spcAft>
+              <a:buSzPct val="100000"/>
+              <a:buChar char="•"/>
+            </a:pPr>
+            <a:r>
+              <a:rPr lang="en-US" sz="1400" dirty="0">
+                <a:solidFill>
+                  <a:srgbClr val="3D3A36"/>
+                </a:solidFill>
+                <a:latin typeface="Calibri" pitchFamily="34" charset="0"/>
+                <a:ea typeface="Calibri" pitchFamily="34" charset="-122"/>
+                <a:cs typeface="Calibri" pitchFamily="34" charset="-120"/>
+              </a:rPr>
+              <a:t>Germany's Energiewende: 46% renewable electricity.</a:t>
+            </a:r>
+            <a:endParaRPr lang="en-US" sz="1400" dirty="0"/>
+          </a:p>
+          <a:p>
+            <a:pPr marL="342900" indent="-342900">
+              <a:spcAft>
+                <a:spcPts val="600"/>
+              </a:spcAft>
+              <a:buSzPct val="100000"/>
+              <a:buChar char="•"/>
+            </a:pPr>
+            <a:r>
+              <a:rPr lang="en-US" sz="1400" dirty="0">
+                <a:solidFill>
+                  <a:srgbClr val="3D3A36"/>
+                </a:solidFill>
+                <a:latin typeface="Calibri" pitchFamily="34" charset="0"/>
+                <a:ea typeface="Calibri" pitchFamily="34" charset="-122"/>
+                <a:cs typeface="Calibri" pitchFamily="34" charset="-120"/>
+              </a:rPr>
+              <a:t>Schwarzwald acid rain recovery — success story.</a:t>
             </a:r>
             <a:endParaRPr lang="en-US" sz="1400" dirty="0"/>
           </a:p>
@@ -2656,13 +3308,13 @@
 </p:sld>
 </file>
 
-<file path=ppt/slides/slide5.xml><?xml version="1.0" encoding="utf-8"?>
+<file path=ppt/slides/slide6.xml><?xml version="1.0" encoding="utf-8"?>
 <p:sld xmlns:a="http://schemas.openxmlformats.org/drawingml/2006/main" xmlns:r="http://schemas.openxmlformats.org/officeDocument/2006/relationships" xmlns:p="http://schemas.openxmlformats.org/presentationml/2006/main">
-  <p:cSld name="Slide 5">
+  <p:cSld name="Slide 6">
     <p:bg>
       <p:bgPr>
         <a:solidFill>
-          <a:srgbClr val="1B2A4A"/>
+          <a:srgbClr val="FAF8F5"/>
         </a:solidFill>
       </p:bgPr>
     </p:bg>
@@ -2689,27 +3341,47 @@
         <p:spPr>
           <a:xfrm>
             <a:off x="0" y="0"/>
-            <a:ext cx="109728" cy="5143500"/>
-          </a:xfrm>
-          <a:prstGeom prst="rect">
-            <a:avLst/>
-          </a:prstGeom>
-          <a:solidFill>
-            <a:srgbClr val="E9C46A"/>
-          </a:solidFill>
-          <a:ln/>
-        </p:spPr>
-      </p:sp>
-      <p:sp>
-        <p:nvSpPr>
-          <p:cNvPr id="3" name="Text 1"/>
-          <p:cNvSpPr/>
-          <p:nvPr/>
-        </p:nvSpPr>
-        <p:spPr>
-          <a:xfrm>
-            <a:off x="731520" y="457200"/>
-            <a:ext cx="7772400" cy="731520"/>
+            <a:ext cx="9144000" cy="822960"/>
+          </a:xfrm>
+          <a:prstGeom prst="rect">
+            <a:avLst/>
+          </a:prstGeom>
+          <a:solidFill>
+            <a:srgbClr val="FFFFFF"/>
+          </a:solidFill>
+          <a:ln/>
+        </p:spPr>
+      </p:sp>
+      <p:sp>
+        <p:nvSpPr>
+          <p:cNvPr id="3" name="Shape 1"/>
+          <p:cNvSpPr/>
+          <p:nvPr/>
+        </p:nvSpPr>
+        <p:spPr>
+          <a:xfrm>
+            <a:off x="0" y="795528"/>
+            <a:ext cx="9144000" cy="27432"/>
+          </a:xfrm>
+          <a:prstGeom prst="rect">
+            <a:avLst/>
+          </a:prstGeom>
+          <a:solidFill>
+            <a:srgbClr val="2A9D8F"/>
+          </a:solidFill>
+          <a:ln/>
+        </p:spPr>
+      </p:sp>
+      <p:sp>
+        <p:nvSpPr>
+          <p:cNvPr id="4" name="Text 2"/>
+          <p:cNvSpPr/>
+          <p:nvPr/>
+        </p:nvSpPr>
+        <p:spPr>
+          <a:xfrm>
+            <a:off x="640080" y="91440"/>
+            <a:ext cx="7863840" cy="640080"/>
           </a:xfrm>
           <a:prstGeom prst="rect">
             <a:avLst/>
@@ -2718,37 +3390,37 @@
           <a:ln/>
         </p:spPr>
         <p:txBody>
-          <a:bodyPr wrap="square" rtlCol="0" anchor="ctr"/>
+          <a:bodyPr wrap="square" lIns="0" tIns="0" rIns="0" bIns="0" rtlCol="0" anchor="ctr"/>
           <a:lstStyle/>
           <a:p>
             <a:pPr indent="0" marL="0">
               <a:buNone/>
             </a:pPr>
             <a:r>
-              <a:rPr lang="en-US" sz="3200" b="1" dirty="0">
-                <a:solidFill>
-                  <a:srgbClr val="FFFFFF"/>
+              <a:rPr lang="en-US" sz="2200" b="1" dirty="0">
+                <a:solidFill>
+                  <a:srgbClr val="1B2A4A"/>
                 </a:solidFill>
                 <a:latin typeface="Georgia" pitchFamily="34" charset="0"/>
                 <a:ea typeface="Georgia" pitchFamily="34" charset="-122"/>
                 <a:cs typeface="Georgia" pitchFamily="34" charset="-120"/>
               </a:rPr>
-              <a:t>Key Takeaways</a:t>
-            </a:r>
-            <a:endParaRPr lang="en-US" sz="3200" dirty="0"/>
-          </a:p>
-        </p:txBody>
-      </p:sp>
-      <p:sp>
-        <p:nvSpPr>
-          <p:cNvPr id="4" name="Text 2"/>
-          <p:cNvSpPr/>
-          <p:nvPr/>
-        </p:nvSpPr>
-        <p:spPr>
-          <a:xfrm>
-            <a:off x="731520" y="1463040"/>
-            <a:ext cx="7772400" cy="3200400"/>
+              <a:t>Local Connections</a:t>
+            </a:r>
+            <a:endParaRPr lang="en-US" sz="2200" dirty="0"/>
+          </a:p>
+        </p:txBody>
+      </p:sp>
+      <p:sp>
+        <p:nvSpPr>
+          <p:cNvPr id="5" name="Text 3"/>
+          <p:cNvSpPr/>
+          <p:nvPr/>
+        </p:nvSpPr>
+        <p:spPr>
+          <a:xfrm>
+            <a:off x="640080" y="1005840"/>
+            <a:ext cx="7863840" cy="2926080"/>
           </a:xfrm>
           <a:prstGeom prst="rect">
             <a:avLst/>
@@ -2757,125 +3429,301 @@
           <a:ln/>
         </p:spPr>
         <p:txBody>
-          <a:bodyPr wrap="square" rtlCol="0" anchor="t"/>
+          <a:bodyPr wrap="square" rtlCol="0" anchor="ctr"/>
           <a:lstStyle/>
           <a:p>
             <a:pPr marL="342900" indent="-342900">
               <a:spcAft>
-                <a:spcPts val="1000"/>
+                <a:spcPts val="800"/>
               </a:spcAft>
               <a:buSzPct val="100000"/>
               <a:buChar char="•"/>
             </a:pPr>
             <a:r>
-              <a:rPr lang="en-US" sz="1500" dirty="0">
-                <a:solidFill>
-                  <a:srgbClr val="CADCFC"/>
+              <a:rPr lang="en-US" sz="1600" dirty="0">
+                <a:solidFill>
+                  <a:srgbClr val="3D3A36"/>
                 </a:solidFill>
                 <a:latin typeface="Calibri" pitchFamily="34" charset="0"/>
                 <a:ea typeface="Calibri" pitchFamily="34" charset="-122"/>
                 <a:cs typeface="Calibri" pitchFamily="34" charset="-120"/>
               </a:rPr>
-              <a:t>Deforestation, pollution, climate change — major human impacts</a:t>
-            </a:r>
-            <a:endParaRPr lang="en-US" sz="1500" dirty="0"/>
+              <a:t>Nanjing: Purple Mountain (Zijin Shan) — vital urban green space, 2,000+ plant species.</a:t>
+            </a:r>
+            <a:endParaRPr lang="en-US" sz="1600" dirty="0"/>
           </a:p>
           <a:p>
             <a:pPr marL="342900" indent="-342900">
               <a:spcAft>
-                <a:spcPts val="1000"/>
+                <a:spcPts val="800"/>
               </a:spcAft>
               <a:buSzPct val="100000"/>
               <a:buChar char="•"/>
             </a:pPr>
             <a:r>
-              <a:rPr lang="en-US" sz="1500" dirty="0">
-                <a:solidFill>
-                  <a:srgbClr val="CADCFC"/>
+              <a:rPr lang="en-US" sz="1600" dirty="0">
+                <a:solidFill>
+                  <a:srgbClr val="3D3A36"/>
                 </a:solidFill>
                 <a:latin typeface="Calibri" pitchFamily="34" charset="0"/>
                 <a:ea typeface="Calibri" pitchFamily="34" charset="-122"/>
                 <a:cs typeface="Calibri" pitchFamily="34" charset="-120"/>
               </a:rPr>
-              <a:t>Burning fossil fuels → more CO₂ → global warming</a:t>
-            </a:r>
-            <a:endParaRPr lang="en-US" sz="1500" dirty="0"/>
+              <a:t>Yangtze River protection laws reducing industrial pollution.</a:t>
+            </a:r>
+            <a:endParaRPr lang="en-US" sz="1600" dirty="0"/>
           </a:p>
           <a:p>
             <a:pPr marL="342900" indent="-342900">
               <a:spcAft>
-                <a:spcPts val="1000"/>
+                <a:spcPts val="800"/>
               </a:spcAft>
               <a:buSzPct val="100000"/>
               <a:buChar char="•"/>
             </a:pPr>
             <a:r>
-              <a:rPr lang="en-US" sz="1500" dirty="0">
-                <a:solidFill>
-                  <a:srgbClr val="CADCFC"/>
+              <a:rPr lang="en-US" sz="1600" dirty="0">
+                <a:solidFill>
+                  <a:srgbClr val="3D3A36"/>
                 </a:solidFill>
                 <a:latin typeface="Calibri" pitchFamily="34" charset="0"/>
                 <a:ea typeface="Calibri" pitchFamily="34" charset="-122"/>
                 <a:cs typeface="Calibri" pitchFamily="34" charset="-120"/>
               </a:rPr>
-              <a:t>Conservation, recycling, renewable energy — positive actions</a:t>
-            </a:r>
-            <a:endParaRPr lang="en-US" sz="1500" dirty="0"/>
+              <a:t>Xuanwu Lake restoration — improved water quality since 2010.</a:t>
+            </a:r>
+            <a:endParaRPr lang="en-US" sz="1600" dirty="0"/>
           </a:p>
           <a:p>
             <a:pPr marL="342900" indent="-342900">
               <a:spcAft>
-                <a:spcPts val="1000"/>
+                <a:spcPts val="800"/>
               </a:spcAft>
               <a:buSzPct val="100000"/>
               <a:buChar char="•"/>
             </a:pPr>
             <a:r>
-              <a:rPr lang="en-US" sz="1500" dirty="0">
-                <a:solidFill>
-                  <a:srgbClr val="CADCFC"/>
+              <a:rPr lang="en-US" sz="1600" dirty="0">
+                <a:solidFill>
+                  <a:srgbClr val="3D3A36"/>
                 </a:solidFill>
                 <a:latin typeface="Calibri" pitchFamily="34" charset="0"/>
                 <a:ea typeface="Calibri" pitchFamily="34" charset="-122"/>
                 <a:cs typeface="Calibri" pitchFamily="34" charset="-120"/>
               </a:rPr>
-              <a:t>Habitat loss is #1 cause of species extinction</a:t>
-            </a:r>
-            <a:endParaRPr lang="en-US" sz="1500" dirty="0"/>
-          </a:p>
-          <a:p>
-            <a:pPr marL="342900" indent="-342900">
-              <a:spcAft>
-                <a:spcPts val="1000"/>
-              </a:spcAft>
-              <a:buSzPct val="100000"/>
-              <a:buChar char="•"/>
-            </a:pPr>
-            <a:r>
-              <a:rPr lang="en-US" sz="1500" dirty="0">
-                <a:solidFill>
-                  <a:srgbClr val="CADCFC"/>
+              <a:t>NIS: what could our school do to reduce its environmental impact?</a:t>
+            </a:r>
+            <a:endParaRPr lang="en-US" sz="1600" dirty="0"/>
+          </a:p>
+        </p:txBody>
+      </p:sp>
+    </p:spTree>
+  </p:cSld>
+  <p:clrMapOvr>
+    <a:masterClrMapping/>
+  </p:clrMapOvr>
+</p:sld>
+</file>
+
+<file path=ppt/slides/slide7.xml><?xml version="1.0" encoding="utf-8"?>
+<p:sld xmlns:a="http://schemas.openxmlformats.org/drawingml/2006/main" xmlns:r="http://schemas.openxmlformats.org/officeDocument/2006/relationships" xmlns:p="http://schemas.openxmlformats.org/presentationml/2006/main">
+  <p:cSld name="Slide 7">
+    <p:bg>
+      <p:bgPr>
+        <a:solidFill>
+          <a:srgbClr val="FAF8F5"/>
+        </a:solidFill>
+      </p:bgPr>
+    </p:bg>
+    <p:spTree>
+      <p:nvGrpSpPr>
+        <p:cNvPr id="1" name=""/>
+        <p:cNvGrpSpPr/>
+        <p:nvPr/>
+      </p:nvGrpSpPr>
+      <p:grpSpPr>
+        <a:xfrm>
+          <a:off x="0" y="0"/>
+          <a:ext cx="0" cy="0"/>
+          <a:chOff x="0" y="0"/>
+          <a:chExt cx="0" cy="0"/>
+        </a:xfrm>
+      </p:grpSpPr>
+      <p:sp>
+        <p:nvSpPr>
+          <p:cNvPr id="2" name="Shape 0"/>
+          <p:cNvSpPr/>
+          <p:nvPr/>
+        </p:nvSpPr>
+        <p:spPr>
+          <a:xfrm>
+            <a:off x="0" y="0"/>
+            <a:ext cx="9144000" cy="822960"/>
+          </a:xfrm>
+          <a:prstGeom prst="rect">
+            <a:avLst/>
+          </a:prstGeom>
+          <a:solidFill>
+            <a:srgbClr val="FFFFFF"/>
+          </a:solidFill>
+          <a:ln/>
+        </p:spPr>
+      </p:sp>
+      <p:sp>
+        <p:nvSpPr>
+          <p:cNvPr id="3" name="Shape 1"/>
+          <p:cNvSpPr/>
+          <p:nvPr/>
+        </p:nvSpPr>
+        <p:spPr>
+          <a:xfrm>
+            <a:off x="0" y="795528"/>
+            <a:ext cx="9144000" cy="27432"/>
+          </a:xfrm>
+          <a:prstGeom prst="rect">
+            <a:avLst/>
+          </a:prstGeom>
+          <a:solidFill>
+            <a:srgbClr val="2A9D8F"/>
+          </a:solidFill>
+          <a:ln/>
+        </p:spPr>
+      </p:sp>
+      <p:sp>
+        <p:nvSpPr>
+          <p:cNvPr id="4" name="Text 2"/>
+          <p:cNvSpPr/>
+          <p:nvPr/>
+        </p:nvSpPr>
+        <p:spPr>
+          <a:xfrm>
+            <a:off x="640080" y="91440"/>
+            <a:ext cx="7863840" cy="640080"/>
+          </a:xfrm>
+          <a:prstGeom prst="rect">
+            <a:avLst/>
+          </a:prstGeom>
+          <a:noFill/>
+          <a:ln/>
+        </p:spPr>
+        <p:txBody>
+          <a:bodyPr wrap="square" lIns="0" tIns="0" rIns="0" bIns="0" rtlCol="0" anchor="ctr"/>
+          <a:lstStyle/>
+          <a:p>
+            <a:pPr indent="0" marL="0">
+              <a:buNone/>
+            </a:pPr>
+            <a:r>
+              <a:rPr lang="en-US" sz="2200" b="1" dirty="0">
+                <a:solidFill>
+                  <a:srgbClr val="1B2A4A"/>
+                </a:solidFill>
+                <a:latin typeface="Georgia" pitchFamily="34" charset="0"/>
+                <a:ea typeface="Georgia" pitchFamily="34" charset="-122"/>
+                <a:cs typeface="Georgia" pitchFamily="34" charset="-120"/>
+              </a:rPr>
+              <a:t>Recommended Videos</a:t>
+            </a:r>
+            <a:endParaRPr lang="en-US" sz="2200" dirty="0"/>
+          </a:p>
+        </p:txBody>
+      </p:sp>
+      <p:sp>
+        <p:nvSpPr>
+          <p:cNvPr id="5" name="Text 3"/>
+          <p:cNvSpPr/>
+          <p:nvPr/>
+        </p:nvSpPr>
+        <p:spPr>
+          <a:xfrm>
+            <a:off x="640080" y="868680"/>
+            <a:ext cx="7863840" cy="274320"/>
+          </a:xfrm>
+          <a:prstGeom prst="rect">
+            <a:avLst/>
+          </a:prstGeom>
+          <a:noFill/>
+          <a:ln/>
+        </p:spPr>
+        <p:txBody>
+          <a:bodyPr wrap="square" rtlCol="0" anchor="ctr"/>
+          <a:lstStyle/>
+          <a:p>
+            <a:pPr indent="0" marL="0">
+              <a:buNone/>
+            </a:pPr>
+            <a:r>
+              <a:rPr lang="en-US" sz="1200" i="1" dirty="0">
+                <a:solidFill>
+                  <a:srgbClr val="6B6660"/>
                 </a:solidFill>
                 <a:latin typeface="Calibri" pitchFamily="34" charset="0"/>
                 <a:ea typeface="Calibri" pitchFamily="34" charset="-122"/>
                 <a:cs typeface="Calibri" pitchFamily="34" charset="-120"/>
               </a:rPr>
-              <a:t>Individual actions matter: reduce, reuse, recycle, plant trees</a:t>
-            </a:r>
-            <a:endParaRPr lang="en-US" sz="1500" dirty="0"/>
-          </a:p>
-        </p:txBody>
-      </p:sp>
-      <p:sp>
-        <p:nvSpPr>
-          <p:cNvPr id="5" name="Text 3"/>
-          <p:cNvSpPr/>
-          <p:nvPr/>
-        </p:nvSpPr>
-        <p:spPr>
-          <a:xfrm>
-            <a:off x="731520" y="4572000"/>
-            <a:ext cx="7772400" cy="365760"/>
+              <a:t>Search these on YouTube to learn more.</a:t>
+            </a:r>
+            <a:endParaRPr lang="en-US" sz="1200" dirty="0"/>
+          </a:p>
+        </p:txBody>
+      </p:sp>
+      <p:sp>
+        <p:nvSpPr>
+          <p:cNvPr id="6" name="Shape 4"/>
+          <p:cNvSpPr/>
+          <p:nvPr/>
+        </p:nvSpPr>
+        <p:spPr>
+          <a:xfrm>
+            <a:off x="457200" y="1234440"/>
+            <a:ext cx="8229600" cy="1051560"/>
+          </a:xfrm>
+          <a:prstGeom prst="rect">
+            <a:avLst/>
+          </a:prstGeom>
+          <a:solidFill>
+            <a:srgbClr val="FFFFFF"/>
+          </a:solidFill>
+          <a:ln/>
+          <a:effectLst>
+            <a:outerShdw sx="100000" sy="100000" kx="0" ky="0" algn="bl" rotWithShape="0" blurRad="76200" dist="25400" dir="8100000">
+              <a:srgbClr val="000000">
+                <a:alpha val="12000"/>
+              </a:srgbClr>
+            </a:outerShdw>
+          </a:effectLst>
+        </p:spPr>
+      </p:sp>
+      <p:sp>
+        <p:nvSpPr>
+          <p:cNvPr id="7" name="Shape 5"/>
+          <p:cNvSpPr/>
+          <p:nvPr/>
+        </p:nvSpPr>
+        <p:spPr>
+          <a:xfrm>
+            <a:off x="457200" y="1234440"/>
+            <a:ext cx="64008" cy="1051560"/>
+          </a:xfrm>
+          <a:prstGeom prst="rect">
+            <a:avLst/>
+          </a:prstGeom>
+          <a:solidFill>
+            <a:srgbClr val="2A9D8F"/>
+          </a:solidFill>
+          <a:ln/>
+        </p:spPr>
+      </p:sp>
+      <p:sp>
+        <p:nvSpPr>
+          <p:cNvPr id="8" name="Text 6"/>
+          <p:cNvSpPr/>
+          <p:nvPr/>
+        </p:nvSpPr>
+        <p:spPr>
+          <a:xfrm>
+            <a:off x="640080" y="1325880"/>
+            <a:ext cx="457200" cy="457200"/>
           </a:xfrm>
           <a:prstGeom prst="rect">
             <a:avLst/>
@@ -2887,21 +3735,570 @@
           <a:bodyPr wrap="square" rtlCol="0" anchor="ctr"/>
           <a:lstStyle/>
           <a:p>
-            <a:pPr indent="0" marL="0">
+            <a:pPr algn="ctr" indent="0" marL="0">
               <a:buNone/>
             </a:pPr>
             <a:r>
-              <a:rPr lang="en-US" sz="1100" dirty="0">
-                <a:solidFill>
-                  <a:srgbClr val="E9C46A"/>
+              <a:rPr lang="en-US" sz="2000" dirty="0">
+                <a:solidFill>
+                  <a:srgbClr val="2A9D8F"/>
                 </a:solidFill>
                 <a:latin typeface="Calibri" pitchFamily="34" charset="0"/>
                 <a:ea typeface="Calibri" pitchFamily="34" charset="-122"/>
                 <a:cs typeface="Calibri" pitchFamily="34" charset="-120"/>
               </a:rPr>
+              <a:t>▶</a:t>
+            </a:r>
+            <a:endParaRPr lang="en-US" sz="2000" dirty="0"/>
+          </a:p>
+        </p:txBody>
+      </p:sp>
+      <p:sp>
+        <p:nvSpPr>
+          <p:cNvPr id="9" name="Text 7"/>
+          <p:cNvSpPr/>
+          <p:nvPr/>
+        </p:nvSpPr>
+        <p:spPr>
+          <a:xfrm>
+            <a:off x="1188720" y="1307592"/>
+            <a:ext cx="7132320" cy="411480"/>
+          </a:xfrm>
+          <a:prstGeom prst="rect">
+            <a:avLst/>
+          </a:prstGeom>
+          <a:noFill/>
+          <a:ln/>
+        </p:spPr>
+        <p:txBody>
+          <a:bodyPr wrap="square" rtlCol="0" anchor="ctr"/>
+          <a:lstStyle/>
+          <a:p>
+            <a:pPr indent="0" marL="0">
+              <a:buNone/>
+            </a:pPr>
+            <a:r>
+              <a:rPr lang="en-US" sz="1400" b="1" dirty="0">
+                <a:solidFill>
+                  <a:srgbClr val="1B2A4A"/>
+                </a:solidFill>
+                <a:latin typeface="Calibri" pitchFamily="34" charset="0"/>
+                <a:ea typeface="Calibri" pitchFamily="34" charset="-122"/>
+                <a:cs typeface="Calibri" pitchFamily="34" charset="-120"/>
+              </a:rPr>
+              <a:t>Is It Too Late to Stop Climate Change?</a:t>
+            </a:r>
+            <a:endParaRPr lang="en-US" sz="1400" dirty="0"/>
+          </a:p>
+        </p:txBody>
+      </p:sp>
+      <p:sp>
+        <p:nvSpPr>
+          <p:cNvPr id="10" name="Text 8"/>
+          <p:cNvSpPr/>
+          <p:nvPr/>
+        </p:nvSpPr>
+        <p:spPr>
+          <a:xfrm>
+            <a:off x="1188720" y="1691640"/>
+            <a:ext cx="7132320" cy="320040"/>
+          </a:xfrm>
+          <a:prstGeom prst="rect">
+            <a:avLst/>
+          </a:prstGeom>
+          <a:noFill/>
+          <a:ln/>
+        </p:spPr>
+        <p:txBody>
+          <a:bodyPr wrap="square" rtlCol="0" anchor="ctr"/>
+          <a:lstStyle/>
+          <a:p>
+            <a:pPr indent="0" marL="0">
+              <a:buNone/>
+            </a:pPr>
+            <a:r>
+              <a:rPr lang="en-US" sz="1100" dirty="0">
+                <a:solidFill>
+                  <a:srgbClr val="6B6660"/>
+                </a:solidFill>
+                <a:latin typeface="Calibri" pitchFamily="34" charset="0"/>
+                <a:ea typeface="Calibri" pitchFamily="34" charset="-122"/>
+                <a:cs typeface="Calibri" pitchFamily="34" charset="-120"/>
+              </a:rPr>
+              <a:t>Kurzgesagt  •  10 min</a:t>
+            </a:r>
+            <a:endParaRPr lang="en-US" sz="1100" dirty="0"/>
+          </a:p>
+        </p:txBody>
+      </p:sp>
+      <p:sp>
+        <p:nvSpPr>
+          <p:cNvPr id="11" name="Shape 9"/>
+          <p:cNvSpPr/>
+          <p:nvPr/>
+        </p:nvSpPr>
+        <p:spPr>
+          <a:xfrm>
+            <a:off x="457200" y="2423160"/>
+            <a:ext cx="8229600" cy="1051560"/>
+          </a:xfrm>
+          <a:prstGeom prst="rect">
+            <a:avLst/>
+          </a:prstGeom>
+          <a:solidFill>
+            <a:srgbClr val="FFFFFF"/>
+          </a:solidFill>
+          <a:ln/>
+          <a:effectLst>
+            <a:outerShdw sx="100000" sy="100000" kx="0" ky="0" algn="bl" rotWithShape="0" blurRad="76200" dist="25400" dir="8100000">
+              <a:srgbClr val="000000">
+                <a:alpha val="12000"/>
+              </a:srgbClr>
+            </a:outerShdw>
+          </a:effectLst>
+        </p:spPr>
+      </p:sp>
+      <p:sp>
+        <p:nvSpPr>
+          <p:cNvPr id="12" name="Shape 10"/>
+          <p:cNvSpPr/>
+          <p:nvPr/>
+        </p:nvSpPr>
+        <p:spPr>
+          <a:xfrm>
+            <a:off x="457200" y="2423160"/>
+            <a:ext cx="64008" cy="1051560"/>
+          </a:xfrm>
+          <a:prstGeom prst="rect">
+            <a:avLst/>
+          </a:prstGeom>
+          <a:solidFill>
+            <a:srgbClr val="2A9D8F"/>
+          </a:solidFill>
+          <a:ln/>
+        </p:spPr>
+      </p:sp>
+      <p:sp>
+        <p:nvSpPr>
+          <p:cNvPr id="13" name="Text 11"/>
+          <p:cNvSpPr/>
+          <p:nvPr/>
+        </p:nvSpPr>
+        <p:spPr>
+          <a:xfrm>
+            <a:off x="640080" y="2514600"/>
+            <a:ext cx="457200" cy="457200"/>
+          </a:xfrm>
+          <a:prstGeom prst="rect">
+            <a:avLst/>
+          </a:prstGeom>
+          <a:noFill/>
+          <a:ln/>
+        </p:spPr>
+        <p:txBody>
+          <a:bodyPr wrap="square" rtlCol="0" anchor="ctr"/>
+          <a:lstStyle/>
+          <a:p>
+            <a:pPr algn="ctr" indent="0" marL="0">
+              <a:buNone/>
+            </a:pPr>
+            <a:r>
+              <a:rPr lang="en-US" sz="2000" dirty="0">
+                <a:solidFill>
+                  <a:srgbClr val="2A9D8F"/>
+                </a:solidFill>
+                <a:latin typeface="Calibri" pitchFamily="34" charset="0"/>
+                <a:ea typeface="Calibri" pitchFamily="34" charset="-122"/>
+                <a:cs typeface="Calibri" pitchFamily="34" charset="-120"/>
+              </a:rPr>
+              <a:t>▶</a:t>
+            </a:r>
+            <a:endParaRPr lang="en-US" sz="2000" dirty="0"/>
+          </a:p>
+        </p:txBody>
+      </p:sp>
+      <p:sp>
+        <p:nvSpPr>
+          <p:cNvPr id="14" name="Text 12"/>
+          <p:cNvSpPr/>
+          <p:nvPr/>
+        </p:nvSpPr>
+        <p:spPr>
+          <a:xfrm>
+            <a:off x="1188720" y="2496312"/>
+            <a:ext cx="7132320" cy="411480"/>
+          </a:xfrm>
+          <a:prstGeom prst="rect">
+            <a:avLst/>
+          </a:prstGeom>
+          <a:noFill/>
+          <a:ln/>
+        </p:spPr>
+        <p:txBody>
+          <a:bodyPr wrap="square" rtlCol="0" anchor="ctr"/>
+          <a:lstStyle/>
+          <a:p>
+            <a:pPr indent="0" marL="0">
+              <a:buNone/>
+            </a:pPr>
+            <a:r>
+              <a:rPr lang="en-US" sz="1400" b="1" dirty="0">
+                <a:solidFill>
+                  <a:srgbClr val="1B2A4A"/>
+                </a:solidFill>
+                <a:latin typeface="Calibri" pitchFamily="34" charset="0"/>
+                <a:ea typeface="Calibri" pitchFamily="34" charset="-122"/>
+                <a:cs typeface="Calibri" pitchFamily="34" charset="-120"/>
+              </a:rPr>
+              <a:t>Human Impact on Biodiversity</a:t>
+            </a:r>
+            <a:endParaRPr lang="en-US" sz="1400" dirty="0"/>
+          </a:p>
+        </p:txBody>
+      </p:sp>
+      <p:sp>
+        <p:nvSpPr>
+          <p:cNvPr id="15" name="Text 13"/>
+          <p:cNvSpPr/>
+          <p:nvPr/>
+        </p:nvSpPr>
+        <p:spPr>
+          <a:xfrm>
+            <a:off x="1188720" y="2880360"/>
+            <a:ext cx="7132320" cy="320040"/>
+          </a:xfrm>
+          <a:prstGeom prst="rect">
+            <a:avLst/>
+          </a:prstGeom>
+          <a:noFill/>
+          <a:ln/>
+        </p:spPr>
+        <p:txBody>
+          <a:bodyPr wrap="square" rtlCol="0" anchor="ctr"/>
+          <a:lstStyle/>
+          <a:p>
+            <a:pPr indent="0" marL="0">
+              <a:buNone/>
+            </a:pPr>
+            <a:r>
+              <a:rPr lang="en-US" sz="1100" dirty="0">
+                <a:solidFill>
+                  <a:srgbClr val="6B6660"/>
+                </a:solidFill>
+                <a:latin typeface="Calibri" pitchFamily="34" charset="0"/>
+                <a:ea typeface="Calibri" pitchFamily="34" charset="-122"/>
+                <a:cs typeface="Calibri" pitchFamily="34" charset="-120"/>
+              </a:rPr>
+              <a:t>FuseSchool  •  5 min</a:t>
+            </a:r>
+            <a:endParaRPr lang="en-US" sz="1100" dirty="0"/>
+          </a:p>
+        </p:txBody>
+      </p:sp>
+      <p:sp>
+        <p:nvSpPr>
+          <p:cNvPr id="16" name="Shape 14"/>
+          <p:cNvSpPr/>
+          <p:nvPr/>
+        </p:nvSpPr>
+        <p:spPr>
+          <a:xfrm>
+            <a:off x="457200" y="3611880"/>
+            <a:ext cx="8229600" cy="1051560"/>
+          </a:xfrm>
+          <a:prstGeom prst="rect">
+            <a:avLst/>
+          </a:prstGeom>
+          <a:solidFill>
+            <a:srgbClr val="FFFFFF"/>
+          </a:solidFill>
+          <a:ln/>
+          <a:effectLst>
+            <a:outerShdw sx="100000" sy="100000" kx="0" ky="0" algn="bl" rotWithShape="0" blurRad="76200" dist="25400" dir="8100000">
+              <a:srgbClr val="000000">
+                <a:alpha val="12000"/>
+              </a:srgbClr>
+            </a:outerShdw>
+          </a:effectLst>
+        </p:spPr>
+      </p:sp>
+      <p:sp>
+        <p:nvSpPr>
+          <p:cNvPr id="17" name="Shape 15"/>
+          <p:cNvSpPr/>
+          <p:nvPr/>
+        </p:nvSpPr>
+        <p:spPr>
+          <a:xfrm>
+            <a:off x="457200" y="3611880"/>
+            <a:ext cx="64008" cy="1051560"/>
+          </a:xfrm>
+          <a:prstGeom prst="rect">
+            <a:avLst/>
+          </a:prstGeom>
+          <a:solidFill>
+            <a:srgbClr val="2A9D8F"/>
+          </a:solidFill>
+          <a:ln/>
+        </p:spPr>
+      </p:sp>
+      <p:sp>
+        <p:nvSpPr>
+          <p:cNvPr id="18" name="Text 16"/>
+          <p:cNvSpPr/>
+          <p:nvPr/>
+        </p:nvSpPr>
+        <p:spPr>
+          <a:xfrm>
+            <a:off x="640080" y="3703320"/>
+            <a:ext cx="457200" cy="457200"/>
+          </a:xfrm>
+          <a:prstGeom prst="rect">
+            <a:avLst/>
+          </a:prstGeom>
+          <a:noFill/>
+          <a:ln/>
+        </p:spPr>
+        <p:txBody>
+          <a:bodyPr wrap="square" rtlCol="0" anchor="ctr"/>
+          <a:lstStyle/>
+          <a:p>
+            <a:pPr algn="ctr" indent="0" marL="0">
+              <a:buNone/>
+            </a:pPr>
+            <a:r>
+              <a:rPr lang="en-US" sz="2000" dirty="0">
+                <a:solidFill>
+                  <a:srgbClr val="2A9D8F"/>
+                </a:solidFill>
+                <a:latin typeface="Calibri" pitchFamily="34" charset="0"/>
+                <a:ea typeface="Calibri" pitchFamily="34" charset="-122"/>
+                <a:cs typeface="Calibri" pitchFamily="34" charset="-120"/>
+              </a:rPr>
+              <a:t>▶</a:t>
+            </a:r>
+            <a:endParaRPr lang="en-US" sz="2000" dirty="0"/>
+          </a:p>
+        </p:txBody>
+      </p:sp>
+      <p:sp>
+        <p:nvSpPr>
+          <p:cNvPr id="19" name="Text 17"/>
+          <p:cNvSpPr/>
+          <p:nvPr/>
+        </p:nvSpPr>
+        <p:spPr>
+          <a:xfrm>
+            <a:off x="1188720" y="3685032"/>
+            <a:ext cx="7132320" cy="411480"/>
+          </a:xfrm>
+          <a:prstGeom prst="rect">
+            <a:avLst/>
+          </a:prstGeom>
+          <a:noFill/>
+          <a:ln/>
+        </p:spPr>
+        <p:txBody>
+          <a:bodyPr wrap="square" rtlCol="0" anchor="ctr"/>
+          <a:lstStyle/>
+          <a:p>
+            <a:pPr indent="0" marL="0">
+              <a:buNone/>
+            </a:pPr>
+            <a:r>
+              <a:rPr lang="en-US" sz="1400" b="1" dirty="0">
+                <a:solidFill>
+                  <a:srgbClr val="1B2A4A"/>
+                </a:solidFill>
+                <a:latin typeface="Calibri" pitchFamily="34" charset="0"/>
+                <a:ea typeface="Calibri" pitchFamily="34" charset="-122"/>
+                <a:cs typeface="Calibri" pitchFamily="34" charset="-120"/>
+              </a:rPr>
+              <a:t>Deforestation — Causes, Effects, Solutions</a:t>
+            </a:r>
+            <a:endParaRPr lang="en-US" sz="1400" dirty="0"/>
+          </a:p>
+        </p:txBody>
+      </p:sp>
+      <p:sp>
+        <p:nvSpPr>
+          <p:cNvPr id="20" name="Text 18"/>
+          <p:cNvSpPr/>
+          <p:nvPr/>
+        </p:nvSpPr>
+        <p:spPr>
+          <a:xfrm>
+            <a:off x="1188720" y="4069080"/>
+            <a:ext cx="7132320" cy="320040"/>
+          </a:xfrm>
+          <a:prstGeom prst="rect">
+            <a:avLst/>
+          </a:prstGeom>
+          <a:noFill/>
+          <a:ln/>
+        </p:spPr>
+        <p:txBody>
+          <a:bodyPr wrap="square" rtlCol="0" anchor="ctr"/>
+          <a:lstStyle/>
+          <a:p>
+            <a:pPr indent="0" marL="0">
+              <a:buNone/>
+            </a:pPr>
+            <a:r>
+              <a:rPr lang="en-US" sz="1100" dirty="0">
+                <a:solidFill>
+                  <a:srgbClr val="6B6660"/>
+                </a:solidFill>
+                <a:latin typeface="Calibri" pitchFamily="34" charset="0"/>
+                <a:ea typeface="Calibri" pitchFamily="34" charset="-122"/>
+                <a:cs typeface="Calibri" pitchFamily="34" charset="-120"/>
+              </a:rPr>
+              <a:t>National Geographic  •  4 min</a:t>
+            </a:r>
+            <a:endParaRPr lang="en-US" sz="1100" dirty="0"/>
+          </a:p>
+        </p:txBody>
+      </p:sp>
+    </p:spTree>
+  </p:cSld>
+  <p:clrMapOvr>
+    <a:masterClrMapping/>
+  </p:clrMapOvr>
+</p:sld>
+</file>
+
+<file path=ppt/slides/slide8.xml><?xml version="1.0" encoding="utf-8"?>
+<p:sld xmlns:a="http://schemas.openxmlformats.org/drawingml/2006/main" xmlns:r="http://schemas.openxmlformats.org/officeDocument/2006/relationships" xmlns:p="http://schemas.openxmlformats.org/presentationml/2006/main">
+  <p:cSld name="Slide 8">
+    <p:spTree>
+      <p:nvGrpSpPr>
+        <p:cNvPr id="1" name=""/>
+        <p:cNvGrpSpPr/>
+        <p:nvPr/>
+      </p:nvGrpSpPr>
+      <p:grpSpPr>
+        <a:xfrm>
+          <a:off x="0" y="0"/>
+          <a:ext cx="0" cy="0"/>
+          <a:chOff x="0" y="0"/>
+          <a:chExt cx="0" cy="0"/>
+        </a:xfrm>
+      </p:grpSpPr>
+      <p:sp>
+        <p:nvSpPr>
+          <p:cNvPr id="2" name="Shape 0"/>
+          <p:cNvSpPr/>
+          <p:nvPr/>
+        </p:nvSpPr>
+        <p:spPr>
+          <a:xfrm>
+            <a:off x="0" y="0"/>
+            <a:ext cx="9144000" cy="5143500"/>
+          </a:xfrm>
+          <a:prstGeom prst="rect">
+            <a:avLst/>
+          </a:prstGeom>
+          <a:solidFill>
+            <a:srgbClr val="1B2A4A"/>
+          </a:solidFill>
+          <a:ln/>
+        </p:spPr>
+      </p:sp>
+      <p:sp>
+        <p:nvSpPr>
+          <p:cNvPr id="3" name="Shape 1"/>
+          <p:cNvSpPr/>
+          <p:nvPr/>
+        </p:nvSpPr>
+        <p:spPr>
+          <a:xfrm>
+            <a:off x="0" y="4777740"/>
+            <a:ext cx="9144000" cy="365760"/>
+          </a:xfrm>
+          <a:prstGeom prst="rect">
+            <a:avLst/>
+          </a:prstGeom>
+          <a:solidFill>
+            <a:srgbClr val="2A9D8F"/>
+          </a:solidFill>
+          <a:ln/>
+        </p:spPr>
+      </p:sp>
+      <p:sp>
+        <p:nvSpPr>
+          <p:cNvPr id="4" name="Text 2"/>
+          <p:cNvSpPr/>
+          <p:nvPr/>
+        </p:nvSpPr>
+        <p:spPr>
+          <a:xfrm>
+            <a:off x="731520" y="1371600"/>
+            <a:ext cx="7680960" cy="914400"/>
+          </a:xfrm>
+          <a:prstGeom prst="rect">
+            <a:avLst/>
+          </a:prstGeom>
+          <a:noFill/>
+          <a:ln/>
+        </p:spPr>
+        <p:txBody>
+          <a:bodyPr wrap="square" rtlCol="0" anchor="ctr"/>
+          <a:lstStyle/>
+          <a:p>
+            <a:pPr algn="ctr" indent="0" marL="0">
+              <a:buNone/>
+            </a:pPr>
+            <a:r>
+              <a:rPr lang="en-US" sz="3600" b="1" dirty="0">
+                <a:solidFill>
+                  <a:srgbClr val="FFFFFF"/>
+                </a:solidFill>
+                <a:latin typeface="Georgia" pitchFamily="34" charset="0"/>
+                <a:ea typeface="Georgia" pitchFamily="34" charset="-122"/>
+                <a:cs typeface="Georgia" pitchFamily="34" charset="-120"/>
+              </a:rPr>
+              <a:t>Review &amp; Practise</a:t>
+            </a:r>
+            <a:endParaRPr lang="en-US" sz="3600" dirty="0"/>
+          </a:p>
+        </p:txBody>
+      </p:sp>
+      <p:sp>
+        <p:nvSpPr>
+          <p:cNvPr id="5" name="Text 3"/>
+          <p:cNvSpPr/>
+          <p:nvPr/>
+        </p:nvSpPr>
+        <p:spPr>
+          <a:xfrm>
+            <a:off x="731520" y="2560320"/>
+            <a:ext cx="7680960" cy="548640"/>
+          </a:xfrm>
+          <a:prstGeom prst="rect">
+            <a:avLst/>
+          </a:prstGeom>
+          <a:noFill/>
+          <a:ln/>
+        </p:spPr>
+        <p:txBody>
+          <a:bodyPr wrap="square" rtlCol="0" anchor="ctr"/>
+          <a:lstStyle/>
+          <a:p>
+            <a:pPr algn="ctr" indent="0" marL="0">
+              <a:buNone/>
+            </a:pPr>
+            <a:r>
+              <a:rPr lang="en-US" sz="2000" dirty="0">
+                <a:solidFill>
+                  <a:srgbClr val="2A9D8F"/>
+                </a:solidFill>
+                <a:latin typeface="Calibri" pitchFamily="34" charset="0"/>
+                <a:ea typeface="Calibri" pitchFamily="34" charset="-122"/>
+                <a:cs typeface="Calibri" pitchFamily="34" charset="-120"/>
+              </a:rPr>
               <a:t>mrzocchi.com</a:t>
             </a:r>
-            <a:endParaRPr lang="en-US" sz="1100" dirty="0"/>
+            <a:endParaRPr lang="en-US" sz="2000" dirty="0"/>
           </a:p>
         </p:txBody>
       </p:sp>
